--- a/outputs/presentation/RAG_Hallucination_Capstone.pptx
+++ b/outputs/presentation/RAG_Hallucination_Capstone.pptx
@@ -116,6 +116,378 @@
     </a:lvl9pPr>
   </p:defaultTextStyle>
 </p:presentation>
+</file>
+
+<file path=ppt/charts/chart1.xml><?xml version="1.0" encoding="utf-8"?>
+<c:chartSpace xmlns:c="http://schemas.openxmlformats.org/drawingml/2006/chart" xmlns:a="http://schemas.openxmlformats.org/drawingml/2006/main" xmlns:r="http://schemas.openxmlformats.org/officeDocument/2006/relationships">
+  <c:date1904 val="0"/>
+  <c:chart>
+    <c:autoTitleDeleted val="0"/>
+    <c:plotArea>
+      <c:barChart>
+        <c:barDir val="col"/>
+        <c:grouping val="clustered"/>
+        <c:ser>
+          <c:idx val="0"/>
+          <c:order val="0"/>
+          <c:tx>
+            <c:strRef>
+              <c:f>Sheet1!$B$1</c:f>
+              <c:strCache>
+                <c:ptCount val="1"/>
+                <c:pt idx="0">
+                  <c:v>Delta: context halluc. (lower better)</c:v>
+                </c:pt>
+              </c:strCache>
+            </c:strRef>
+          </c:tx>
+          <c:cat>
+            <c:strRef>
+              <c:f>Sheet1!$A$2:$A$7</c:f>
+              <c:strCache>
+                <c:ptCount val="6"/>
+                <c:pt idx="0">
+                  <c:v>baseline cot</c:v>
+                </c:pt>
+                <c:pt idx="1">
+                  <c:v>baseline strict cite</c:v>
+                </c:pt>
+                <c:pt idx="2">
+                  <c:v>k10</c:v>
+                </c:pt>
+                <c:pt idx="3">
+                  <c:v>k3</c:v>
+                </c:pt>
+                <c:pt idx="4">
+                  <c:v>k8</c:v>
+                </c:pt>
+                <c:pt idx="5">
+                  <c:v>k8 cot</c:v>
+                </c:pt>
+              </c:strCache>
+            </c:strRef>
+          </c:cat>
+          <c:val>
+            <c:numRef>
+              <c:f>Sheet1!$B$2:$B$7</c:f>
+              <c:numCache>
+                <c:formatCode>General</c:formatCode>
+                <c:ptCount val="6"/>
+                <c:pt idx="0">
+                  <c:v>0.0</c:v>
+                </c:pt>
+                <c:pt idx="1">
+                  <c:v>0.0</c:v>
+                </c:pt>
+                <c:pt idx="2">
+                  <c:v>-0.0222</c:v>
+                </c:pt>
+                <c:pt idx="3">
+                  <c:v>-0.075</c:v>
+                </c:pt>
+                <c:pt idx="4">
+                  <c:v>0.0</c:v>
+                </c:pt>
+                <c:pt idx="5">
+                  <c:v>0.025</c:v>
+                </c:pt>
+              </c:numCache>
+            </c:numRef>
+          </c:val>
+        </c:ser>
+        <c:ser>
+          <c:idx val="1"/>
+          <c:order val="1"/>
+          <c:tx>
+            <c:strRef>
+              <c:f>Sheet1!$C$1</c:f>
+              <c:strCache>
+                <c:ptCount val="1"/>
+                <c:pt idx="0">
+                  <c:v>Delta: answer correctness (higher better)</c:v>
+                </c:pt>
+              </c:strCache>
+            </c:strRef>
+          </c:tx>
+          <c:cat>
+            <c:strRef>
+              <c:f>Sheet1!$A$2:$A$7</c:f>
+              <c:strCache>
+                <c:ptCount val="6"/>
+                <c:pt idx="0">
+                  <c:v>baseline cot</c:v>
+                </c:pt>
+                <c:pt idx="1">
+                  <c:v>baseline strict cite</c:v>
+                </c:pt>
+                <c:pt idx="2">
+                  <c:v>k10</c:v>
+                </c:pt>
+                <c:pt idx="3">
+                  <c:v>k3</c:v>
+                </c:pt>
+                <c:pt idx="4">
+                  <c:v>k8</c:v>
+                </c:pt>
+                <c:pt idx="5">
+                  <c:v>k8 cot</c:v>
+                </c:pt>
+              </c:strCache>
+            </c:strRef>
+          </c:cat>
+          <c:val>
+            <c:numRef>
+              <c:f>Sheet1!$C$2:$C$7</c:f>
+              <c:numCache>
+                <c:formatCode>General</c:formatCode>
+                <c:ptCount val="6"/>
+                <c:pt idx="0">
+                  <c:v>-0.0159</c:v>
+                </c:pt>
+                <c:pt idx="1">
+                  <c:v>-0.0241</c:v>
+                </c:pt>
+                <c:pt idx="2">
+                  <c:v>0.0157</c:v>
+                </c:pt>
+                <c:pt idx="3">
+                  <c:v>-0.0252</c:v>
+                </c:pt>
+                <c:pt idx="4">
+                  <c:v>0.0178</c:v>
+                </c:pt>
+                <c:pt idx="5">
+                  <c:v>0.0257</c:v>
+                </c:pt>
+              </c:numCache>
+            </c:numRef>
+          </c:val>
+        </c:ser>
+        <c:dLbls>
+          <c:showLegendKey val="0"/>
+          <c:showVal val="1"/>
+          <c:showCatName val="0"/>
+          <c:showSerName val="0"/>
+          <c:showPercent val="0"/>
+          <c:showBubbleSize val="0"/>
+          <c:showLeaderLines val="1"/>
+        </c:dLbls>
+        <c:axId val="-2068027336"/>
+        <c:axId val="-2113994440"/>
+      </c:barChart>
+      <c:catAx>
+        <c:axId val="-2068027336"/>
+        <c:scaling>
+          <c:orientation val="minMax"/>
+        </c:scaling>
+        <c:delete val="0"/>
+        <c:axPos val="b"/>
+        <c:majorTickMark val="out"/>
+        <c:minorTickMark val="none"/>
+        <c:tickLblPos val="nextTo"/>
+        <c:crossAx val="-2113994440"/>
+        <c:crosses val="autoZero"/>
+        <c:auto val="1"/>
+        <c:lblAlgn val="ctr"/>
+        <c:lblOffset val="100"/>
+        <c:noMultiLvlLbl val="0"/>
+      </c:catAx>
+      <c:valAx>
+        <c:axId val="-2113994440"/>
+        <c:scaling/>
+        <c:delete val="0"/>
+        <c:axPos val="l"/>
+        <c:majorGridlines/>
+        <c:majorTickMark val="out"/>
+        <c:minorTickMark val="none"/>
+        <c:tickLblPos val="nextTo"/>
+        <c:crossAx val="-2068027336"/>
+        <c:crosses val="autoZero"/>
+      </c:valAx>
+    </c:plotArea>
+    <c:legend>
+      <c:legendPos val="b"/>
+      <c:overlay val="0"/>
+    </c:legend>
+    <c:dispBlanksAs val="gap"/>
+  </c:chart>
+  <c:txPr>
+    <a:bodyPr/>
+    <a:lstStyle/>
+    <a:p>
+      <a:pPr>
+        <a:defRPr sz="1800"/>
+      </a:pPr>
+      <a:endParaRPr lang="en-US"/>
+    </a:p>
+  </c:txPr>
+  <c:externalData r:id="rId1">
+    <c:autoUpdate val="0"/>
+  </c:externalData>
+</c:chartSpace>
+</file>
+
+<file path=ppt/charts/chart2.xml><?xml version="1.0" encoding="utf-8"?>
+<c:chartSpace xmlns:c="http://schemas.openxmlformats.org/drawingml/2006/chart" xmlns:a="http://schemas.openxmlformats.org/drawingml/2006/main" xmlns:r="http://schemas.openxmlformats.org/officeDocument/2006/relationships">
+  <c:date1904 val="0"/>
+  <c:chart>
+    <c:autoTitleDeleted val="0"/>
+    <c:plotArea>
+      <c:barChart>
+        <c:barDir val="col"/>
+        <c:grouping val="clustered"/>
+        <c:ser>
+          <c:idx val="0"/>
+          <c:order val="0"/>
+          <c:tx>
+            <c:strRef>
+              <c:f>Sheet1!$B$1</c:f>
+              <c:strCache>
+                <c:ptCount val="1"/>
+                <c:pt idx="0">
+                  <c:v>Finance (10-K x2)</c:v>
+                </c:pt>
+              </c:strCache>
+            </c:strRef>
+          </c:tx>
+          <c:cat>
+            <c:strRef>
+              <c:f>Sheet1!$A$2:$A$4</c:f>
+              <c:strCache>
+                <c:ptCount val="3"/>
+                <c:pt idx="0">
+                  <c:v>Recall@5</c:v>
+                </c:pt>
+                <c:pt idx="1">
+                  <c:v>Context halluc.</c:v>
+                </c:pt>
+                <c:pt idx="2">
+                  <c:v>Answer correct.</c:v>
+                </c:pt>
+              </c:strCache>
+            </c:strRef>
+          </c:cat>
+          <c:val>
+            <c:numRef>
+              <c:f>Sheet1!$B$2:$B$4</c:f>
+              <c:numCache>
+                <c:formatCode>General</c:formatCode>
+                <c:ptCount val="3"/>
+                <c:pt idx="0">
+                  <c:v>0.85</c:v>
+                </c:pt>
+                <c:pt idx="1">
+                  <c:v>0.15</c:v>
+                </c:pt>
+                <c:pt idx="2">
+                  <c:v>0.7169219086183458</c:v>
+                </c:pt>
+              </c:numCache>
+            </c:numRef>
+          </c:val>
+        </c:ser>
+        <c:ser>
+          <c:idx val="1"/>
+          <c:order val="1"/>
+          <c:tx>
+            <c:strRef>
+              <c:f>Sheet1!$C$1</c:f>
+              <c:strCache>
+                <c:ptCount val="1"/>
+                <c:pt idx="0">
+                  <c:v>FDA labels (x2)</c:v>
+                </c:pt>
+              </c:strCache>
+            </c:strRef>
+          </c:tx>
+          <c:cat>
+            <c:strRef>
+              <c:f>Sheet1!$A$2:$A$4</c:f>
+              <c:strCache>
+                <c:ptCount val="3"/>
+                <c:pt idx="0">
+                  <c:v>Recall@5</c:v>
+                </c:pt>
+                <c:pt idx="1">
+                  <c:v>Context halluc.</c:v>
+                </c:pt>
+                <c:pt idx="2">
+                  <c:v>Answer correct.</c:v>
+                </c:pt>
+              </c:strCache>
+            </c:strRef>
+          </c:cat>
+          <c:val>
+            <c:numRef>
+              <c:f>Sheet1!$C$2:$C$4</c:f>
+              <c:numCache>
+                <c:formatCode>General</c:formatCode>
+                <c:ptCount val="3"/>
+                <c:pt idx="0">
+                  <c:v>0.6499999999999999</c:v>
+                </c:pt>
+                <c:pt idx="1">
+                  <c:v>0.1</c:v>
+                </c:pt>
+                <c:pt idx="2">
+                  <c:v>0.6681882618022446</c:v>
+                </c:pt>
+              </c:numCache>
+            </c:numRef>
+          </c:val>
+        </c:ser>
+        <c:axId val="-2068027336"/>
+        <c:axId val="-2113994440"/>
+      </c:barChart>
+      <c:catAx>
+        <c:axId val="-2068027336"/>
+        <c:scaling>
+          <c:orientation val="minMax"/>
+        </c:scaling>
+        <c:delete val="0"/>
+        <c:axPos val="b"/>
+        <c:majorTickMark val="out"/>
+        <c:minorTickMark val="none"/>
+        <c:tickLblPos val="nextTo"/>
+        <c:crossAx val="-2113994440"/>
+        <c:crosses val="autoZero"/>
+        <c:auto val="1"/>
+        <c:lblAlgn val="ctr"/>
+        <c:lblOffset val="100"/>
+        <c:noMultiLvlLbl val="0"/>
+      </c:catAx>
+      <c:valAx>
+        <c:axId val="-2113994440"/>
+        <c:scaling/>
+        <c:delete val="0"/>
+        <c:axPos val="l"/>
+        <c:majorGridlines/>
+        <c:majorTickMark val="out"/>
+        <c:minorTickMark val="none"/>
+        <c:tickLblPos val="nextTo"/>
+        <c:crossAx val="-2068027336"/>
+        <c:crosses val="autoZero"/>
+      </c:valAx>
+    </c:plotArea>
+    <c:legend>
+      <c:legendPos val="b"/>
+    </c:legend>
+    <c:dispBlanksAs val="gap"/>
+  </c:chart>
+  <c:txPr>
+    <a:bodyPr/>
+    <a:lstStyle/>
+    <a:p>
+      <a:pPr>
+        <a:defRPr sz="1800"/>
+      </a:pPr>
+      <a:endParaRPr lang="en-US"/>
+    </a:p>
+  </c:txPr>
+  <c:externalData r:id="rId1">
+    <c:autoUpdate val="0"/>
+  </c:externalData>
+</c:chartSpace>
 </file>
 
 <file path=ppt/slideLayouts/slideLayout1.xml><?xml version="1.0" encoding="utf-8"?>
@@ -3092,6 +3464,14 @@
 <file path=ppt/slides/slide1.xml><?xml version="1.0" encoding="utf-8"?>
 <p:sld xmlns:a="http://schemas.openxmlformats.org/drawingml/2006/main" xmlns:p="http://schemas.openxmlformats.org/presentationml/2006/main" xmlns:r="http://schemas.openxmlformats.org/officeDocument/2006/relationships">
   <p:cSld>
+    <p:bg>
+      <p:bgPr>
+        <a:solidFill>
+          <a:srgbClr val="F8FAFC"/>
+        </a:solidFill>
+        <a:effectLst/>
+      </p:bgPr>
+    </p:bg>
     <p:spTree>
       <p:nvGrpSpPr>
         <p:cNvPr id="1" name=""/>
@@ -3114,13 +3494,20 @@
           <a:bodyPr/>
           <a:lstStyle/>
           <a:p>
-            <a:r>
-              <a:t>Comparing RAG System Designs for Hallucination Reduction</a:t>
-            </a:r>
-          </a:p>
-          <a:p>
-            <a:r>
-              <a:t>in Finance and Healthcare Documents</a:t>
+            <a:pPr>
+              <a:defRPr sz="3200">
+                <a:solidFill>
+                  <a:srgbClr val="1E3A5F"/>
+                </a:solidFill>
+              </a:defRPr>
+            </a:pPr>
+            <a:r>
+              <a:t>RAG Designs for Fewer Hallucinations:</a:t>
+            </a:r>
+          </a:p>
+          <a:p>
+            <a:r>
+              <a:t>Finance &amp; Healthcare Documents</a:t>
             </a:r>
           </a:p>
         </p:txBody>
@@ -3141,23 +3528,12 @@
           <a:lstStyle/>
           <a:p>
             <a:r>
-              <a:t>[Your Name]</a:t>
-            </a:r>
-          </a:p>
-          <a:p>
-            <a:r>
-              <a:t>[Course / Class]</a:t>
-            </a:r>
-          </a:p>
-          <a:p>
-            <a:r>
-              <a:t>Adviser: [Adviser Name]</a:t>
-            </a:r>
-          </a:p>
-          <a:p/>
-          <a:p>
-            <a:r>
-              <a:t>Finance QA Hallucinations — Capstone Presentation</a:t>
+              <a:t>[Your Name]  |  [Class]  |  Adviser: [Adviser Name]</a:t>
+            </a:r>
+          </a:p>
+          <a:p>
+            <a:r>
+              <a:t>Capstone — Finance QA Hallucinations</a:t>
             </a:r>
           </a:p>
         </p:txBody>
@@ -3173,6 +3549,14 @@
 <file path=ppt/slides/slide10.xml><?xml version="1.0" encoding="utf-8"?>
 <p:sld xmlns:a="http://schemas.openxmlformats.org/drawingml/2006/main" xmlns:p="http://schemas.openxmlformats.org/presentationml/2006/main" xmlns:r="http://schemas.openxmlformats.org/officeDocument/2006/relationships">
   <p:cSld>
+    <p:bg>
+      <p:bgPr>
+        <a:solidFill>
+          <a:srgbClr val="F8FAFC"/>
+        </a:solidFill>
+        <a:effectLst/>
+      </p:bgPr>
+    </p:bg>
     <p:spTree>
       <p:nvGrpSpPr>
         <p:cNvPr id="1" name=""/>
@@ -3182,61 +3566,264 @@
       <p:grpSpPr/>
       <p:sp>
         <p:nvSpPr>
-          <p:cNvPr id="2" name="Title 1"/>
-          <p:cNvSpPr>
-            <a:spLocks noGrp="1"/>
-          </p:cNvSpPr>
-          <p:nvPr>
-            <p:ph type="title"/>
-          </p:nvPr>
-        </p:nvSpPr>
-        <p:spPr/>
-        <p:txBody>
-          <a:bodyPr/>
-          <a:lstStyle/>
-          <a:p>
-            <a:r>
-              <a:t>Chunking Presets (Tier B) — Reported Separately</a:t>
-            </a:r>
-          </a:p>
-        </p:txBody>
-      </p:sp>
-      <p:sp>
-        <p:nvSpPr>
-          <p:cNvPr id="3" name="Content Placeholder 2"/>
-          <p:cNvSpPr>
-            <a:spLocks noGrp="1"/>
-          </p:cNvSpPr>
-          <p:nvPr>
-            <p:ph idx="1"/>
-          </p:nvPr>
-        </p:nvSpPr>
-        <p:spPr/>
-        <p:txBody>
-          <a:bodyPr/>
-          <a:lstStyle/>
+          <p:cNvPr id="2" name="Rectangle 1"/>
+          <p:cNvSpPr/>
+          <p:nvPr/>
+        </p:nvSpPr>
+        <p:spPr>
+          <a:xfrm>
+            <a:off x="0" y="0"/>
+            <a:ext cx="9144000" cy="1051560"/>
+          </a:xfrm>
+          <a:prstGeom prst="rect">
+            <a:avLst/>
+          </a:prstGeom>
+          <a:solidFill>
+            <a:srgbClr val="1E3A5F"/>
+          </a:solidFill>
+          <a:ln>
+            <a:noFill/>
+          </a:ln>
+        </p:spPr>
+        <p:style>
+          <a:lnRef idx="1">
+            <a:schemeClr val="accent1"/>
+          </a:lnRef>
+          <a:fillRef idx="3">
+            <a:schemeClr val="accent1"/>
+          </a:fillRef>
+          <a:effectRef idx="2">
+            <a:schemeClr val="accent1"/>
+          </a:effectRef>
+          <a:fontRef idx="minor">
+            <a:schemeClr val="lt1"/>
+          </a:fontRef>
+        </p:style>
+        <p:txBody>
+          <a:bodyPr rtlCol="0" anchor="ctr" lIns="457200" tIns="228600" wrap="square"/>
+          <a:lstStyle/>
+          <a:p>
+            <a:pPr algn="l">
+              <a:defRPr sz="2800" b="1">
+                <a:solidFill>
+                  <a:srgbClr val="FFFFFF"/>
+                </a:solidFill>
+              </a:defRPr>
+            </a:pPr>
+            <a:r>
+              <a:t>Design takeaway</a:t>
+            </a:r>
+          </a:p>
           <a:p>
             <a:pPr>
-              <a:defRPr sz="1800"/>
+              <a:defRPr sz="1400">
+                <a:solidFill>
+                  <a:srgbClr val="E2E8F0"/>
+                </a:solidFill>
+              </a:defRPr>
             </a:pPr>
             <a:r>
-              <a:t>Fine / coarse / deep-header chunking each regenerates gold—questions differ from Tier A.</a:t>
-            </a:r>
-          </a:p>
+              <a:t>Tradeoffs, not a single winner</a:t>
+            </a:r>
+          </a:p>
+        </p:txBody>
+      </p:sp>
+      <p:sp>
+        <p:nvSpPr>
+          <p:cNvPr id="3" name="Oval 2"/>
+          <p:cNvSpPr/>
+          <p:nvPr/>
+        </p:nvSpPr>
+        <p:spPr>
+          <a:xfrm>
+            <a:off x="1097280" y="1920240"/>
+            <a:ext cx="1828800" cy="1828800"/>
+          </a:xfrm>
+          <a:prstGeom prst="ellipse">
+            <a:avLst/>
+          </a:prstGeom>
+          <a:solidFill>
+            <a:srgbClr val="2B7CA8"/>
+          </a:solidFill>
+        </p:spPr>
+        <p:style>
+          <a:lnRef idx="1">
+            <a:schemeClr val="accent1"/>
+          </a:lnRef>
+          <a:fillRef idx="3">
+            <a:schemeClr val="accent1"/>
+          </a:fillRef>
+          <a:effectRef idx="2">
+            <a:schemeClr val="accent1"/>
+          </a:effectRef>
+          <a:fontRef idx="minor">
+            <a:schemeClr val="lt1"/>
+          </a:fontRef>
+        </p:style>
+        <p:txBody>
+          <a:bodyPr rtlCol="0" anchor="ctr"/>
+          <a:lstStyle/>
+          <a:p>
+            <a:pPr algn="ctr">
+              <a:defRPr sz="1200" b="1">
+                <a:solidFill>
+                  <a:srgbClr val="FFFFFF"/>
+                </a:solidFill>
+              </a:defRPr>
+            </a:pPr>
+            <a:r>
+              <a:t>Retrieval depth (k)</a:t>
+            </a:r>
+          </a:p>
+        </p:txBody>
+      </p:sp>
+      <p:sp>
+        <p:nvSpPr>
+          <p:cNvPr id="4" name="Oval 3"/>
+          <p:cNvSpPr/>
+          <p:nvPr/>
+        </p:nvSpPr>
+        <p:spPr>
+          <a:xfrm>
+            <a:off x="3474720" y="1920240"/>
+            <a:ext cx="1828800" cy="1828800"/>
+          </a:xfrm>
+          <a:prstGeom prst="ellipse">
+            <a:avLst/>
+          </a:prstGeom>
+          <a:solidFill>
+            <a:srgbClr val="1E3A5F"/>
+          </a:solidFill>
+        </p:spPr>
+        <p:style>
+          <a:lnRef idx="1">
+            <a:schemeClr val="accent1"/>
+          </a:lnRef>
+          <a:fillRef idx="3">
+            <a:schemeClr val="accent1"/>
+          </a:fillRef>
+          <a:effectRef idx="2">
+            <a:schemeClr val="accent1"/>
+          </a:effectRef>
+          <a:fontRef idx="minor">
+            <a:schemeClr val="lt1"/>
+          </a:fontRef>
+        </p:style>
+        <p:txBody>
+          <a:bodyPr rtlCol="0" anchor="ctr"/>
+          <a:lstStyle/>
+          <a:p>
+            <a:pPr algn="ctr">
+              <a:defRPr sz="1200" b="1">
+                <a:solidFill>
+                  <a:srgbClr val="FFFFFF"/>
+                </a:solidFill>
+              </a:defRPr>
+            </a:pPr>
+            <a:r>
+              <a:t>Prompting (CoT)</a:t>
+            </a:r>
+          </a:p>
+        </p:txBody>
+      </p:sp>
+      <p:sp>
+        <p:nvSpPr>
+          <p:cNvPr id="5" name="Oval 4"/>
+          <p:cNvSpPr/>
+          <p:nvPr/>
+        </p:nvSpPr>
+        <p:spPr>
+          <a:xfrm>
+            <a:off x="5852160" y="1920240"/>
+            <a:ext cx="1828800" cy="1828800"/>
+          </a:xfrm>
+          <a:prstGeom prst="ellipse">
+            <a:avLst/>
+          </a:prstGeom>
+          <a:solidFill>
+            <a:srgbClr val="276F47"/>
+          </a:solidFill>
+        </p:spPr>
+        <p:style>
+          <a:lnRef idx="1">
+            <a:schemeClr val="accent1"/>
+          </a:lnRef>
+          <a:fillRef idx="3">
+            <a:schemeClr val="accent1"/>
+          </a:fillRef>
+          <a:effectRef idx="2">
+            <a:schemeClr val="accent1"/>
+          </a:effectRef>
+          <a:fontRef idx="minor">
+            <a:schemeClr val="lt1"/>
+          </a:fontRef>
+        </p:style>
+        <p:txBody>
+          <a:bodyPr rtlCol="0" anchor="ctr"/>
+          <a:lstStyle/>
+          <a:p>
+            <a:pPr algn="ctr">
+              <a:defRPr sz="1200" b="1">
+                <a:solidFill>
+                  <a:srgbClr val="FFFFFF"/>
+                </a:solidFill>
+              </a:defRPr>
+            </a:pPr>
+            <a:r>
+              <a:t>Strict citations</a:t>
+            </a:r>
+          </a:p>
+        </p:txBody>
+      </p:sp>
+      <p:sp>
+        <p:nvSpPr>
+          <p:cNvPr id="6" name="TextBox 5"/>
+          <p:cNvSpPr txBox="1"/>
+          <p:nvPr/>
+        </p:nvSpPr>
+        <p:spPr>
+          <a:xfrm>
+            <a:off x="640080" y="4434840"/>
+            <a:ext cx="7863840" cy="2011680"/>
+          </a:xfrm>
+          <a:prstGeom prst="rect">
+            <a:avLst/>
+          </a:prstGeom>
+          <a:noFill/>
+        </p:spPr>
+        <p:txBody>
+          <a:bodyPr wrap="square">
+            <a:spAutoFit/>
+          </a:bodyPr>
+          <a:lstStyle/>
           <a:p>
             <a:pPr>
-              <a:defRPr sz="1800"/>
+              <a:spcAft>
+                <a:spcPts val="600"/>
+              </a:spcAft>
+              <a:defRPr sz="1500">
+                <a:solidFill>
+                  <a:srgbClr val="4A5568"/>
+                </a:solidFill>
+              </a:defRPr>
             </a:pPr>
             <a:r>
-              <a:t>Use Tier B to compare chunking strategies within the same genre pools, not as delta-vs-baseline from Tier A.</a:t>
+              <a:t>Choose metrics first: minimize hallucination flag vs maximize correctness vs force abstention.</a:t>
             </a:r>
           </a:p>
           <a:p>
             <a:pPr>
-              <a:defRPr sz="1800"/>
+              <a:spcAft>
+                <a:spcPts val="600"/>
+              </a:spcAft>
+              <a:defRPr sz="1500">
+                <a:solidFill>
+                  <a:srgbClr val="4A5568"/>
+                </a:solidFill>
+              </a:defRPr>
             </a:pPr>
             <a:r>
-              <a:t>Observed pattern (pooled by genre): finance favors some chunk presets on correctness in this run; label corpora more sensitive—warrants larger-n follow-up.</a:t>
+              <a:t>Pilot n=10 — directional; scale n for confidence.</a:t>
             </a:r>
           </a:p>
         </p:txBody>
@@ -3252,6 +3839,14 @@
 <file path=ppt/slides/slide11.xml><?xml version="1.0" encoding="utf-8"?>
 <p:sld xmlns:a="http://schemas.openxmlformats.org/drawingml/2006/main" xmlns:p="http://schemas.openxmlformats.org/presentationml/2006/main" xmlns:r="http://schemas.openxmlformats.org/officeDocument/2006/relationships">
   <p:cSld>
+    <p:bg>
+      <p:bgPr>
+        <a:solidFill>
+          <a:srgbClr val="F8FAFC"/>
+        </a:solidFill>
+        <a:effectLst/>
+      </p:bgPr>
+    </p:bg>
     <p:spTree>
       <p:nvGrpSpPr>
         <p:cNvPr id="1" name=""/>
@@ -3261,69 +3856,135 @@
       <p:grpSpPr/>
       <p:sp>
         <p:nvSpPr>
-          <p:cNvPr id="2" name="Title 1"/>
-          <p:cNvSpPr>
-            <a:spLocks noGrp="1"/>
-          </p:cNvSpPr>
-          <p:nvPr>
-            <p:ph type="title"/>
-          </p:nvPr>
-        </p:nvSpPr>
-        <p:spPr/>
-        <p:txBody>
-          <a:bodyPr/>
-          <a:lstStyle/>
-          <a:p>
-            <a:r>
-              <a:t>Limitations and Next Steps</a:t>
-            </a:r>
-          </a:p>
-        </p:txBody>
-      </p:sp>
-      <p:sp>
-        <p:nvSpPr>
-          <p:cNvPr id="3" name="Content Placeholder 2"/>
-          <p:cNvSpPr>
-            <a:spLocks noGrp="1"/>
-          </p:cNvSpPr>
-          <p:nvPr>
-            <p:ph idx="1"/>
-          </p:nvPr>
-        </p:nvSpPr>
-        <p:spPr/>
-        <p:txBody>
-          <a:bodyPr/>
+          <p:cNvPr id="2" name="Rectangle 1"/>
+          <p:cNvSpPr/>
+          <p:nvPr/>
+        </p:nvSpPr>
+        <p:spPr>
+          <a:xfrm>
+            <a:off x="0" y="0"/>
+            <a:ext cx="9144000" cy="1051560"/>
+          </a:xfrm>
+          <a:prstGeom prst="rect">
+            <a:avLst/>
+          </a:prstGeom>
+          <a:solidFill>
+            <a:srgbClr val="1E3A5F"/>
+          </a:solidFill>
+          <a:ln>
+            <a:noFill/>
+          </a:ln>
+        </p:spPr>
+        <p:style>
+          <a:lnRef idx="1">
+            <a:schemeClr val="accent1"/>
+          </a:lnRef>
+          <a:fillRef idx="3">
+            <a:schemeClr val="accent1"/>
+          </a:fillRef>
+          <a:effectRef idx="2">
+            <a:schemeClr val="accent1"/>
+          </a:effectRef>
+          <a:fontRef idx="minor">
+            <a:schemeClr val="lt1"/>
+          </a:fontRef>
+        </p:style>
+        <p:txBody>
+          <a:bodyPr rtlCol="0" anchor="ctr" lIns="457200" tIns="228600" wrap="square"/>
+          <a:lstStyle/>
+          <a:p>
+            <a:pPr algn="l">
+              <a:defRPr sz="2800" b="1">
+                <a:solidFill>
+                  <a:srgbClr val="FFFFFF"/>
+                </a:solidFill>
+              </a:defRPr>
+            </a:pPr>
+            <a:r>
+              <a:t>Limitations &amp; next steps</a:t>
+            </a:r>
+          </a:p>
+        </p:txBody>
+      </p:sp>
+      <p:sp>
+        <p:nvSpPr>
+          <p:cNvPr id="3" name="TextBox 2"/>
+          <p:cNvSpPr txBox="1"/>
+          <p:nvPr/>
+        </p:nvSpPr>
+        <p:spPr>
+          <a:xfrm>
+            <a:off x="685800" y="1325880"/>
+            <a:ext cx="7772400" cy="5029200"/>
+          </a:xfrm>
+          <a:prstGeom prst="rect">
+            <a:avLst/>
+          </a:prstGeom>
+          <a:noFill/>
+        </p:spPr>
+        <p:txBody>
+          <a:bodyPr wrap="square">
+            <a:spAutoFit/>
+          </a:bodyPr>
           <a:lstStyle/>
           <a:p>
             <a:pPr>
-              <a:defRPr sz="1800"/>
+              <a:spcAft>
+                <a:spcPts val="600"/>
+              </a:spcAft>
+              <a:defRPr sz="1700">
+                <a:solidFill>
+                  <a:srgbClr val="4A5568"/>
+                </a:solidFill>
+              </a:defRPr>
             </a:pPr>
             <a:r>
-              <a:t>Small evaluated n (10) per experiment—directional, not definitive.</a:t>
+              <a:t>• n=10 questions / experiment — exploratory.</a:t>
             </a:r>
           </a:p>
           <a:p>
             <a:pPr>
-              <a:defRPr sz="1800"/>
+              <a:spcAft>
+                <a:spcPts val="600"/>
+              </a:spcAft>
+              <a:defRPr sz="1700">
+                <a:solidFill>
+                  <a:srgbClr val="4A5568"/>
+                </a:solidFill>
+              </a:defRPr>
             </a:pPr>
             <a:r>
-              <a:t>LLM judges and RAGAS add cost and variance; metrics correlate but measure different failure modes.</a:t>
+              <a:t>• Four PDFs — illustrative genres, not universal finance/healthcare.</a:t>
             </a:r>
           </a:p>
           <a:p>
             <a:pPr>
-              <a:defRPr sz="1800"/>
+              <a:spcAft>
+                <a:spcPts val="600"/>
+              </a:spcAft>
+              <a:defRPr sz="1700">
+                <a:solidFill>
+                  <a:srgbClr val="4A5568"/>
+                </a:solidFill>
+              </a:defRPr>
             </a:pPr>
             <a:r>
-              <a:t>Four documents do not represent all of finance or healthcare—findings are illustrative for regulatory prose vs 10-K structure.</a:t>
+              <a:t>• LLM judges add variance; triangulate with rule-based metrics.</a:t>
             </a:r>
           </a:p>
           <a:p>
             <a:pPr>
-              <a:defRPr sz="1800"/>
+              <a:spcAft>
+                <a:spcPts val="600"/>
+              </a:spcAft>
+              <a:defRPr sz="1700">
+                <a:solidFill>
+                  <a:srgbClr val="4A5568"/>
+                </a:solidFill>
+              </a:defRPr>
             </a:pPr>
             <a:r>
-              <a:t>Next: increase n, add confidence intervals / bootstrap, test additional rerankers and abstention policies, document-type-specific chunk defaults.</a:t>
+              <a:t>• Next: larger n, CIs, more rerankers &amp; abstention policies.</a:t>
             </a:r>
           </a:p>
         </p:txBody>
@@ -3339,6 +4000,14 @@
 <file path=ppt/slides/slide12.xml><?xml version="1.0" encoding="utf-8"?>
 <p:sld xmlns:a="http://schemas.openxmlformats.org/drawingml/2006/main" xmlns:p="http://schemas.openxmlformats.org/presentationml/2006/main" xmlns:r="http://schemas.openxmlformats.org/officeDocument/2006/relationships">
   <p:cSld>
+    <p:bg>
+      <p:bgPr>
+        <a:solidFill>
+          <a:srgbClr val="F8FAFC"/>
+        </a:solidFill>
+        <a:effectLst/>
+      </p:bgPr>
+    </p:bg>
     <p:spTree>
       <p:nvGrpSpPr>
         <p:cNvPr id="1" name=""/>
@@ -3348,19 +4017,50 @@
       <p:grpSpPr/>
       <p:sp>
         <p:nvSpPr>
-          <p:cNvPr id="2" name="Title 1"/>
-          <p:cNvSpPr>
-            <a:spLocks noGrp="1"/>
-          </p:cNvSpPr>
-          <p:nvPr>
-            <p:ph type="title"/>
-          </p:nvPr>
-        </p:nvSpPr>
-        <p:spPr/>
-        <p:txBody>
-          <a:bodyPr/>
-          <a:lstStyle/>
-          <a:p>
+          <p:cNvPr id="2" name="Rectangle 1"/>
+          <p:cNvSpPr/>
+          <p:nvPr/>
+        </p:nvSpPr>
+        <p:spPr>
+          <a:xfrm>
+            <a:off x="0" y="0"/>
+            <a:ext cx="9144000" cy="1051560"/>
+          </a:xfrm>
+          <a:prstGeom prst="rect">
+            <a:avLst/>
+          </a:prstGeom>
+          <a:solidFill>
+            <a:srgbClr val="1E3A5F"/>
+          </a:solidFill>
+          <a:ln>
+            <a:noFill/>
+          </a:ln>
+        </p:spPr>
+        <p:style>
+          <a:lnRef idx="1">
+            <a:schemeClr val="accent1"/>
+          </a:lnRef>
+          <a:fillRef idx="3">
+            <a:schemeClr val="accent1"/>
+          </a:fillRef>
+          <a:effectRef idx="2">
+            <a:schemeClr val="accent1"/>
+          </a:effectRef>
+          <a:fontRef idx="minor">
+            <a:schemeClr val="lt1"/>
+          </a:fontRef>
+        </p:style>
+        <p:txBody>
+          <a:bodyPr rtlCol="0" anchor="ctr" lIns="457200" tIns="228600" wrap="square"/>
+          <a:lstStyle/>
+          <a:p>
+            <a:pPr algn="l">
+              <a:defRPr sz="2800" b="1">
+                <a:solidFill>
+                  <a:srgbClr val="FFFFFF"/>
+                </a:solidFill>
+              </a:defRPr>
+            </a:pPr>
             <a:r>
               <a:t>Conclusion</a:t>
             </a:r>
@@ -3369,45 +4069,65 @@
       </p:sp>
       <p:sp>
         <p:nvSpPr>
-          <p:cNvPr id="3" name="Content Placeholder 2"/>
-          <p:cNvSpPr>
-            <a:spLocks noGrp="1"/>
-          </p:cNvSpPr>
-          <p:nvPr>
-            <p:ph idx="1"/>
-          </p:nvPr>
-        </p:nvSpPr>
-        <p:spPr/>
-        <p:txBody>
-          <a:bodyPr/>
+          <p:cNvPr id="3" name="TextBox 2"/>
+          <p:cNvSpPr txBox="1"/>
+          <p:nvPr/>
+        </p:nvSpPr>
+        <p:spPr>
+          <a:xfrm>
+            <a:off x="777240" y="1417320"/>
+            <a:ext cx="7589520" cy="4572000"/>
+          </a:xfrm>
+          <a:prstGeom prst="rect">
+            <a:avLst/>
+          </a:prstGeom>
+          <a:noFill/>
+        </p:spPr>
+        <p:txBody>
+          <a:bodyPr wrap="square">
+            <a:spAutoFit/>
+          </a:bodyPr>
           <a:lstStyle/>
           <a:p>
             <a:pPr>
-              <a:defRPr sz="1800"/>
+              <a:spcAft>
+                <a:spcPts val="600"/>
+              </a:spcAft>
+              <a:defRPr sz="2200">
+                <a:solidFill>
+                  <a:srgbClr val="1E3A5F"/>
+                </a:solidFill>
+              </a:defRPr>
             </a:pPr>
             <a:r>
-              <a:t>Hallucination-aware RAG is not one-size-fits-all: retrieval depth, prompting, and citation enforcement shift grounding and correctness differently.</a:t>
+              <a:t>RAG design choices measurably shift grounding vs correctness — differently on 10-Ks vs FDA labels.</a:t>
             </a:r>
           </a:p>
           <a:p>
             <a:pPr>
-              <a:defRPr sz="1800"/>
+              <a:spcAft>
+                <a:spcPts val="600"/>
+              </a:spcAft>
+              <a:defRPr sz="2200">
+                <a:solidFill>
+                  <a:srgbClr val="1E3A5F"/>
+                </a:solidFill>
+              </a:defRPr>
             </a:pPr>
             <a:r>
-              <a:t>Empirical comparison on real 10-K and FDA-label text shows measurable genre effects and clear tradeoffs (e.g., k8+CoT vs k3).</a:t>
+              <a:t>Deliverable: reproducible pipeline + data-driven comparison tables for practitioners.</a:t>
             </a:r>
           </a:p>
           <a:p>
             <a:pPr>
-              <a:defRPr sz="1800"/>
-            </a:pPr>
-            <a:r>
-              <a:t>Practical impact: gives engineers a reproducible evaluation harness and evidence-backed starting points for finance vs healthcare-style documents.</a:t>
-            </a:r>
-          </a:p>
-          <a:p>
-            <a:pPr>
-              <a:defRPr sz="1800"/>
+              <a:spcAft>
+                <a:spcPts val="600"/>
+              </a:spcAft>
+              <a:defRPr sz="2200">
+                <a:solidFill>
+                  <a:srgbClr val="1E3A5F"/>
+                </a:solidFill>
+              </a:defRPr>
             </a:pPr>
             <a:r>
               <a:t>Thank you — questions?</a:t>
@@ -3426,6 +4146,14 @@
 <file path=ppt/slides/slide2.xml><?xml version="1.0" encoding="utf-8"?>
 <p:sld xmlns:a="http://schemas.openxmlformats.org/drawingml/2006/main" xmlns:p="http://schemas.openxmlformats.org/presentationml/2006/main" xmlns:r="http://schemas.openxmlformats.org/officeDocument/2006/relationships">
   <p:cSld>
+    <p:bg>
+      <p:bgPr>
+        <a:solidFill>
+          <a:srgbClr val="F8FAFC"/>
+        </a:solidFill>
+        <a:effectLst/>
+      </p:bgPr>
+    </p:bg>
     <p:spTree>
       <p:nvGrpSpPr>
         <p:cNvPr id="1" name=""/>
@@ -3435,77 +4163,328 @@
       <p:grpSpPr/>
       <p:sp>
         <p:nvSpPr>
-          <p:cNvPr id="2" name="Title 1"/>
-          <p:cNvSpPr>
-            <a:spLocks noGrp="1"/>
-          </p:cNvSpPr>
-          <p:nvPr>
-            <p:ph type="title"/>
-          </p:nvPr>
-        </p:nvSpPr>
-        <p:spPr/>
-        <p:txBody>
-          <a:bodyPr/>
-          <a:lstStyle/>
-          <a:p>
-            <a:r>
-              <a:t>Motivation and Goal</a:t>
-            </a:r>
-          </a:p>
-        </p:txBody>
-      </p:sp>
-      <p:sp>
-        <p:nvSpPr>
-          <p:cNvPr id="3" name="Content Placeholder 2"/>
-          <p:cNvSpPr>
-            <a:spLocks noGrp="1"/>
-          </p:cNvSpPr>
-          <p:nvPr>
-            <p:ph idx="1"/>
-          </p:nvPr>
-        </p:nvSpPr>
-        <p:spPr/>
-        <p:txBody>
-          <a:bodyPr/>
-          <a:lstStyle/>
+          <p:cNvPr id="2" name="Rectangle 1"/>
+          <p:cNvSpPr/>
+          <p:nvPr/>
+        </p:nvSpPr>
+        <p:spPr>
+          <a:xfrm>
+            <a:off x="0" y="0"/>
+            <a:ext cx="9144000" cy="1051560"/>
+          </a:xfrm>
+          <a:prstGeom prst="rect">
+            <a:avLst/>
+          </a:prstGeom>
+          <a:solidFill>
+            <a:srgbClr val="1E3A5F"/>
+          </a:solidFill>
+          <a:ln>
+            <a:noFill/>
+          </a:ln>
+        </p:spPr>
+        <p:style>
+          <a:lnRef idx="1">
+            <a:schemeClr val="accent1"/>
+          </a:lnRef>
+          <a:fillRef idx="3">
+            <a:schemeClr val="accent1"/>
+          </a:fillRef>
+          <a:effectRef idx="2">
+            <a:schemeClr val="accent1"/>
+          </a:effectRef>
+          <a:fontRef idx="minor">
+            <a:schemeClr val="lt1"/>
+          </a:fontRef>
+        </p:style>
+        <p:txBody>
+          <a:bodyPr rtlCol="0" anchor="ctr" lIns="457200" tIns="228600" wrap="square"/>
+          <a:lstStyle/>
+          <a:p>
+            <a:pPr algn="l">
+              <a:defRPr sz="2800" b="1">
+                <a:solidFill>
+                  <a:srgbClr val="FFFFFF"/>
+                </a:solidFill>
+              </a:defRPr>
+            </a:pPr>
+            <a:r>
+              <a:t>Talk roadmap</a:t>
+            </a:r>
+          </a:p>
           <a:p>
             <a:pPr>
-              <a:defRPr sz="1800"/>
+              <a:defRPr sz="1400">
+                <a:solidFill>
+                  <a:srgbClr val="E2E8F0"/>
+                </a:solidFill>
+              </a:defRPr>
             </a:pPr>
             <a:r>
-              <a:t>Topic: Reliable deployment of AI in professional workflows where answers must be precise (finance, healthcare).</a:t>
-            </a:r>
-          </a:p>
+              <a:t>What you will see</a:t>
+            </a:r>
+          </a:p>
+        </p:txBody>
+      </p:sp>
+      <p:sp>
+        <p:nvSpPr>
+          <p:cNvPr id="3" name="Rounded Rectangle 2"/>
+          <p:cNvSpPr/>
+          <p:nvPr/>
+        </p:nvSpPr>
+        <p:spPr>
+          <a:xfrm>
+            <a:off x="342900" y="1691640"/>
+            <a:ext cx="1874519" cy="2148840"/>
+          </a:xfrm>
+          <a:prstGeom prst="roundRect">
+            <a:avLst/>
+          </a:prstGeom>
+          <a:solidFill>
+            <a:srgbClr val="EBF4FF"/>
+          </a:solidFill>
+          <a:ln>
+            <a:solidFill>
+              <a:srgbClr val="2B7CA8"/>
+            </a:solidFill>
+          </a:ln>
+        </p:spPr>
+        <p:style>
+          <a:lnRef idx="1">
+            <a:schemeClr val="accent1"/>
+          </a:lnRef>
+          <a:fillRef idx="3">
+            <a:schemeClr val="accent1"/>
+          </a:fillRef>
+          <a:effectRef idx="2">
+            <a:schemeClr val="accent1"/>
+          </a:effectRef>
+          <a:fontRef idx="minor">
+            <a:schemeClr val="lt1"/>
+          </a:fontRef>
+        </p:style>
+        <p:txBody>
+          <a:bodyPr rtlCol="0" anchor="ctr"/>
+          <a:lstStyle/>
           <a:p>
             <a:pPr>
-              <a:defRPr sz="1800"/>
+              <a:defRPr sz="1600" b="1">
+                <a:solidFill>
+                  <a:srgbClr val="1E3A5F"/>
+                </a:solidFill>
+              </a:defRPr>
             </a:pPr>
             <a:r>
-              <a:t>Problem: Hallucinations remain the main barrier to trust—especially with sensitive or regulated information.</a:t>
+              <a:t>1. Why it matters</a:t>
             </a:r>
           </a:p>
           <a:p>
             <a:pPr>
-              <a:defRPr sz="1800"/>
+              <a:defRPr sz="1300" b="0">
+                <a:solidFill>
+                  <a:srgbClr val="4A5568"/>
+                </a:solidFill>
+              </a:defRPr>
             </a:pPr>
             <a:r>
-              <a:t>Goal: "The goal of my project is to empirically compare RAG system designs and measure which configurations best reduce hallucinations and improve answer quality—across document types representative of finance (10-Ks) and healthcare (FDA drug labels)."</a:t>
-            </a:r>
-          </a:p>
+              <a:t>Trust + productivity</a:t>
+            </a:r>
+          </a:p>
+        </p:txBody>
+      </p:sp>
+      <p:sp>
+        <p:nvSpPr>
+          <p:cNvPr id="4" name="Rounded Rectangle 3"/>
+          <p:cNvSpPr/>
+          <p:nvPr/>
+        </p:nvSpPr>
+        <p:spPr>
+          <a:xfrm>
+            <a:off x="2537460" y="1691640"/>
+            <a:ext cx="1874519" cy="2148840"/>
+          </a:xfrm>
+          <a:prstGeom prst="roundRect">
+            <a:avLst/>
+          </a:prstGeom>
+          <a:solidFill>
+            <a:srgbClr val="F0F4F8"/>
+          </a:solidFill>
+          <a:ln>
+            <a:solidFill>
+              <a:srgbClr val="2B7CA8"/>
+            </a:solidFill>
+          </a:ln>
+        </p:spPr>
+        <p:style>
+          <a:lnRef idx="1">
+            <a:schemeClr val="accent1"/>
+          </a:lnRef>
+          <a:fillRef idx="3">
+            <a:schemeClr val="accent1"/>
+          </a:fillRef>
+          <a:effectRef idx="2">
+            <a:schemeClr val="accent1"/>
+          </a:effectRef>
+          <a:fontRef idx="minor">
+            <a:schemeClr val="lt1"/>
+          </a:fontRef>
+        </p:style>
+        <p:txBody>
+          <a:bodyPr rtlCol="0" anchor="ctr"/>
+          <a:lstStyle/>
           <a:p>
             <a:pPr>
-              <a:defRPr sz="1800"/>
+              <a:defRPr sz="1600" b="1">
+                <a:solidFill>
+                  <a:srgbClr val="1E3A5F"/>
+                </a:solidFill>
+              </a:defRPr>
             </a:pPr>
             <a:r>
-              <a:t>Why it matters: Almost every enterprise is adopting AI for productivity; reliability determines whether professionals actually use it.</a:t>
+              <a:t>2. Method</a:t>
             </a:r>
           </a:p>
           <a:p>
             <a:pPr>
-              <a:defRPr sz="1800"/>
+              <a:defRPr sz="1300" b="0">
+                <a:solidFill>
+                  <a:srgbClr val="4A5568"/>
+                </a:solidFill>
+              </a:defRPr>
             </a:pPr>
             <a:r>
-              <a:t>Audience benefit: Teams can prioritize retrieval depth, prompting, citation enforcement, and chunking strategies grounded in measured tradeoffs—not guesswork.</a:t>
+              <a:t>Pipeline + controlled experiments</a:t>
+            </a:r>
+          </a:p>
+        </p:txBody>
+      </p:sp>
+      <p:sp>
+        <p:nvSpPr>
+          <p:cNvPr id="5" name="Rounded Rectangle 4"/>
+          <p:cNvSpPr/>
+          <p:nvPr/>
+        </p:nvSpPr>
+        <p:spPr>
+          <a:xfrm>
+            <a:off x="4732020" y="1691640"/>
+            <a:ext cx="1874519" cy="2148840"/>
+          </a:xfrm>
+          <a:prstGeom prst="roundRect">
+            <a:avLst/>
+          </a:prstGeom>
+          <a:solidFill>
+            <a:srgbClr val="EBF4FF"/>
+          </a:solidFill>
+          <a:ln>
+            <a:solidFill>
+              <a:srgbClr val="2B7CA8"/>
+            </a:solidFill>
+          </a:ln>
+        </p:spPr>
+        <p:style>
+          <a:lnRef idx="1">
+            <a:schemeClr val="accent1"/>
+          </a:lnRef>
+          <a:fillRef idx="3">
+            <a:schemeClr val="accent1"/>
+          </a:fillRef>
+          <a:effectRef idx="2">
+            <a:schemeClr val="accent1"/>
+          </a:effectRef>
+          <a:fontRef idx="minor">
+            <a:schemeClr val="lt1"/>
+          </a:fontRef>
+        </p:style>
+        <p:txBody>
+          <a:bodyPr rtlCol="0" anchor="ctr"/>
+          <a:lstStyle/>
+          <a:p>
+            <a:pPr>
+              <a:defRPr sz="1600" b="1">
+                <a:solidFill>
+                  <a:srgbClr val="1E3A5F"/>
+                </a:solidFill>
+              </a:defRPr>
+            </a:pPr>
+            <a:r>
+              <a:t>3. Data</a:t>
+            </a:r>
+          </a:p>
+          <a:p>
+            <a:pPr>
+              <a:defRPr sz="1300" b="0">
+                <a:solidFill>
+                  <a:srgbClr val="4A5568"/>
+                </a:solidFill>
+              </a:defRPr>
+            </a:pPr>
+            <a:r>
+              <a:t>Charts from 4 real PDF corpora</a:t>
+            </a:r>
+          </a:p>
+        </p:txBody>
+      </p:sp>
+      <p:sp>
+        <p:nvSpPr>
+          <p:cNvPr id="6" name="Rounded Rectangle 5"/>
+          <p:cNvSpPr/>
+          <p:nvPr/>
+        </p:nvSpPr>
+        <p:spPr>
+          <a:xfrm>
+            <a:off x="6926579" y="1691640"/>
+            <a:ext cx="1874519" cy="2148840"/>
+          </a:xfrm>
+          <a:prstGeom prst="roundRect">
+            <a:avLst/>
+          </a:prstGeom>
+          <a:solidFill>
+            <a:srgbClr val="F0F4F8"/>
+          </a:solidFill>
+          <a:ln>
+            <a:solidFill>
+              <a:srgbClr val="2B7CA8"/>
+            </a:solidFill>
+          </a:ln>
+        </p:spPr>
+        <p:style>
+          <a:lnRef idx="1">
+            <a:schemeClr val="accent1"/>
+          </a:lnRef>
+          <a:fillRef idx="3">
+            <a:schemeClr val="accent1"/>
+          </a:fillRef>
+          <a:effectRef idx="2">
+            <a:schemeClr val="accent1"/>
+          </a:effectRef>
+          <a:fontRef idx="minor">
+            <a:schemeClr val="lt1"/>
+          </a:fontRef>
+        </p:style>
+        <p:txBody>
+          <a:bodyPr rtlCol="0" anchor="ctr"/>
+          <a:lstStyle/>
+          <a:p>
+            <a:pPr>
+              <a:defRPr sz="1600" b="1">
+                <a:solidFill>
+                  <a:srgbClr val="1E3A5F"/>
+                </a:solidFill>
+              </a:defRPr>
+            </a:pPr>
+            <a:r>
+              <a:t>4. Takeaway</a:t>
+            </a:r>
+          </a:p>
+          <a:p>
+            <a:pPr>
+              <a:defRPr sz="1300" b="0">
+                <a:solidFill>
+                  <a:srgbClr val="4A5568"/>
+                </a:solidFill>
+              </a:defRPr>
+            </a:pPr>
+            <a:r>
+              <a:t>No one-size-fits-all RAG</a:t>
             </a:r>
           </a:p>
         </p:txBody>
@@ -3521,6 +4500,14 @@
 <file path=ppt/slides/slide3.xml><?xml version="1.0" encoding="utf-8"?>
 <p:sld xmlns:a="http://schemas.openxmlformats.org/drawingml/2006/main" xmlns:p="http://schemas.openxmlformats.org/presentationml/2006/main" xmlns:r="http://schemas.openxmlformats.org/officeDocument/2006/relationships">
   <p:cSld>
+    <p:bg>
+      <p:bgPr>
+        <a:solidFill>
+          <a:srgbClr val="F8FAFC"/>
+        </a:solidFill>
+        <a:effectLst/>
+      </p:bgPr>
+    </p:bg>
     <p:spTree>
       <p:nvGrpSpPr>
         <p:cNvPr id="1" name=""/>
@@ -3530,61 +4517,203 @@
       <p:grpSpPr/>
       <p:sp>
         <p:nvSpPr>
-          <p:cNvPr id="2" name="Title 1"/>
-          <p:cNvSpPr>
-            <a:spLocks noGrp="1"/>
-          </p:cNvSpPr>
-          <p:nvPr>
-            <p:ph type="title"/>
-          </p:nvPr>
-        </p:nvSpPr>
-        <p:spPr/>
-        <p:txBody>
-          <a:bodyPr/>
-          <a:lstStyle/>
-          <a:p>
-            <a:r>
-              <a:t>Why This Problem Is Urgent (Industry Perspective)</a:t>
-            </a:r>
-          </a:p>
-        </p:txBody>
-      </p:sp>
-      <p:sp>
-        <p:nvSpPr>
-          <p:cNvPr id="3" name="Content Placeholder 2"/>
-          <p:cNvSpPr>
-            <a:spLocks noGrp="1"/>
-          </p:cNvSpPr>
-          <p:nvPr>
-            <p:ph idx="1"/>
-          </p:nvPr>
-        </p:nvSpPr>
-        <p:spPr/>
-        <p:txBody>
-          <a:bodyPr/>
-          <a:lstStyle/>
+          <p:cNvPr id="2" name="Rectangle 1"/>
+          <p:cNvSpPr/>
+          <p:nvPr/>
+        </p:nvSpPr>
+        <p:spPr>
+          <a:xfrm>
+            <a:off x="0" y="0"/>
+            <a:ext cx="9144000" cy="1051560"/>
+          </a:xfrm>
+          <a:prstGeom prst="rect">
+            <a:avLst/>
+          </a:prstGeom>
+          <a:solidFill>
+            <a:srgbClr val="1E3A5F"/>
+          </a:solidFill>
+          <a:ln>
+            <a:noFill/>
+          </a:ln>
+        </p:spPr>
+        <p:style>
+          <a:lnRef idx="1">
+            <a:schemeClr val="accent1"/>
+          </a:lnRef>
+          <a:fillRef idx="3">
+            <a:schemeClr val="accent1"/>
+          </a:fillRef>
+          <a:effectRef idx="2">
+            <a:schemeClr val="accent1"/>
+          </a:effectRef>
+          <a:fontRef idx="minor">
+            <a:schemeClr val="lt1"/>
+          </a:fontRef>
+        </p:style>
+        <p:txBody>
+          <a:bodyPr rtlCol="0" anchor="ctr" lIns="457200" tIns="228600" wrap="square"/>
+          <a:lstStyle/>
+          <a:p>
+            <a:pPr algn="l">
+              <a:defRPr sz="2800" b="1">
+                <a:solidFill>
+                  <a:srgbClr val="FFFFFF"/>
+                </a:solidFill>
+              </a:defRPr>
+            </a:pPr>
+            <a:r>
+              <a:t>Motivation</a:t>
+            </a:r>
+          </a:p>
           <a:p>
             <a:pPr>
-              <a:defRPr sz="1800"/>
+              <a:defRPr sz="1400">
+                <a:solidFill>
+                  <a:srgbClr val="E2E8F0"/>
+                </a:solidFill>
+              </a:defRPr>
             </a:pPr>
             <a:r>
-              <a:t>Internship (EY): Clients consistently rank hallucinations and reliability as top concerns for AI adoption on sensitive data.</a:t>
-            </a:r>
-          </a:p>
+              <a:t>Precision industries need reliable grounded answers</a:t>
+            </a:r>
+          </a:p>
+        </p:txBody>
+      </p:sp>
+      <p:sp>
+        <p:nvSpPr>
+          <p:cNvPr id="3" name="TextBox 2"/>
+          <p:cNvSpPr txBox="1"/>
+          <p:nvPr/>
+        </p:nvSpPr>
+        <p:spPr>
+          <a:xfrm>
+            <a:off x="594360" y="1280160"/>
+            <a:ext cx="3840480" cy="4572000"/>
+          </a:xfrm>
+          <a:prstGeom prst="rect">
+            <a:avLst/>
+          </a:prstGeom>
+          <a:noFill/>
+        </p:spPr>
+        <p:txBody>
+          <a:bodyPr wrap="square">
+            <a:spAutoFit/>
+          </a:bodyPr>
+          <a:lstStyle/>
           <a:p>
             <a:pPr>
-              <a:defRPr sz="1800"/>
+              <a:spcAft>
+                <a:spcPts val="600"/>
+              </a:spcAft>
+              <a:defRPr sz="1700">
+                <a:solidFill>
+                  <a:srgbClr val="4A5568"/>
+                </a:solidFill>
+              </a:defRPr>
             </a:pPr>
             <a:r>
-              <a:t>Interviews with EY tech risk partners: among customer complaints, hallucinations and trust dominate—while benefits (efficiency) are widely understood.</a:t>
+              <a:t>Goal: Compare RAG configurations on real finance + healthcare PDFs.</a:t>
             </a:r>
           </a:p>
           <a:p>
             <a:pPr>
-              <a:defRPr sz="1800"/>
+              <a:spcAft>
+                <a:spcPts val="600"/>
+              </a:spcAft>
+              <a:defRPr sz="1700">
+                <a:solidFill>
+                  <a:srgbClr val="4A5568"/>
+                </a:solidFill>
+              </a:defRPr>
             </a:pPr>
             <a:r>
-              <a:t>Bridge from practice to research: measure hallucination-related failure modes under controlled RAG settings so practitioners can reduce risk while capturing efficiency gains.</a:t>
+              <a:t>Measure hallucination-related failure vs answer quality — same harness, varied designs.</a:t>
+            </a:r>
+          </a:p>
+          <a:p>
+            <a:pPr>
+              <a:spcAft>
+                <a:spcPts val="600"/>
+              </a:spcAft>
+              <a:defRPr sz="1700">
+                <a:solidFill>
+                  <a:srgbClr val="4A5568"/>
+                </a:solidFill>
+              </a:defRPr>
+            </a:pPr>
+            <a:r>
+              <a:t>Outcome: Actionable tradeoffs for teams deploying AI on sensitive text.</a:t>
+            </a:r>
+          </a:p>
+        </p:txBody>
+      </p:sp>
+      <p:sp>
+        <p:nvSpPr>
+          <p:cNvPr id="4" name="Rounded Rectangle 3"/>
+          <p:cNvSpPr/>
+          <p:nvPr/>
+        </p:nvSpPr>
+        <p:spPr>
+          <a:xfrm>
+            <a:off x="4663440" y="1783080"/>
+            <a:ext cx="3886200" cy="1828800"/>
+          </a:xfrm>
+          <a:prstGeom prst="roundRect">
+            <a:avLst/>
+          </a:prstGeom>
+          <a:solidFill>
+            <a:srgbClr val="FFFAEC"/>
+          </a:solidFill>
+          <a:ln>
+            <a:solidFill>
+              <a:srgbClr val="C05621"/>
+            </a:solidFill>
+          </a:ln>
+        </p:spPr>
+        <p:style>
+          <a:lnRef idx="1">
+            <a:schemeClr val="accent1"/>
+          </a:lnRef>
+          <a:fillRef idx="3">
+            <a:schemeClr val="accent1"/>
+          </a:fillRef>
+          <a:effectRef idx="2">
+            <a:schemeClr val="accent1"/>
+          </a:effectRef>
+          <a:fontRef idx="minor">
+            <a:schemeClr val="lt1"/>
+          </a:fontRef>
+        </p:style>
+        <p:txBody>
+          <a:bodyPr rtlCol="0" anchor="ctr"/>
+          <a:lstStyle/>
+          <a:p>
+            <a:pPr>
+              <a:defRPr b="1" sz="1400">
+                <a:solidFill>
+                  <a:srgbClr val="C05621"/>
+                </a:solidFill>
+              </a:defRPr>
+            </a:pPr>
+            <a:r>
+              <a:t>Industry signal</a:t>
+            </a:r>
+          </a:p>
+          <a:p>
+            <a:r>
+              <a:t>(EY)</a:t>
+            </a:r>
+          </a:p>
+          <a:p>
+            <a:pPr>
+              <a:defRPr sz="1300">
+                <a:solidFill>
+                  <a:srgbClr val="4A5568"/>
+                </a:solidFill>
+              </a:defRPr>
+            </a:pPr>
+            <a:r>
+              <a:t>Clients rank hallucinations #1 risk for AI on sensitive data — even when efficiency gains are clear.</a:t>
             </a:r>
           </a:p>
         </p:txBody>
@@ -3600,6 +4729,14 @@
 <file path=ppt/slides/slide4.xml><?xml version="1.0" encoding="utf-8"?>
 <p:sld xmlns:a="http://schemas.openxmlformats.org/drawingml/2006/main" xmlns:p="http://schemas.openxmlformats.org/presentationml/2006/main" xmlns:r="http://schemas.openxmlformats.org/officeDocument/2006/relationships">
   <p:cSld>
+    <p:bg>
+      <p:bgPr>
+        <a:solidFill>
+          <a:srgbClr val="F8FAFC"/>
+        </a:solidFill>
+        <a:effectLst/>
+      </p:bgPr>
+    </p:bg>
     <p:spTree>
       <p:nvGrpSpPr>
         <p:cNvPr id="1" name=""/>
@@ -3609,69 +4746,226 @@
       <p:grpSpPr/>
       <p:sp>
         <p:nvSpPr>
-          <p:cNvPr id="2" name="Title 1"/>
-          <p:cNvSpPr>
-            <a:spLocks noGrp="1"/>
-          </p:cNvSpPr>
-          <p:nvPr>
-            <p:ph type="title"/>
-          </p:nvPr>
-        </p:nvSpPr>
-        <p:spPr/>
-        <p:txBody>
-          <a:bodyPr/>
-          <a:lstStyle/>
-          <a:p>
-            <a:r>
-              <a:t>Problem Background and Related Work</a:t>
-            </a:r>
-          </a:p>
-        </p:txBody>
-      </p:sp>
-      <p:sp>
-        <p:nvSpPr>
-          <p:cNvPr id="3" name="Content Placeholder 2"/>
-          <p:cNvSpPr>
-            <a:spLocks noGrp="1"/>
-          </p:cNvSpPr>
-          <p:nvPr>
-            <p:ph idx="1"/>
-          </p:nvPr>
-        </p:nvSpPr>
-        <p:spPr/>
-        <p:txBody>
-          <a:bodyPr/>
-          <a:lstStyle/>
+          <p:cNvPr id="2" name="Rectangle 1"/>
+          <p:cNvSpPr/>
+          <p:nvPr/>
+        </p:nvSpPr>
+        <p:spPr>
+          <a:xfrm>
+            <a:off x="0" y="0"/>
+            <a:ext cx="9144000" cy="1051560"/>
+          </a:xfrm>
+          <a:prstGeom prst="rect">
+            <a:avLst/>
+          </a:prstGeom>
+          <a:solidFill>
+            <a:srgbClr val="1E3A5F"/>
+          </a:solidFill>
+          <a:ln>
+            <a:noFill/>
+          </a:ln>
+        </p:spPr>
+        <p:style>
+          <a:lnRef idx="1">
+            <a:schemeClr val="accent1"/>
+          </a:lnRef>
+          <a:fillRef idx="3">
+            <a:schemeClr val="accent1"/>
+          </a:fillRef>
+          <a:effectRef idx="2">
+            <a:schemeClr val="accent1"/>
+          </a:effectRef>
+          <a:fontRef idx="minor">
+            <a:schemeClr val="lt1"/>
+          </a:fontRef>
+        </p:style>
+        <p:txBody>
+          <a:bodyPr rtlCol="0" anchor="ctr" lIns="457200" tIns="228600" wrap="square"/>
+          <a:lstStyle/>
+          <a:p>
+            <a:pPr algn="l">
+              <a:defRPr sz="2800" b="1">
+                <a:solidFill>
+                  <a:srgbClr val="FFFFFF"/>
+                </a:solidFill>
+              </a:defRPr>
+            </a:pPr>
+            <a:r>
+              <a:t>Background</a:t>
+            </a:r>
+          </a:p>
           <a:p>
             <a:pPr>
-              <a:defRPr sz="1800"/>
+              <a:defRPr sz="1400">
+                <a:solidFill>
+                  <a:srgbClr val="E2E8F0"/>
+                </a:solidFill>
+              </a:defRPr>
             </a:pPr>
             <a:r>
-              <a:t>Consensus: LLMs can produce fluent but unsupported text; RAG grounds answers in retrieved evidence but does not eliminate hallucinations (retrieval errors, context misuse, parametric knowledge).</a:t>
-            </a:r>
-          </a:p>
+              <a:t>Hallucinations persist even with RAG</a:t>
+            </a:r>
+          </a:p>
+        </p:txBody>
+      </p:sp>
+      <p:sp>
+        <p:nvSpPr>
+          <p:cNvPr id="3" name="Rectangle 2"/>
+          <p:cNvSpPr/>
+          <p:nvPr/>
+        </p:nvSpPr>
+        <p:spPr>
+          <a:xfrm>
+            <a:off x="640080" y="1325880"/>
+            <a:ext cx="7863840" cy="1325880"/>
+          </a:xfrm>
+          <a:prstGeom prst="rect">
+            <a:avLst/>
+          </a:prstGeom>
+          <a:solidFill>
+            <a:srgbClr val="EDF2F7"/>
+          </a:solidFill>
+          <a:ln>
+            <a:solidFill>
+              <a:srgbClr val="CBD5E0"/>
+            </a:solidFill>
+          </a:ln>
+        </p:spPr>
+        <p:style>
+          <a:lnRef idx="1">
+            <a:schemeClr val="accent1"/>
+          </a:lnRef>
+          <a:fillRef idx="3">
+            <a:schemeClr val="accent1"/>
+          </a:fillRef>
+          <a:effectRef idx="2">
+            <a:schemeClr val="accent1"/>
+          </a:effectRef>
+          <a:fontRef idx="minor">
+            <a:schemeClr val="lt1"/>
+          </a:fontRef>
+        </p:style>
+        <p:txBody>
+          <a:bodyPr rtlCol="0" anchor="ctr"/>
+          <a:lstStyle/>
           <a:p>
             <a:pPr>
-              <a:defRPr sz="1800"/>
+              <a:defRPr sz="1500" b="1">
+                <a:solidFill>
+                  <a:srgbClr val="1E3A5F"/>
+                </a:solidFill>
+              </a:defRPr>
             </a:pPr>
             <a:r>
-              <a:t>Surveys &amp; reviews: Recent surveys synthesize hallucination taxonomies, detection (faithfulness judges, consistency checks), and mitigation (RAG, prompting, constrained decoding). Examples: comprehensive LLM hallucination surveys on arXiv; RAG-focused mitigation reviews (e.g., MDPI / similar).</a:t>
-            </a:r>
-          </a:p>
+              <a:t>Consensus: RAG grounds answers but does not remove unsupported generations.</a:t>
+            </a:r>
+          </a:p>
+        </p:txBody>
+      </p:sp>
+      <p:sp>
+        <p:nvSpPr>
+          <p:cNvPr id="4" name="Rectangle 3"/>
+          <p:cNvSpPr/>
+          <p:nvPr/>
+        </p:nvSpPr>
+        <p:spPr>
+          <a:xfrm>
+            <a:off x="640080" y="2926080"/>
+            <a:ext cx="7863840" cy="1325880"/>
+          </a:xfrm>
+          <a:prstGeom prst="rect">
+            <a:avLst/>
+          </a:prstGeom>
+          <a:solidFill>
+            <a:srgbClr val="EDF2F7"/>
+          </a:solidFill>
+          <a:ln>
+            <a:solidFill>
+              <a:srgbClr val="CBD5E0"/>
+            </a:solidFill>
+          </a:ln>
+        </p:spPr>
+        <p:style>
+          <a:lnRef idx="1">
+            <a:schemeClr val="accent1"/>
+          </a:lnRef>
+          <a:fillRef idx="3">
+            <a:schemeClr val="accent1"/>
+          </a:fillRef>
+          <a:effectRef idx="2">
+            <a:schemeClr val="accent1"/>
+          </a:effectRef>
+          <a:fontRef idx="minor">
+            <a:schemeClr val="lt1"/>
+          </a:fontRef>
+        </p:style>
+        <p:txBody>
+          <a:bodyPr rtlCol="0" anchor="ctr"/>
+          <a:lstStyle/>
           <a:p>
             <a:pPr>
-              <a:defRPr sz="1800"/>
+              <a:defRPr sz="1500" b="1">
+                <a:solidFill>
+                  <a:srgbClr val="1E3A5F"/>
+                </a:solidFill>
+              </a:defRPr>
             </a:pPr>
             <a:r>
-              <a:t>Commercial reality: Vendors offer RAG stacks, guardrails, and evaluation—yet optimal design is domain- and corpus-dependent; generic defaults underperform.</a:t>
-            </a:r>
-          </a:p>
+              <a:t>Literature: Surveys cover taxonomy, detection (faithfulness judges), mitigation.</a:t>
+            </a:r>
+          </a:p>
+        </p:txBody>
+      </p:sp>
+      <p:sp>
+        <p:nvSpPr>
+          <p:cNvPr id="5" name="Rectangle 4"/>
+          <p:cNvSpPr/>
+          <p:nvPr/>
+        </p:nvSpPr>
+        <p:spPr>
+          <a:xfrm>
+            <a:off x="640080" y="4526280"/>
+            <a:ext cx="7863840" cy="1325880"/>
+          </a:xfrm>
+          <a:prstGeom prst="rect">
+            <a:avLst/>
+          </a:prstGeom>
+          <a:solidFill>
+            <a:srgbClr val="EDF2F7"/>
+          </a:solidFill>
+          <a:ln>
+            <a:solidFill>
+              <a:srgbClr val="CBD5E0"/>
+            </a:solidFill>
+          </a:ln>
+        </p:spPr>
+        <p:style>
+          <a:lnRef idx="1">
+            <a:schemeClr val="accent1"/>
+          </a:lnRef>
+          <a:fillRef idx="3">
+            <a:schemeClr val="accent1"/>
+          </a:fillRef>
+          <a:effectRef idx="2">
+            <a:schemeClr val="accent1"/>
+          </a:effectRef>
+          <a:fontRef idx="minor">
+            <a:schemeClr val="lt1"/>
+          </a:fontRef>
+        </p:style>
+        <p:txBody>
+          <a:bodyPr rtlCol="0" anchor="ctr"/>
+          <a:lstStyle/>
           <a:p>
             <a:pPr>
-              <a:defRPr sz="1800"/>
+              <a:defRPr sz="1500" b="1">
+                <a:solidFill>
+                  <a:srgbClr val="1E3A5F"/>
+                </a:solidFill>
+              </a:defRPr>
             </a:pPr>
             <a:r>
-              <a:t>Gap: Less clear guidance on which RAG knobs (top-k, CoT, strict citations, chunking) trade off grounding vs correctness for regulatory-style prose vs financial filings—this project tests that empirically on real PDF corpora.</a:t>
+              <a:t>Gap: Less empirical guidance on which RAG knobs work for which document genres.</a:t>
             </a:r>
           </a:p>
         </p:txBody>
@@ -3687,6 +4981,14 @@
 <file path=ppt/slides/slide5.xml><?xml version="1.0" encoding="utf-8"?>
 <p:sld xmlns:a="http://schemas.openxmlformats.org/drawingml/2006/main" xmlns:p="http://schemas.openxmlformats.org/presentationml/2006/main" xmlns:r="http://schemas.openxmlformats.org/officeDocument/2006/relationships">
   <p:cSld>
+    <p:bg>
+      <p:bgPr>
+        <a:solidFill>
+          <a:srgbClr val="F8FAFC"/>
+        </a:solidFill>
+        <a:effectLst/>
+      </p:bgPr>
+    </p:bg>
     <p:spTree>
       <p:nvGrpSpPr>
         <p:cNvPr id="1" name=""/>
@@ -3696,69 +4998,619 @@
       <p:grpSpPr/>
       <p:sp>
         <p:nvSpPr>
-          <p:cNvPr id="2" name="Title 1"/>
-          <p:cNvSpPr>
-            <a:spLocks noGrp="1"/>
-          </p:cNvSpPr>
-          <p:nvPr>
-            <p:ph type="title"/>
-          </p:nvPr>
-        </p:nvSpPr>
-        <p:spPr/>
-        <p:txBody>
-          <a:bodyPr/>
-          <a:lstStyle/>
-          <a:p>
-            <a:r>
-              <a:t>Approach (Key Idea)</a:t>
-            </a:r>
-          </a:p>
-        </p:txBody>
-      </p:sp>
-      <p:sp>
-        <p:nvSpPr>
-          <p:cNvPr id="3" name="Content Placeholder 2"/>
-          <p:cNvSpPr>
-            <a:spLocks noGrp="1"/>
-          </p:cNvSpPr>
-          <p:nvPr>
-            <p:ph idx="1"/>
-          </p:nvPr>
-        </p:nvSpPr>
-        <p:spPr/>
-        <p:txBody>
-          <a:bodyPr/>
-          <a:lstStyle/>
+          <p:cNvPr id="2" name="Rectangle 1"/>
+          <p:cNvSpPr/>
+          <p:nvPr/>
+        </p:nvSpPr>
+        <p:spPr>
+          <a:xfrm>
+            <a:off x="0" y="0"/>
+            <a:ext cx="9144000" cy="1051560"/>
+          </a:xfrm>
+          <a:prstGeom prst="rect">
+            <a:avLst/>
+          </a:prstGeom>
+          <a:solidFill>
+            <a:srgbClr val="1E3A5F"/>
+          </a:solidFill>
+          <a:ln>
+            <a:noFill/>
+          </a:ln>
+        </p:spPr>
+        <p:style>
+          <a:lnRef idx="1">
+            <a:schemeClr val="accent1"/>
+          </a:lnRef>
+          <a:fillRef idx="3">
+            <a:schemeClr val="accent1"/>
+          </a:fillRef>
+          <a:effectRef idx="2">
+            <a:schemeClr val="accent1"/>
+          </a:effectRef>
+          <a:fontRef idx="minor">
+            <a:schemeClr val="lt1"/>
+          </a:fontRef>
+        </p:style>
+        <p:txBody>
+          <a:bodyPr rtlCol="0" anchor="ctr" lIns="457200" tIns="228600" wrap="square"/>
+          <a:lstStyle/>
+          <a:p>
+            <a:pPr algn="l">
+              <a:defRPr sz="2800" b="1">
+                <a:solidFill>
+                  <a:srgbClr val="FFFFFF"/>
+                </a:solidFill>
+              </a:defRPr>
+            </a:pPr>
+            <a:r>
+              <a:t>Implementation</a:t>
+            </a:r>
+          </a:p>
           <a:p>
             <a:pPr>
-              <a:defRPr sz="1800"/>
+              <a:defRPr sz="1400">
+                <a:solidFill>
+                  <a:srgbClr val="E2E8F0"/>
+                </a:solidFill>
+              </a:defRPr>
             </a:pPr>
             <a:r>
-              <a:t>Key idea: Hold evaluation methodology fixed; systematically vary RAG design (retrieval breadth, prompts, citation post-processing, chunking presets).</a:t>
-            </a:r>
-          </a:p>
+              <a:t>End-to-end evaluation pipeline</a:t>
+            </a:r>
+          </a:p>
+        </p:txBody>
+      </p:sp>
+      <p:sp>
+        <p:nvSpPr>
+          <p:cNvPr id="3" name="Rounded Rectangle 2"/>
+          <p:cNvSpPr/>
+          <p:nvPr/>
+        </p:nvSpPr>
+        <p:spPr>
+          <a:xfrm>
+            <a:off x="699516" y="1874519"/>
+            <a:ext cx="1417320" cy="777240"/>
+          </a:xfrm>
+          <a:prstGeom prst="roundRect">
+            <a:avLst/>
+          </a:prstGeom>
+          <a:solidFill>
+            <a:srgbClr val="2B7CA8"/>
+          </a:solidFill>
+          <a:ln>
+            <a:solidFill>
+              <a:srgbClr val="DDDDDD"/>
+            </a:solidFill>
+          </a:ln>
+        </p:spPr>
+        <p:style>
+          <a:lnRef idx="1">
+            <a:schemeClr val="accent1"/>
+          </a:lnRef>
+          <a:fillRef idx="3">
+            <a:schemeClr val="accent1"/>
+          </a:fillRef>
+          <a:effectRef idx="2">
+            <a:schemeClr val="accent1"/>
+          </a:effectRef>
+          <a:fontRef idx="minor">
+            <a:schemeClr val="lt1"/>
+          </a:fontRef>
+        </p:style>
+        <p:txBody>
+          <a:bodyPr rtlCol="0" anchor="ctr" wrap="square"/>
+          <a:lstStyle/>
+          <a:p>
+            <a:pPr algn="ctr">
+              <a:defRPr b="1" sz="1400">
+                <a:solidFill>
+                  <a:srgbClr val="FFFFFF"/>
+                </a:solidFill>
+              </a:defRPr>
+            </a:pPr>
+            <a:r>
+              <a:t>PDF</a:t>
+            </a:r>
+          </a:p>
+          <a:p>
+            <a:pPr algn="ctr">
+              <a:defRPr sz="1000">
+                <a:solidFill>
+                  <a:srgbClr val="E2E8F0"/>
+                </a:solidFill>
+              </a:defRPr>
+            </a:pPr>
+            <a:r>
+              <a:t>LlamaParse</a:t>
+            </a:r>
+          </a:p>
+        </p:txBody>
+      </p:sp>
+      <p:sp>
+        <p:nvSpPr>
+          <p:cNvPr id="4" name="Right Arrow 3"/>
+          <p:cNvSpPr/>
+          <p:nvPr/>
+        </p:nvSpPr>
+        <p:spPr>
+          <a:xfrm>
+            <a:off x="2135124" y="2153411"/>
+            <a:ext cx="128016" cy="219456"/>
+          </a:xfrm>
+          <a:prstGeom prst="rightArrow">
+            <a:avLst/>
+          </a:prstGeom>
+          <a:solidFill>
+            <a:srgbClr val="A0AEC0"/>
+          </a:solidFill>
+          <a:ln>
+            <a:noFill/>
+          </a:ln>
+        </p:spPr>
+        <p:style>
+          <a:lnRef idx="1">
+            <a:schemeClr val="accent1"/>
+          </a:lnRef>
+          <a:fillRef idx="3">
+            <a:schemeClr val="accent1"/>
+          </a:fillRef>
+          <a:effectRef idx="2">
+            <a:schemeClr val="accent1"/>
+          </a:effectRef>
+          <a:fontRef idx="minor">
+            <a:schemeClr val="lt1"/>
+          </a:fontRef>
+        </p:style>
+        <p:txBody>
+          <a:bodyPr rtlCol="0" anchor="ctr"/>
+          <a:lstStyle/>
+          <a:p>
+            <a:pPr algn="ctr"/>
+          </a:p>
+        </p:txBody>
+      </p:sp>
+      <p:sp>
+        <p:nvSpPr>
+          <p:cNvPr id="5" name="Rounded Rectangle 4"/>
+          <p:cNvSpPr/>
+          <p:nvPr/>
+        </p:nvSpPr>
+        <p:spPr>
+          <a:xfrm>
+            <a:off x="2281428" y="1874519"/>
+            <a:ext cx="1417320" cy="777240"/>
+          </a:xfrm>
+          <a:prstGeom prst="roundRect">
+            <a:avLst/>
+          </a:prstGeom>
+          <a:solidFill>
+            <a:srgbClr val="1E3A5F"/>
+          </a:solidFill>
+          <a:ln>
+            <a:solidFill>
+              <a:srgbClr val="DDDDDD"/>
+            </a:solidFill>
+          </a:ln>
+        </p:spPr>
+        <p:style>
+          <a:lnRef idx="1">
+            <a:schemeClr val="accent1"/>
+          </a:lnRef>
+          <a:fillRef idx="3">
+            <a:schemeClr val="accent1"/>
+          </a:fillRef>
+          <a:effectRef idx="2">
+            <a:schemeClr val="accent1"/>
+          </a:effectRef>
+          <a:fontRef idx="minor">
+            <a:schemeClr val="lt1"/>
+          </a:fontRef>
+        </p:style>
+        <p:txBody>
+          <a:bodyPr rtlCol="0" anchor="ctr" wrap="square"/>
+          <a:lstStyle/>
+          <a:p>
+            <a:pPr algn="ctr">
+              <a:defRPr b="1" sz="1400">
+                <a:solidFill>
+                  <a:srgbClr val="FFFFFF"/>
+                </a:solidFill>
+              </a:defRPr>
+            </a:pPr>
+            <a:r>
+              <a:t>Chunks</a:t>
+            </a:r>
+          </a:p>
+          <a:p>
+            <a:pPr algn="ctr">
+              <a:defRPr sz="1000">
+                <a:solidFill>
+                  <a:srgbClr val="E2E8F0"/>
+                </a:solidFill>
+              </a:defRPr>
+            </a:pPr>
+            <a:r>
+              <a:t>Headers + split</a:t>
+            </a:r>
+          </a:p>
+        </p:txBody>
+      </p:sp>
+      <p:sp>
+        <p:nvSpPr>
+          <p:cNvPr id="6" name="Right Arrow 5"/>
+          <p:cNvSpPr/>
+          <p:nvPr/>
+        </p:nvSpPr>
+        <p:spPr>
+          <a:xfrm>
+            <a:off x="3717036" y="2153411"/>
+            <a:ext cx="128016" cy="219456"/>
+          </a:xfrm>
+          <a:prstGeom prst="rightArrow">
+            <a:avLst/>
+          </a:prstGeom>
+          <a:solidFill>
+            <a:srgbClr val="A0AEC0"/>
+          </a:solidFill>
+          <a:ln>
+            <a:noFill/>
+          </a:ln>
+        </p:spPr>
+        <p:style>
+          <a:lnRef idx="1">
+            <a:schemeClr val="accent1"/>
+          </a:lnRef>
+          <a:fillRef idx="3">
+            <a:schemeClr val="accent1"/>
+          </a:fillRef>
+          <a:effectRef idx="2">
+            <a:schemeClr val="accent1"/>
+          </a:effectRef>
+          <a:fontRef idx="minor">
+            <a:schemeClr val="lt1"/>
+          </a:fontRef>
+        </p:style>
+        <p:txBody>
+          <a:bodyPr rtlCol="0" anchor="ctr"/>
+          <a:lstStyle/>
+          <a:p>
+            <a:pPr algn="ctr"/>
+          </a:p>
+        </p:txBody>
+      </p:sp>
+      <p:sp>
+        <p:nvSpPr>
+          <p:cNvPr id="7" name="Rounded Rectangle 6"/>
+          <p:cNvSpPr/>
+          <p:nvPr/>
+        </p:nvSpPr>
+        <p:spPr>
+          <a:xfrm>
+            <a:off x="3863340" y="1874519"/>
+            <a:ext cx="1417320" cy="777240"/>
+          </a:xfrm>
+          <a:prstGeom prst="roundRect">
+            <a:avLst/>
+          </a:prstGeom>
+          <a:solidFill>
+            <a:srgbClr val="2B7CA8"/>
+          </a:solidFill>
+          <a:ln>
+            <a:solidFill>
+              <a:srgbClr val="DDDDDD"/>
+            </a:solidFill>
+          </a:ln>
+        </p:spPr>
+        <p:style>
+          <a:lnRef idx="1">
+            <a:schemeClr val="accent1"/>
+          </a:lnRef>
+          <a:fillRef idx="3">
+            <a:schemeClr val="accent1"/>
+          </a:fillRef>
+          <a:effectRef idx="2">
+            <a:schemeClr val="accent1"/>
+          </a:effectRef>
+          <a:fontRef idx="minor">
+            <a:schemeClr val="lt1"/>
+          </a:fontRef>
+        </p:style>
+        <p:txBody>
+          <a:bodyPr rtlCol="0" anchor="ctr" wrap="square"/>
+          <a:lstStyle/>
+          <a:p>
+            <a:pPr algn="ctr">
+              <a:defRPr b="1" sz="1400">
+                <a:solidFill>
+                  <a:srgbClr val="FFFFFF"/>
+                </a:solidFill>
+              </a:defRPr>
+            </a:pPr>
+            <a:r>
+              <a:t>Index</a:t>
+            </a:r>
+          </a:p>
+          <a:p>
+            <a:pPr algn="ctr">
+              <a:defRPr sz="1000">
+                <a:solidFill>
+                  <a:srgbClr val="E2E8F0"/>
+                </a:solidFill>
+              </a:defRPr>
+            </a:pPr>
+            <a:r>
+              <a:t>Chroma + BM25 + rerank</a:t>
+            </a:r>
+          </a:p>
+        </p:txBody>
+      </p:sp>
+      <p:sp>
+        <p:nvSpPr>
+          <p:cNvPr id="8" name="Right Arrow 7"/>
+          <p:cNvSpPr/>
+          <p:nvPr/>
+        </p:nvSpPr>
+        <p:spPr>
+          <a:xfrm>
+            <a:off x="5298948" y="2153411"/>
+            <a:ext cx="128016" cy="219456"/>
+          </a:xfrm>
+          <a:prstGeom prst="rightArrow">
+            <a:avLst/>
+          </a:prstGeom>
+          <a:solidFill>
+            <a:srgbClr val="A0AEC0"/>
+          </a:solidFill>
+          <a:ln>
+            <a:noFill/>
+          </a:ln>
+        </p:spPr>
+        <p:style>
+          <a:lnRef idx="1">
+            <a:schemeClr val="accent1"/>
+          </a:lnRef>
+          <a:fillRef idx="3">
+            <a:schemeClr val="accent1"/>
+          </a:fillRef>
+          <a:effectRef idx="2">
+            <a:schemeClr val="accent1"/>
+          </a:effectRef>
+          <a:fontRef idx="minor">
+            <a:schemeClr val="lt1"/>
+          </a:fontRef>
+        </p:style>
+        <p:txBody>
+          <a:bodyPr rtlCol="0" anchor="ctr"/>
+          <a:lstStyle/>
+          <a:p>
+            <a:pPr algn="ctr"/>
+          </a:p>
+        </p:txBody>
+      </p:sp>
+      <p:sp>
+        <p:nvSpPr>
+          <p:cNvPr id="9" name="Rounded Rectangle 8"/>
+          <p:cNvSpPr/>
+          <p:nvPr/>
+        </p:nvSpPr>
+        <p:spPr>
+          <a:xfrm>
+            <a:off x="5445252" y="1874519"/>
+            <a:ext cx="1417320" cy="777240"/>
+          </a:xfrm>
+          <a:prstGeom prst="roundRect">
+            <a:avLst/>
+          </a:prstGeom>
+          <a:solidFill>
+            <a:srgbClr val="1E3A5F"/>
+          </a:solidFill>
+          <a:ln>
+            <a:solidFill>
+              <a:srgbClr val="DDDDDD"/>
+            </a:solidFill>
+          </a:ln>
+        </p:spPr>
+        <p:style>
+          <a:lnRef idx="1">
+            <a:schemeClr val="accent1"/>
+          </a:lnRef>
+          <a:fillRef idx="3">
+            <a:schemeClr val="accent1"/>
+          </a:fillRef>
+          <a:effectRef idx="2">
+            <a:schemeClr val="accent1"/>
+          </a:effectRef>
+          <a:fontRef idx="minor">
+            <a:schemeClr val="lt1"/>
+          </a:fontRef>
+        </p:style>
+        <p:txBody>
+          <a:bodyPr rtlCol="0" anchor="ctr" wrap="square"/>
+          <a:lstStyle/>
+          <a:p>
+            <a:pPr algn="ctr">
+              <a:defRPr b="1" sz="1400">
+                <a:solidFill>
+                  <a:srgbClr val="FFFFFF"/>
+                </a:solidFill>
+              </a:defRPr>
+            </a:pPr>
+            <a:r>
+              <a:t>RAG</a:t>
+            </a:r>
+          </a:p>
+          <a:p>
+            <a:pPr algn="ctr">
+              <a:defRPr sz="1000">
+                <a:solidFill>
+                  <a:srgbClr val="E2E8F0"/>
+                </a:solidFill>
+              </a:defRPr>
+            </a:pPr>
+            <a:r>
+              <a:t>GPT-4o + cites</a:t>
+            </a:r>
+          </a:p>
+        </p:txBody>
+      </p:sp>
+      <p:sp>
+        <p:nvSpPr>
+          <p:cNvPr id="10" name="Right Arrow 9"/>
+          <p:cNvSpPr/>
+          <p:nvPr/>
+        </p:nvSpPr>
+        <p:spPr>
+          <a:xfrm>
+            <a:off x="6880860" y="2153411"/>
+            <a:ext cx="128016" cy="219456"/>
+          </a:xfrm>
+          <a:prstGeom prst="rightArrow">
+            <a:avLst/>
+          </a:prstGeom>
+          <a:solidFill>
+            <a:srgbClr val="A0AEC0"/>
+          </a:solidFill>
+          <a:ln>
+            <a:noFill/>
+          </a:ln>
+        </p:spPr>
+        <p:style>
+          <a:lnRef idx="1">
+            <a:schemeClr val="accent1"/>
+          </a:lnRef>
+          <a:fillRef idx="3">
+            <a:schemeClr val="accent1"/>
+          </a:fillRef>
+          <a:effectRef idx="2">
+            <a:schemeClr val="accent1"/>
+          </a:effectRef>
+          <a:fontRef idx="minor">
+            <a:schemeClr val="lt1"/>
+          </a:fontRef>
+        </p:style>
+        <p:txBody>
+          <a:bodyPr rtlCol="0" anchor="ctr"/>
+          <a:lstStyle/>
+          <a:p>
+            <a:pPr algn="ctr"/>
+          </a:p>
+        </p:txBody>
+      </p:sp>
+      <p:sp>
+        <p:nvSpPr>
+          <p:cNvPr id="11" name="Rounded Rectangle 10"/>
+          <p:cNvSpPr/>
+          <p:nvPr/>
+        </p:nvSpPr>
+        <p:spPr>
+          <a:xfrm>
+            <a:off x="7027164" y="1874519"/>
+            <a:ext cx="1417320" cy="777240"/>
+          </a:xfrm>
+          <a:prstGeom prst="roundRect">
+            <a:avLst/>
+          </a:prstGeom>
+          <a:solidFill>
+            <a:srgbClr val="2B7CA8"/>
+          </a:solidFill>
+          <a:ln>
+            <a:solidFill>
+              <a:srgbClr val="DDDDDD"/>
+            </a:solidFill>
+          </a:ln>
+        </p:spPr>
+        <p:style>
+          <a:lnRef idx="1">
+            <a:schemeClr val="accent1"/>
+          </a:lnRef>
+          <a:fillRef idx="3">
+            <a:schemeClr val="accent1"/>
+          </a:fillRef>
+          <a:effectRef idx="2">
+            <a:schemeClr val="accent1"/>
+          </a:effectRef>
+          <a:fontRef idx="minor">
+            <a:schemeClr val="lt1"/>
+          </a:fontRef>
+        </p:style>
+        <p:txBody>
+          <a:bodyPr rtlCol="0" anchor="ctr" wrap="square"/>
+          <a:lstStyle/>
+          <a:p>
+            <a:pPr algn="ctr">
+              <a:defRPr b="1" sz="1400">
+                <a:solidFill>
+                  <a:srgbClr val="FFFFFF"/>
+                </a:solidFill>
+              </a:defRPr>
+            </a:pPr>
+            <a:r>
+              <a:t>Eval</a:t>
+            </a:r>
+          </a:p>
+          <a:p>
+            <a:pPr algn="ctr">
+              <a:defRPr sz="1000">
+                <a:solidFill>
+                  <a:srgbClr val="E2E8F0"/>
+                </a:solidFill>
+              </a:defRPr>
+            </a:pPr>
+            <a:r>
+              <a:t>Judges + RAGAS</a:t>
+            </a:r>
+          </a:p>
+        </p:txBody>
+      </p:sp>
+      <p:sp>
+        <p:nvSpPr>
+          <p:cNvPr id="12" name="TextBox 11"/>
+          <p:cNvSpPr txBox="1"/>
+          <p:nvPr/>
+        </p:nvSpPr>
+        <p:spPr>
+          <a:xfrm>
+            <a:off x="594360" y="4617720"/>
+            <a:ext cx="7955279" cy="1737360"/>
+          </a:xfrm>
+          <a:prstGeom prst="rect">
+            <a:avLst/>
+          </a:prstGeom>
+          <a:noFill/>
+        </p:spPr>
+        <p:txBody>
+          <a:bodyPr wrap="square">
+            <a:spAutoFit/>
+          </a:bodyPr>
+          <a:lstStyle/>
           <a:p>
             <a:pPr>
-              <a:defRPr sz="1800"/>
+              <a:spcAft>
+                <a:spcPts val="600"/>
+              </a:spcAft>
+              <a:defRPr sz="1400">
+                <a:solidFill>
+                  <a:srgbClr val="4A5568"/>
+                </a:solidFill>
+              </a:defRPr>
             </a:pPr>
             <a:r>
-              <a:t>Compare outcomes on two genres: SEC-style 10-Ks (Nvidia, JPM) vs FDA drug labels (Humira, Keytruda)—same pipeline, different language and structure.</a:t>
+              <a:t>Tools: LlamaParse, LangChain chunking, Chroma, BGE reranker, OpenAI GPT-4o.</a:t>
             </a:r>
           </a:p>
           <a:p>
             <a:pPr>
-              <a:defRPr sz="1800"/>
+              <a:spcAft>
+                <a:spcPts val="600"/>
+              </a:spcAft>
+              <a:defRPr sz="1400">
+                <a:solidFill>
+                  <a:srgbClr val="4A5568"/>
+                </a:solidFill>
+              </a:defRPr>
             </a:pPr>
             <a:r>
-              <a:t>Unique angle: Not only which prompt wins globally, but whether improvements are consistent across industries and where tradeoffs appear (grounding vs correctness).</a:t>
-            </a:r>
-          </a:p>
-          <a:p>
-            <a:pPr>
-              <a:defRPr sz="1800"/>
-            </a:pPr>
-            <a:r>
-              <a:t>Tier A vs Tier B: Tier A = same chunks/gold (fair A/B for top-k &amp; prompts). Tier B = alternate chunking (separate gold)—reported separately to avoid apples-to-oranges comparisons.</a:t>
+              <a:t>Metrics: recall &amp; citations, LLM judge (context/claims), RAGAS scores.</a:t>
             </a:r>
           </a:p>
         </p:txBody>
@@ -3774,6 +5626,14 @@
 <file path=ppt/slides/slide6.xml><?xml version="1.0" encoding="utf-8"?>
 <p:sld xmlns:a="http://schemas.openxmlformats.org/drawingml/2006/main" xmlns:p="http://schemas.openxmlformats.org/presentationml/2006/main" xmlns:r="http://schemas.openxmlformats.org/officeDocument/2006/relationships">
   <p:cSld>
+    <p:bg>
+      <p:bgPr>
+        <a:solidFill>
+          <a:srgbClr val="F8FAFC"/>
+        </a:solidFill>
+        <a:effectLst/>
+      </p:bgPr>
+    </p:bg>
     <p:spTree>
       <p:nvGrpSpPr>
         <p:cNvPr id="1" name=""/>
@@ -3783,85 +5643,135 @@
       <p:grpSpPr/>
       <p:sp>
         <p:nvSpPr>
-          <p:cNvPr id="2" name="Title 1"/>
-          <p:cNvSpPr>
-            <a:spLocks noGrp="1"/>
-          </p:cNvSpPr>
-          <p:nvPr>
-            <p:ph type="title"/>
-          </p:nvPr>
-        </p:nvSpPr>
-        <p:spPr/>
-        <p:txBody>
-          <a:bodyPr/>
-          <a:lstStyle/>
-          <a:p>
-            <a:r>
-              <a:t>Implementation</a:t>
-            </a:r>
-          </a:p>
-        </p:txBody>
-      </p:sp>
-      <p:sp>
-        <p:nvSpPr>
-          <p:cNvPr id="3" name="Content Placeholder 2"/>
-          <p:cNvSpPr>
-            <a:spLocks noGrp="1"/>
-          </p:cNvSpPr>
-          <p:nvPr>
-            <p:ph idx="1"/>
-          </p:nvPr>
-        </p:nvSpPr>
-        <p:spPr/>
-        <p:txBody>
-          <a:bodyPr/>
-          <a:lstStyle/>
+          <p:cNvPr id="2" name="Rectangle 1"/>
+          <p:cNvSpPr/>
+          <p:nvPr/>
+        </p:nvSpPr>
+        <p:spPr>
+          <a:xfrm>
+            <a:off x="0" y="0"/>
+            <a:ext cx="9144000" cy="1051560"/>
+          </a:xfrm>
+          <a:prstGeom prst="rect">
+            <a:avLst/>
+          </a:prstGeom>
+          <a:solidFill>
+            <a:srgbClr val="1E3A5F"/>
+          </a:solidFill>
+          <a:ln>
+            <a:noFill/>
+          </a:ln>
+        </p:spPr>
+        <p:style>
+          <a:lnRef idx="1">
+            <a:schemeClr val="accent1"/>
+          </a:lnRef>
+          <a:fillRef idx="3">
+            <a:schemeClr val="accent1"/>
+          </a:fillRef>
+          <a:effectRef idx="2">
+            <a:schemeClr val="accent1"/>
+          </a:effectRef>
+          <a:fontRef idx="minor">
+            <a:schemeClr val="lt1"/>
+          </a:fontRef>
+        </p:style>
+        <p:txBody>
+          <a:bodyPr rtlCol="0" anchor="ctr" lIns="457200" tIns="228600" wrap="square"/>
+          <a:lstStyle/>
+          <a:p>
+            <a:pPr algn="l">
+              <a:defRPr sz="2800" b="1">
+                <a:solidFill>
+                  <a:srgbClr val="FFFFFF"/>
+                </a:solidFill>
+              </a:defRPr>
+            </a:pPr>
+            <a:r>
+              <a:t>Tier A — Cross-corpus change vs baseline</a:t>
+            </a:r>
+          </a:p>
           <a:p>
             <a:pPr>
-              <a:defRPr sz="1800"/>
+              <a:defRPr sz="1400">
+                <a:solidFill>
+                  <a:srgbClr val="E2E8F0"/>
+                </a:solidFill>
+              </a:defRPr>
             </a:pPr>
             <a:r>
-              <a:t>Ingestion: LlamaParse PDF-to-Markdown; semantic chunking (LangChain splitters) with experiment-specific chunk/header presets.</a:t>
-            </a:r>
-          </a:p>
+              <a:t>Same gold &amp; chunks; 4 corpora averaged (see CSV for min/max)</a:t>
+            </a:r>
+          </a:p>
+        </p:txBody>
+      </p:sp>
+      <p:graphicFrame>
+        <p:nvGraphicFramePr>
+          <p:cNvPr id="3" name="Chart 2"/>
+          <p:cNvGraphicFramePr>
+            <a:graphicFrameLocks noGrp="1"/>
+          </p:cNvGraphicFramePr>
+          <p:nvPr/>
+        </p:nvGraphicFramePr>
+        <p:xfrm>
+          <a:off x="502920" y="1234440"/>
+          <a:ext cx="8229600" cy="4434840"/>
+        </p:xfrm>
+        <a:graphic>
+          <a:graphicData uri="http://schemas.openxmlformats.org/drawingml/2006/chart">
+            <c:chart xmlns:c="http://schemas.openxmlformats.org/drawingml/2006/chart" r:id="rId2"/>
+          </a:graphicData>
+        </a:graphic>
+      </p:graphicFrame>
+      <p:sp>
+        <p:nvSpPr>
+          <p:cNvPr id="4" name="TextBox 3"/>
+          <p:cNvSpPr txBox="1"/>
+          <p:nvPr/>
+        </p:nvSpPr>
+        <p:spPr>
+          <a:xfrm>
+            <a:off x="502920" y="5806440"/>
+            <a:ext cx="8321040" cy="777240"/>
+          </a:xfrm>
+          <a:prstGeom prst="rect">
+            <a:avLst/>
+          </a:prstGeom>
+          <a:noFill/>
+        </p:spPr>
+        <p:txBody>
+          <a:bodyPr wrap="square">
+            <a:spAutoFit/>
+          </a:bodyPr>
+          <a:lstStyle/>
           <a:p>
             <a:pPr>
-              <a:defRPr sz="1800"/>
+              <a:spcAft>
+                <a:spcPts val="600"/>
+              </a:spcAft>
+              <a:defRPr sz="1100">
+                <a:solidFill>
+                  <a:srgbClr val="4A5568"/>
+                </a:solidFill>
+              </a:defRPr>
             </a:pPr>
             <a:r>
-              <a:t>Retrieval &amp; generation: Chroma + embeddings; BM25; cross-encoder reranker (BGE); OpenAI GPT-4o generator with chunk-ID citations.</a:t>
+              <a:t>Left bars: lower context-hallucination flag is better. Right bars: higher answer correctness is better.</a:t>
             </a:r>
           </a:p>
           <a:p>
             <a:pPr>
-              <a:defRPr sz="1800"/>
+              <a:spcAft>
+                <a:spcPts val="600"/>
+              </a:spcAft>
+              <a:defRPr sz="1100">
+                <a:solidFill>
+                  <a:srgbClr val="4A5568"/>
+                </a:solidFill>
+              </a:defRPr>
             </a:pPr>
             <a:r>
-              <a:t>Experiments: baseline (k=5), k=3/8/10, chain-of-thought prompts, strict citation post-processing (force abstain if cites invalid/missing), and chunk ablations.</a:t>
-            </a:r>
-          </a:p>
-          <a:p>
-            <a:pPr>
-              <a:defRPr sz="1800"/>
-            </a:pPr>
-            <a:r>
-              <a:t>Gold data: Synthetic Q/A from sampled chunks + critique filter; evaluation n=10 questions per run (pilot scale).</a:t>
-            </a:r>
-          </a:p>
-          <a:p>
-            <a:pPr>
-              <a:defRPr sz="1800"/>
-            </a:pPr>
-            <a:r>
-              <a:t>Metrics: Rule-based (recall@k, citation issues), dedicated LLM judge for context-grounded hallucinations &amp; claim rates, RAGAS (faithfulness, relevancy, correctness).</a:t>
-            </a:r>
-          </a:p>
-          <a:p>
-            <a:pPr>
-              <a:defRPr sz="1800"/>
-            </a:pPr>
-            <a:r>
-              <a:t>Hardening: Rate-limit retries on OpenAI 429s for long batch runs.</a:t>
+              <a:t>k3 best avg drop in hallucination flag; k8+CoT best avg gain in correctness but raises hallucination flag on average.</a:t>
             </a:r>
           </a:p>
         </p:txBody>
@@ -3877,6 +5787,14 @@
 <file path=ppt/slides/slide7.xml><?xml version="1.0" encoding="utf-8"?>
 <p:sld xmlns:a="http://schemas.openxmlformats.org/drawingml/2006/main" xmlns:p="http://schemas.openxmlformats.org/presentationml/2006/main" xmlns:r="http://schemas.openxmlformats.org/officeDocument/2006/relationships">
   <p:cSld>
+    <p:bg>
+      <p:bgPr>
+        <a:solidFill>
+          <a:srgbClr val="F8FAFC"/>
+        </a:solidFill>
+        <a:effectLst/>
+      </p:bgPr>
+    </p:bg>
     <p:spTree>
       <p:nvGrpSpPr>
         <p:cNvPr id="1" name=""/>
@@ -3886,77 +5804,830 @@
       <p:grpSpPr/>
       <p:sp>
         <p:nvSpPr>
-          <p:cNvPr id="2" name="Title 1"/>
-          <p:cNvSpPr>
-            <a:spLocks noGrp="1"/>
-          </p:cNvSpPr>
-          <p:nvPr>
-            <p:ph type="title"/>
-          </p:nvPr>
-        </p:nvSpPr>
-        <p:spPr/>
-        <p:txBody>
-          <a:bodyPr/>
-          <a:lstStyle/>
-          <a:p>
-            <a:r>
-              <a:t>Evaluation Design</a:t>
-            </a:r>
-          </a:p>
-        </p:txBody>
-      </p:sp>
-      <p:sp>
-        <p:nvSpPr>
-          <p:cNvPr id="3" name="Content Placeholder 2"/>
-          <p:cNvSpPr>
-            <a:spLocks noGrp="1"/>
-          </p:cNvSpPr>
-          <p:nvPr>
-            <p:ph idx="1"/>
-          </p:nvPr>
-        </p:nvSpPr>
-        <p:spPr/>
-        <p:txBody>
-          <a:bodyPr/>
-          <a:lstStyle/>
+          <p:cNvPr id="2" name="Rectangle 1"/>
+          <p:cNvSpPr/>
+          <p:nvPr/>
+        </p:nvSpPr>
+        <p:spPr>
+          <a:xfrm>
+            <a:off x="0" y="0"/>
+            <a:ext cx="9144000" cy="1051560"/>
+          </a:xfrm>
+          <a:prstGeom prst="rect">
+            <a:avLst/>
+          </a:prstGeom>
+          <a:solidFill>
+            <a:srgbClr val="1E3A5F"/>
+          </a:solidFill>
+          <a:ln>
+            <a:noFill/>
+          </a:ln>
+        </p:spPr>
+        <p:style>
+          <a:lnRef idx="1">
+            <a:schemeClr val="accent1"/>
+          </a:lnRef>
+          <a:fillRef idx="3">
+            <a:schemeClr val="accent1"/>
+          </a:fillRef>
+          <a:effectRef idx="2">
+            <a:schemeClr val="accent1"/>
+          </a:effectRef>
+          <a:fontRef idx="minor">
+            <a:schemeClr val="lt1"/>
+          </a:fontRef>
+        </p:style>
+        <p:txBody>
+          <a:bodyPr rtlCol="0" anchor="ctr" lIns="457200" tIns="228600" wrap="square"/>
+          <a:lstStyle/>
+          <a:p>
+            <a:pPr algn="l">
+              <a:defRPr sz="2800" b="1">
+                <a:solidFill>
+                  <a:srgbClr val="FFFFFF"/>
+                </a:solidFill>
+              </a:defRPr>
+            </a:pPr>
+            <a:r>
+              <a:t>Tier A — Pooled means (by genre)</a:t>
+            </a:r>
+          </a:p>
           <a:p>
             <a:pPr>
-              <a:defRPr sz="1800"/>
+              <a:defRPr sz="1400">
+                <a:solidFill>
+                  <a:srgbClr val="E2E8F0"/>
+                </a:solidFill>
+              </a:defRPr>
             </a:pPr>
             <a:r>
-              <a:t>Corpora: 4 PDFs — 2 large 10-Ks, 2 long FDA labels (public regulatory text).</a:t>
-            </a:r>
-          </a:p>
+              <a:t>FDA labels vs 10-Ks — baseline, k3, k8+CoT</a:t>
+            </a:r>
+          </a:p>
+        </p:txBody>
+      </p:sp>
+      <p:graphicFrame>
+        <p:nvGraphicFramePr>
+          <p:cNvPr id="3" name="Table 2"/>
+          <p:cNvGraphicFramePr>
+            <a:graphicFrameLocks noGrp="1"/>
+          </p:cNvGraphicFramePr>
+          <p:nvPr/>
+        </p:nvGraphicFramePr>
+        <p:xfrm>
+          <a:off x="548640" y="1234440"/>
+          <a:ext cx="8229600" cy="2688336"/>
+        </p:xfrm>
+        <a:graphic>
+          <a:graphicData uri="http://schemas.openxmlformats.org/drawingml/2006/table">
+            <a:tbl>
+              <a:tblPr firstRow="1" bandRow="1">
+                <a:tableStyleId>{5C22544A-7EE6-4342-B048-85BDC9FD1C3A}</a:tableStyleId>
+              </a:tblPr>
+              <a:tblGrid>
+                <a:gridCol w="1645920"/>
+                <a:gridCol w="1645920"/>
+                <a:gridCol w="1645920"/>
+                <a:gridCol w="1645920"/>
+                <a:gridCol w="1645920"/>
+              </a:tblGrid>
+              <a:tr h="384048">
+                <a:tc>
+                  <a:txBody>
+                    <a:bodyPr/>
+                    <a:lstStyle/>
+                    <a:p>
+                      <a:pPr>
+                        <a:defRPr sz="1100" b="1">
+                          <a:solidFill>
+                            <a:srgbClr val="FFFFFF"/>
+                          </a:solidFill>
+                        </a:defRPr>
+                      </a:pPr>
+                      <a:r>
+                        <a:t>genre</a:t>
+                      </a:r>
+                    </a:p>
+                  </a:txBody>
+                  <a:tcPr>
+                    <a:solidFill>
+                      <a:srgbClr val="1E3A5F"/>
+                    </a:solidFill>
+                  </a:tcPr>
+                </a:tc>
+                <a:tc>
+                  <a:txBody>
+                    <a:bodyPr/>
+                    <a:lstStyle/>
+                    <a:p>
+                      <a:pPr>
+                        <a:defRPr sz="1100" b="1">
+                          <a:solidFill>
+                            <a:srgbClr val="FFFFFF"/>
+                          </a:solidFill>
+                        </a:defRPr>
+                      </a:pPr>
+                      <a:r>
+                        <a:t>experiment</a:t>
+                      </a:r>
+                    </a:p>
+                  </a:txBody>
+                  <a:tcPr>
+                    <a:solidFill>
+                      <a:srgbClr val="1E3A5F"/>
+                    </a:solidFill>
+                  </a:tcPr>
+                </a:tc>
+                <a:tc>
+                  <a:txBody>
+                    <a:bodyPr/>
+                    <a:lstStyle/>
+                    <a:p>
+                      <a:pPr>
+                        <a:defRPr sz="1100" b="1">
+                          <a:solidFill>
+                            <a:srgbClr val="FFFFFF"/>
+                          </a:solidFill>
+                        </a:defRPr>
+                      </a:pPr>
+                      <a:r>
+                        <a:t>recall at 5</a:t>
+                      </a:r>
+                    </a:p>
+                  </a:txBody>
+                  <a:tcPr>
+                    <a:solidFill>
+                      <a:srgbClr val="1E3A5F"/>
+                    </a:solidFill>
+                  </a:tcPr>
+                </a:tc>
+                <a:tc>
+                  <a:txBody>
+                    <a:bodyPr/>
+                    <a:lstStyle/>
+                    <a:p>
+                      <a:pPr>
+                        <a:defRPr sz="1100" b="1">
+                          <a:solidFill>
+                            <a:srgbClr val="FFFFFF"/>
+                          </a:solidFill>
+                        </a:defRPr>
+                      </a:pPr>
+                      <a:r>
+                        <a:t>context hallucination</a:t>
+                      </a:r>
+                    </a:p>
+                  </a:txBody>
+                  <a:tcPr>
+                    <a:solidFill>
+                      <a:srgbClr val="1E3A5F"/>
+                    </a:solidFill>
+                  </a:tcPr>
+                </a:tc>
+                <a:tc>
+                  <a:txBody>
+                    <a:bodyPr/>
+                    <a:lstStyle/>
+                    <a:p>
+                      <a:pPr>
+                        <a:defRPr sz="1100" b="1">
+                          <a:solidFill>
+                            <a:srgbClr val="FFFFFF"/>
+                          </a:solidFill>
+                        </a:defRPr>
+                      </a:pPr>
+                      <a:r>
+                        <a:t>answer correctness</a:t>
+                      </a:r>
+                    </a:p>
+                  </a:txBody>
+                  <a:tcPr>
+                    <a:solidFill>
+                      <a:srgbClr val="1E3A5F"/>
+                    </a:solidFill>
+                  </a:tcPr>
+                </a:tc>
+              </a:tr>
+              <a:tr h="384048">
+                <a:tc>
+                  <a:txBody>
+                    <a:bodyPr/>
+                    <a:lstStyle/>
+                    <a:p>
+                      <a:pPr>
+                        <a:defRPr sz="1100">
+                          <a:solidFill>
+                            <a:srgbClr val="4A5568"/>
+                          </a:solidFill>
+                        </a:defRPr>
+                      </a:pPr>
+                      <a:r>
+                        <a:t>fda_label</a:t>
+                      </a:r>
+                    </a:p>
+                  </a:txBody>
+                  <a:tcPr/>
+                </a:tc>
+                <a:tc>
+                  <a:txBody>
+                    <a:bodyPr/>
+                    <a:lstStyle/>
+                    <a:p>
+                      <a:pPr>
+                        <a:defRPr sz="1100">
+                          <a:solidFill>
+                            <a:srgbClr val="4A5568"/>
+                          </a:solidFill>
+                        </a:defRPr>
+                      </a:pPr>
+                      <a:r>
+                        <a:t>baseline</a:t>
+                      </a:r>
+                    </a:p>
+                  </a:txBody>
+                  <a:tcPr/>
+                </a:tc>
+                <a:tc>
+                  <a:txBody>
+                    <a:bodyPr/>
+                    <a:lstStyle/>
+                    <a:p>
+                      <a:pPr>
+                        <a:defRPr sz="1100">
+                          <a:solidFill>
+                            <a:srgbClr val="4A5568"/>
+                          </a:solidFill>
+                        </a:defRPr>
+                      </a:pPr>
+                      <a:r>
+                        <a:t>0.650</a:t>
+                      </a:r>
+                    </a:p>
+                  </a:txBody>
+                  <a:tcPr/>
+                </a:tc>
+                <a:tc>
+                  <a:txBody>
+                    <a:bodyPr/>
+                    <a:lstStyle/>
+                    <a:p>
+                      <a:pPr>
+                        <a:defRPr sz="1100">
+                          <a:solidFill>
+                            <a:srgbClr val="4A5568"/>
+                          </a:solidFill>
+                        </a:defRPr>
+                      </a:pPr>
+                      <a:r>
+                        <a:t>0.100</a:t>
+                      </a:r>
+                    </a:p>
+                  </a:txBody>
+                  <a:tcPr/>
+                </a:tc>
+                <a:tc>
+                  <a:txBody>
+                    <a:bodyPr/>
+                    <a:lstStyle/>
+                    <a:p>
+                      <a:pPr>
+                        <a:defRPr sz="1100">
+                          <a:solidFill>
+                            <a:srgbClr val="4A5568"/>
+                          </a:solidFill>
+                        </a:defRPr>
+                      </a:pPr>
+                      <a:r>
+                        <a:t>0.668</a:t>
+                      </a:r>
+                    </a:p>
+                  </a:txBody>
+                  <a:tcPr/>
+                </a:tc>
+              </a:tr>
+              <a:tr h="384048">
+                <a:tc>
+                  <a:txBody>
+                    <a:bodyPr/>
+                    <a:lstStyle/>
+                    <a:p>
+                      <a:pPr>
+                        <a:defRPr sz="1100">
+                          <a:solidFill>
+                            <a:srgbClr val="4A5568"/>
+                          </a:solidFill>
+                        </a:defRPr>
+                      </a:pPr>
+                      <a:r>
+                        <a:t>fda_label</a:t>
+                      </a:r>
+                    </a:p>
+                  </a:txBody>
+                  <a:tcPr/>
+                </a:tc>
+                <a:tc>
+                  <a:txBody>
+                    <a:bodyPr/>
+                    <a:lstStyle/>
+                    <a:p>
+                      <a:pPr>
+                        <a:defRPr sz="1100">
+                          <a:solidFill>
+                            <a:srgbClr val="4A5568"/>
+                          </a:solidFill>
+                        </a:defRPr>
+                      </a:pPr>
+                      <a:r>
+                        <a:t>k3</a:t>
+                      </a:r>
+                    </a:p>
+                  </a:txBody>
+                  <a:tcPr/>
+                </a:tc>
+                <a:tc>
+                  <a:txBody>
+                    <a:bodyPr/>
+                    <a:lstStyle/>
+                    <a:p>
+                      <a:pPr>
+                        <a:defRPr sz="1100">
+                          <a:solidFill>
+                            <a:srgbClr val="4A5568"/>
+                          </a:solidFill>
+                        </a:defRPr>
+                      </a:pPr>
+                      <a:r>
+                        <a:t>0.650</a:t>
+                      </a:r>
+                    </a:p>
+                  </a:txBody>
+                  <a:tcPr/>
+                </a:tc>
+                <a:tc>
+                  <a:txBody>
+                    <a:bodyPr/>
+                    <a:lstStyle/>
+                    <a:p>
+                      <a:pPr>
+                        <a:defRPr sz="1100">
+                          <a:solidFill>
+                            <a:srgbClr val="4A5568"/>
+                          </a:solidFill>
+                        </a:defRPr>
+                      </a:pPr>
+                      <a:r>
+                        <a:t>0.000</a:t>
+                      </a:r>
+                    </a:p>
+                  </a:txBody>
+                  <a:tcPr/>
+                </a:tc>
+                <a:tc>
+                  <a:txBody>
+                    <a:bodyPr/>
+                    <a:lstStyle/>
+                    <a:p>
+                      <a:pPr>
+                        <a:defRPr sz="1100">
+                          <a:solidFill>
+                            <a:srgbClr val="4A5568"/>
+                          </a:solidFill>
+                        </a:defRPr>
+                      </a:pPr>
+                      <a:r>
+                        <a:t>0.619</a:t>
+                      </a:r>
+                    </a:p>
+                  </a:txBody>
+                  <a:tcPr/>
+                </a:tc>
+              </a:tr>
+              <a:tr h="384048">
+                <a:tc>
+                  <a:txBody>
+                    <a:bodyPr/>
+                    <a:lstStyle/>
+                    <a:p>
+                      <a:pPr>
+                        <a:defRPr sz="1100">
+                          <a:solidFill>
+                            <a:srgbClr val="4A5568"/>
+                          </a:solidFill>
+                        </a:defRPr>
+                      </a:pPr>
+                      <a:r>
+                        <a:t>fda_label</a:t>
+                      </a:r>
+                    </a:p>
+                  </a:txBody>
+                  <a:tcPr/>
+                </a:tc>
+                <a:tc>
+                  <a:txBody>
+                    <a:bodyPr/>
+                    <a:lstStyle/>
+                    <a:p>
+                      <a:pPr>
+                        <a:defRPr sz="1100">
+                          <a:solidFill>
+                            <a:srgbClr val="4A5568"/>
+                          </a:solidFill>
+                        </a:defRPr>
+                      </a:pPr>
+                      <a:r>
+                        <a:t>k8_cot</a:t>
+                      </a:r>
+                    </a:p>
+                  </a:txBody>
+                  <a:tcPr/>
+                </a:tc>
+                <a:tc>
+                  <a:txBody>
+                    <a:bodyPr/>
+                    <a:lstStyle/>
+                    <a:p>
+                      <a:pPr>
+                        <a:defRPr sz="1100">
+                          <a:solidFill>
+                            <a:srgbClr val="4A5568"/>
+                          </a:solidFill>
+                        </a:defRPr>
+                      </a:pPr>
+                      <a:r>
+                        <a:t>0.750</a:t>
+                      </a:r>
+                    </a:p>
+                  </a:txBody>
+                  <a:tcPr/>
+                </a:tc>
+                <a:tc>
+                  <a:txBody>
+                    <a:bodyPr/>
+                    <a:lstStyle/>
+                    <a:p>
+                      <a:pPr>
+                        <a:defRPr sz="1100">
+                          <a:solidFill>
+                            <a:srgbClr val="4A5568"/>
+                          </a:solidFill>
+                        </a:defRPr>
+                      </a:pPr>
+                      <a:r>
+                        <a:t>0.150</a:t>
+                      </a:r>
+                    </a:p>
+                  </a:txBody>
+                  <a:tcPr/>
+                </a:tc>
+                <a:tc>
+                  <a:txBody>
+                    <a:bodyPr/>
+                    <a:lstStyle/>
+                    <a:p>
+                      <a:pPr>
+                        <a:defRPr sz="1100">
+                          <a:solidFill>
+                            <a:srgbClr val="4A5568"/>
+                          </a:solidFill>
+                        </a:defRPr>
+                      </a:pPr>
+                      <a:r>
+                        <a:t>0.753</a:t>
+                      </a:r>
+                    </a:p>
+                  </a:txBody>
+                  <a:tcPr/>
+                </a:tc>
+              </a:tr>
+              <a:tr h="384048">
+                <a:tc>
+                  <a:txBody>
+                    <a:bodyPr/>
+                    <a:lstStyle/>
+                    <a:p>
+                      <a:pPr>
+                        <a:defRPr sz="1100">
+                          <a:solidFill>
+                            <a:srgbClr val="4A5568"/>
+                          </a:solidFill>
+                        </a:defRPr>
+                      </a:pPr>
+                      <a:r>
+                        <a:t>finance_10k</a:t>
+                      </a:r>
+                    </a:p>
+                  </a:txBody>
+                  <a:tcPr/>
+                </a:tc>
+                <a:tc>
+                  <a:txBody>
+                    <a:bodyPr/>
+                    <a:lstStyle/>
+                    <a:p>
+                      <a:pPr>
+                        <a:defRPr sz="1100">
+                          <a:solidFill>
+                            <a:srgbClr val="4A5568"/>
+                          </a:solidFill>
+                        </a:defRPr>
+                      </a:pPr>
+                      <a:r>
+                        <a:t>baseline</a:t>
+                      </a:r>
+                    </a:p>
+                  </a:txBody>
+                  <a:tcPr/>
+                </a:tc>
+                <a:tc>
+                  <a:txBody>
+                    <a:bodyPr/>
+                    <a:lstStyle/>
+                    <a:p>
+                      <a:pPr>
+                        <a:defRPr sz="1100">
+                          <a:solidFill>
+                            <a:srgbClr val="4A5568"/>
+                          </a:solidFill>
+                        </a:defRPr>
+                      </a:pPr>
+                      <a:r>
+                        <a:t>0.850</a:t>
+                      </a:r>
+                    </a:p>
+                  </a:txBody>
+                  <a:tcPr/>
+                </a:tc>
+                <a:tc>
+                  <a:txBody>
+                    <a:bodyPr/>
+                    <a:lstStyle/>
+                    <a:p>
+                      <a:pPr>
+                        <a:defRPr sz="1100">
+                          <a:solidFill>
+                            <a:srgbClr val="4A5568"/>
+                          </a:solidFill>
+                        </a:defRPr>
+                      </a:pPr>
+                      <a:r>
+                        <a:t>0.150</a:t>
+                      </a:r>
+                    </a:p>
+                  </a:txBody>
+                  <a:tcPr/>
+                </a:tc>
+                <a:tc>
+                  <a:txBody>
+                    <a:bodyPr/>
+                    <a:lstStyle/>
+                    <a:p>
+                      <a:pPr>
+                        <a:defRPr sz="1100">
+                          <a:solidFill>
+                            <a:srgbClr val="4A5568"/>
+                          </a:solidFill>
+                        </a:defRPr>
+                      </a:pPr>
+                      <a:r>
+                        <a:t>0.717</a:t>
+                      </a:r>
+                    </a:p>
+                  </a:txBody>
+                  <a:tcPr/>
+                </a:tc>
+              </a:tr>
+              <a:tr h="384048">
+                <a:tc>
+                  <a:txBody>
+                    <a:bodyPr/>
+                    <a:lstStyle/>
+                    <a:p>
+                      <a:pPr>
+                        <a:defRPr sz="1100">
+                          <a:solidFill>
+                            <a:srgbClr val="4A5568"/>
+                          </a:solidFill>
+                        </a:defRPr>
+                      </a:pPr>
+                      <a:r>
+                        <a:t>finance_10k</a:t>
+                      </a:r>
+                    </a:p>
+                  </a:txBody>
+                  <a:tcPr/>
+                </a:tc>
+                <a:tc>
+                  <a:txBody>
+                    <a:bodyPr/>
+                    <a:lstStyle/>
+                    <a:p>
+                      <a:pPr>
+                        <a:defRPr sz="1100">
+                          <a:solidFill>
+                            <a:srgbClr val="4A5568"/>
+                          </a:solidFill>
+                        </a:defRPr>
+                      </a:pPr>
+                      <a:r>
+                        <a:t>k3</a:t>
+                      </a:r>
+                    </a:p>
+                  </a:txBody>
+                  <a:tcPr/>
+                </a:tc>
+                <a:tc>
+                  <a:txBody>
+                    <a:bodyPr/>
+                    <a:lstStyle/>
+                    <a:p>
+                      <a:pPr>
+                        <a:defRPr sz="1100">
+                          <a:solidFill>
+                            <a:srgbClr val="4A5568"/>
+                          </a:solidFill>
+                        </a:defRPr>
+                      </a:pPr>
+                      <a:r>
+                        <a:t>0.800</a:t>
+                      </a:r>
+                    </a:p>
+                  </a:txBody>
+                  <a:tcPr/>
+                </a:tc>
+                <a:tc>
+                  <a:txBody>
+                    <a:bodyPr/>
+                    <a:lstStyle/>
+                    <a:p>
+                      <a:pPr>
+                        <a:defRPr sz="1100">
+                          <a:solidFill>
+                            <a:srgbClr val="4A5568"/>
+                          </a:solidFill>
+                        </a:defRPr>
+                      </a:pPr>
+                      <a:r>
+                        <a:t>0.100</a:t>
+                      </a:r>
+                    </a:p>
+                  </a:txBody>
+                  <a:tcPr/>
+                </a:tc>
+                <a:tc>
+                  <a:txBody>
+                    <a:bodyPr/>
+                    <a:lstStyle/>
+                    <a:p>
+                      <a:pPr>
+                        <a:defRPr sz="1100">
+                          <a:solidFill>
+                            <a:srgbClr val="4A5568"/>
+                          </a:solidFill>
+                        </a:defRPr>
+                      </a:pPr>
+                      <a:r>
+                        <a:t>0.716</a:t>
+                      </a:r>
+                    </a:p>
+                  </a:txBody>
+                  <a:tcPr/>
+                </a:tc>
+              </a:tr>
+              <a:tr h="384048">
+                <a:tc>
+                  <a:txBody>
+                    <a:bodyPr/>
+                    <a:lstStyle/>
+                    <a:p>
+                      <a:pPr>
+                        <a:defRPr sz="1100">
+                          <a:solidFill>
+                            <a:srgbClr val="4A5568"/>
+                          </a:solidFill>
+                        </a:defRPr>
+                      </a:pPr>
+                      <a:r>
+                        <a:t>finance_10k</a:t>
+                      </a:r>
+                    </a:p>
+                  </a:txBody>
+                  <a:tcPr/>
+                </a:tc>
+                <a:tc>
+                  <a:txBody>
+                    <a:bodyPr/>
+                    <a:lstStyle/>
+                    <a:p>
+                      <a:pPr>
+                        <a:defRPr sz="1100">
+                          <a:solidFill>
+                            <a:srgbClr val="4A5568"/>
+                          </a:solidFill>
+                        </a:defRPr>
+                      </a:pPr>
+                      <a:r>
+                        <a:t>k8_cot</a:t>
+                      </a:r>
+                    </a:p>
+                  </a:txBody>
+                  <a:tcPr/>
+                </a:tc>
+                <a:tc>
+                  <a:txBody>
+                    <a:bodyPr/>
+                    <a:lstStyle/>
+                    <a:p>
+                      <a:pPr>
+                        <a:defRPr sz="1100">
+                          <a:solidFill>
+                            <a:srgbClr val="4A5568"/>
+                          </a:solidFill>
+                        </a:defRPr>
+                      </a:pPr>
+                      <a:r>
+                        <a:t>0.900</a:t>
+                      </a:r>
+                    </a:p>
+                  </a:txBody>
+                  <a:tcPr/>
+                </a:tc>
+                <a:tc>
+                  <a:txBody>
+                    <a:bodyPr/>
+                    <a:lstStyle/>
+                    <a:p>
+                      <a:pPr>
+                        <a:defRPr sz="1100">
+                          <a:solidFill>
+                            <a:srgbClr val="4A5568"/>
+                          </a:solidFill>
+                        </a:defRPr>
+                      </a:pPr>
+                      <a:r>
+                        <a:t>0.150</a:t>
+                      </a:r>
+                    </a:p>
+                  </a:txBody>
+                  <a:tcPr/>
+                </a:tc>
+                <a:tc>
+                  <a:txBody>
+                    <a:bodyPr/>
+                    <a:lstStyle/>
+                    <a:p>
+                      <a:pPr>
+                        <a:defRPr sz="1100">
+                          <a:solidFill>
+                            <a:srgbClr val="4A5568"/>
+                          </a:solidFill>
+                        </a:defRPr>
+                      </a:pPr>
+                      <a:r>
+                        <a:t>0.684</a:t>
+                      </a:r>
+                    </a:p>
+                  </a:txBody>
+                  <a:tcPr/>
+                </a:tc>
+              </a:tr>
+            </a:tbl>
+          </a:graphicData>
+        </a:graphic>
+      </p:graphicFrame>
+      <p:sp>
+        <p:nvSpPr>
+          <p:cNvPr id="4" name="TextBox 3"/>
+          <p:cNvSpPr txBox="1"/>
+          <p:nvPr/>
+        </p:nvSpPr>
+        <p:spPr>
+          <a:xfrm>
+            <a:off x="502920" y="5074920"/>
+            <a:ext cx="8229600" cy="1371600"/>
+          </a:xfrm>
+          <a:prstGeom prst="rect">
+            <a:avLst/>
+          </a:prstGeom>
+          <a:noFill/>
+        </p:spPr>
+        <p:txBody>
+          <a:bodyPr wrap="square">
+            <a:spAutoFit/>
+          </a:bodyPr>
+          <a:lstStyle/>
           <a:p>
             <a:pPr>
-              <a:defRPr sz="1800"/>
+              <a:spcAft>
+                <a:spcPts val="600"/>
+              </a:spcAft>
+              <a:defRPr sz="1200">
+                <a:solidFill>
+                  <a:srgbClr val="4A5568"/>
+                </a:solidFill>
+              </a:defRPr>
             </a:pPr>
             <a:r>
-              <a:t>Tier A: 7 presets vs shared baseline chunking — delta vs baseline per corpus, then average across corpora.</a:t>
-            </a:r>
-          </a:p>
-          <a:p>
-            <a:pPr>
-              <a:defRPr sz="1800"/>
-            </a:pPr>
-            <a:r>
-              <a:t>Tier B: 3 chunking presets — separate gold per preset; compare within Tier B and genre pools.</a:t>
-            </a:r>
-          </a:p>
-          <a:p>
-            <a:pPr>
-              <a:defRPr sz="1800"/>
-            </a:pPr>
-            <a:r>
-              <a:t>Success measures: Lower hallucination indicators where appropriate; higher answer correctness and retrieval of gold evidence; explicit tradeoff stories (e.g., correctness up, grounding unchanged).</a:t>
-            </a:r>
-          </a:p>
-          <a:p>
-            <a:pPr>
-              <a:defRPr sz="1800"/>
-            </a:pPr>
-            <a:r>
-              <a:t>Caveat: n=10 is adequate for directional patterns and engineering decisions—not for publication-grade significance testing without more data.</a:t>
+              <a:t>Finance: stronger recall@5 on these filings. Labels: different error profile — compare presets, not only baseline.</a:t>
             </a:r>
           </a:p>
         </p:txBody>
@@ -3972,6 +6643,14 @@
 <file path=ppt/slides/slide8.xml><?xml version="1.0" encoding="utf-8"?>
 <p:sld xmlns:a="http://schemas.openxmlformats.org/drawingml/2006/main" xmlns:p="http://schemas.openxmlformats.org/presentationml/2006/main" xmlns:r="http://schemas.openxmlformats.org/officeDocument/2006/relationships">
   <p:cSld>
+    <p:bg>
+      <p:bgPr>
+        <a:solidFill>
+          <a:srgbClr val="F8FAFC"/>
+        </a:solidFill>
+        <a:effectLst/>
+      </p:bgPr>
+    </p:bg>
     <p:spTree>
       <p:nvGrpSpPr>
         <p:cNvPr id="1" name=""/>
@@ -3981,69 +6660,120 @@
       <p:grpSpPr/>
       <p:sp>
         <p:nvSpPr>
-          <p:cNvPr id="2" name="Title 1"/>
-          <p:cNvSpPr>
-            <a:spLocks noGrp="1"/>
-          </p:cNvSpPr>
-          <p:nvPr>
-            <p:ph type="title"/>
-          </p:nvPr>
-        </p:nvSpPr>
-        <p:spPr/>
-        <p:txBody>
-          <a:bodyPr/>
-          <a:lstStyle/>
-          <a:p>
-            <a:r>
-              <a:t>Results — Tier A (Same Gold): Cross-Corpus Averages vs Baseline</a:t>
-            </a:r>
-          </a:p>
-        </p:txBody>
-      </p:sp>
-      <p:sp>
-        <p:nvSpPr>
-          <p:cNvPr id="3" name="Content Placeholder 2"/>
-          <p:cNvSpPr>
-            <a:spLocks noGrp="1"/>
-          </p:cNvSpPr>
-          <p:nvPr>
-            <p:ph idx="1"/>
-          </p:nvPr>
-        </p:nvSpPr>
-        <p:spPr/>
-        <p:txBody>
-          <a:bodyPr/>
-          <a:lstStyle/>
+          <p:cNvPr id="2" name="Rectangle 1"/>
+          <p:cNvSpPr/>
+          <p:nvPr/>
+        </p:nvSpPr>
+        <p:spPr>
+          <a:xfrm>
+            <a:off x="0" y="0"/>
+            <a:ext cx="9144000" cy="1051560"/>
+          </a:xfrm>
+          <a:prstGeom prst="rect">
+            <a:avLst/>
+          </a:prstGeom>
+          <a:solidFill>
+            <a:srgbClr val="1E3A5F"/>
+          </a:solidFill>
+          <a:ln>
+            <a:noFill/>
+          </a:ln>
+        </p:spPr>
+        <p:style>
+          <a:lnRef idx="1">
+            <a:schemeClr val="accent1"/>
+          </a:lnRef>
+          <a:fillRef idx="3">
+            <a:schemeClr val="accent1"/>
+          </a:fillRef>
+          <a:effectRef idx="2">
+            <a:schemeClr val="accent1"/>
+          </a:effectRef>
+          <a:fontRef idx="minor">
+            <a:schemeClr val="lt1"/>
+          </a:fontRef>
+        </p:style>
+        <p:txBody>
+          <a:bodyPr rtlCol="0" anchor="ctr" lIns="457200" tIns="228600" wrap="square"/>
+          <a:lstStyle/>
+          <a:p>
+            <a:pPr algn="l">
+              <a:defRPr sz="2800" b="1">
+                <a:solidFill>
+                  <a:srgbClr val="FFFFFF"/>
+                </a:solidFill>
+              </a:defRPr>
+            </a:pPr>
+            <a:r>
+              <a:t>Genre contrast (Tier A baseline)</a:t>
+            </a:r>
+          </a:p>
           <a:p>
             <a:pPr>
-              <a:defRPr sz="1800"/>
+              <a:defRPr sz="1400">
+                <a:solidFill>
+                  <a:srgbClr val="E2E8F0"/>
+                </a:solidFill>
+              </a:defRPr>
             </a:pPr>
             <a:r>
-              <a:t>Largest average reduction in context-grounded hallucination flag vs baseline: k=3 (mean delta roughly -0.08 across four corpora).</a:t>
-            </a:r>
-          </a:p>
+              <a:t>Same pipeline; different documents</a:t>
+            </a:r>
+          </a:p>
+        </p:txBody>
+      </p:sp>
+      <p:graphicFrame>
+        <p:nvGraphicFramePr>
+          <p:cNvPr id="3" name="Chart 2"/>
+          <p:cNvGraphicFramePr>
+            <a:graphicFrameLocks noGrp="1"/>
+          </p:cNvGraphicFramePr>
+          <p:nvPr/>
+        </p:nvGraphicFramePr>
+        <p:xfrm>
+          <a:off x="548640" y="1234440"/>
+          <a:ext cx="8229600" cy="4480560"/>
+        </p:xfrm>
+        <a:graphic>
+          <a:graphicData uri="http://schemas.openxmlformats.org/drawingml/2006/chart">
+            <c:chart xmlns:c="http://schemas.openxmlformats.org/drawingml/2006/chart" r:id="rId2"/>
+          </a:graphicData>
+        </a:graphic>
+      </p:graphicFrame>
+      <p:sp>
+        <p:nvSpPr>
+          <p:cNvPr id="4" name="TextBox 3"/>
+          <p:cNvSpPr txBox="1"/>
+          <p:nvPr/>
+        </p:nvSpPr>
+        <p:spPr>
+          <a:xfrm>
+            <a:off x="502920" y="5897880"/>
+            <a:ext cx="8229600" cy="685800"/>
+          </a:xfrm>
+          <a:prstGeom prst="rect">
+            <a:avLst/>
+          </a:prstGeom>
+          <a:noFill/>
+        </p:spPr>
+        <p:txBody>
+          <a:bodyPr wrap="square">
+            <a:spAutoFit/>
+          </a:bodyPr>
+          <a:lstStyle/>
           <a:p>
             <a:pPr>
-              <a:defRPr sz="1800"/>
+              <a:spcAft>
+                <a:spcPts val="600"/>
+              </a:spcAft>
+              <a:defRPr sz="1100">
+                <a:solidFill>
+                  <a:srgbClr val="4A5568"/>
+                </a:solidFill>
+              </a:defRPr>
             </a:pPr>
             <a:r>
-              <a:t>Largest average gain in answer correctness vs baseline: k8 + CoT (mean delta roughly +0.03)—but also the largest average increase in the hallucination flag vs baseline (~+0.03)—clear tradeoff.</a:t>
-            </a:r>
-          </a:p>
-          <a:p>
-            <a:pPr>
-              <a:defRPr sz="1800"/>
-            </a:pPr>
-            <a:r>
-              <a:t>Strict-cite post-processing: near-zero average change in context hallucination flag vs baseline in this aggregate; average answer correctness slightly down vs baseline—suggests more abstention/stricter answers at small n.</a:t>
-            </a:r>
-          </a:p>
-          <a:p>
-            <a:pPr>
-              <a:defRPr sz="1800"/>
-            </a:pPr>
-            <a:r>
-              <a:t>Chain-of-thought (baseline_cot): mixed—small average correctness dip with some runs showing higher faithfulness in finance pool (check per-corpus variance).</a:t>
+              <a:t>Context halluc. = fraction of questions with flagged unsupported content (judge). Lower is better.</a:t>
             </a:r>
           </a:p>
         </p:txBody>
@@ -4059,6 +6789,14 @@
 <file path=ppt/slides/slide9.xml><?xml version="1.0" encoding="utf-8"?>
 <p:sld xmlns:a="http://schemas.openxmlformats.org/drawingml/2006/main" xmlns:p="http://schemas.openxmlformats.org/presentationml/2006/main" xmlns:r="http://schemas.openxmlformats.org/officeDocument/2006/relationships">
   <p:cSld>
+    <p:bg>
+      <p:bgPr>
+        <a:solidFill>
+          <a:srgbClr val="F8FAFC"/>
+        </a:solidFill>
+        <a:effectLst/>
+      </p:bgPr>
+    </p:bg>
     <p:spTree>
       <p:nvGrpSpPr>
         <p:cNvPr id="1" name=""/>
@@ -4068,69 +6806,725 @@
       <p:grpSpPr/>
       <p:sp>
         <p:nvSpPr>
-          <p:cNvPr id="2" name="Title 1"/>
-          <p:cNvSpPr>
-            <a:spLocks noGrp="1"/>
-          </p:cNvSpPr>
-          <p:nvPr>
-            <p:ph type="title"/>
-          </p:nvPr>
-        </p:nvSpPr>
-        <p:spPr/>
-        <p:txBody>
-          <a:bodyPr/>
-          <a:lstStyle/>
-          <a:p>
-            <a:r>
-              <a:t>Results — Pooled by Domain (Tier A Means)</a:t>
-            </a:r>
-          </a:p>
-        </p:txBody>
-      </p:sp>
-      <p:sp>
-        <p:nvSpPr>
-          <p:cNvPr id="3" name="Content Placeholder 2"/>
-          <p:cNvSpPr>
-            <a:spLocks noGrp="1"/>
-          </p:cNvSpPr>
-          <p:nvPr>
-            <p:ph idx="1"/>
-          </p:nvPr>
-        </p:nvSpPr>
-        <p:spPr/>
-        <p:txBody>
-          <a:bodyPr/>
-          <a:lstStyle/>
+          <p:cNvPr id="2" name="Rectangle 1"/>
+          <p:cNvSpPr/>
+          <p:nvPr/>
+        </p:nvSpPr>
+        <p:spPr>
+          <a:xfrm>
+            <a:off x="0" y="0"/>
+            <a:ext cx="9144000" cy="1051560"/>
+          </a:xfrm>
+          <a:prstGeom prst="rect">
+            <a:avLst/>
+          </a:prstGeom>
+          <a:solidFill>
+            <a:srgbClr val="1E3A5F"/>
+          </a:solidFill>
+          <a:ln>
+            <a:noFill/>
+          </a:ln>
+        </p:spPr>
+        <p:style>
+          <a:lnRef idx="1">
+            <a:schemeClr val="accent1"/>
+          </a:lnRef>
+          <a:fillRef idx="3">
+            <a:schemeClr val="accent1"/>
+          </a:fillRef>
+          <a:effectRef idx="2">
+            <a:schemeClr val="accent1"/>
+          </a:effectRef>
+          <a:fontRef idx="minor">
+            <a:schemeClr val="lt1"/>
+          </a:fontRef>
+        </p:style>
+        <p:txBody>
+          <a:bodyPr rtlCol="0" anchor="ctr" lIns="457200" tIns="228600" wrap="square"/>
+          <a:lstStyle/>
+          <a:p>
+            <a:pPr algn="l">
+              <a:defRPr sz="2800" b="1">
+                <a:solidFill>
+                  <a:srgbClr val="FFFFFF"/>
+                </a:solidFill>
+              </a:defRPr>
+            </a:pPr>
+            <a:r>
+              <a:t>Tier B — Chunking presets (separate gold)</a:t>
+            </a:r>
+          </a:p>
           <a:p>
             <a:pPr>
-              <a:defRPr sz="1800"/>
+              <a:defRPr sz="1400">
+                <a:solidFill>
+                  <a:srgbClr val="E2E8F0"/>
+                </a:solidFill>
+              </a:defRPr>
             </a:pPr>
             <a:r>
-              <a:t>Finance (2x 10-Ks), pooled: higher recall@5 (~0.85 baseline) vs FDA labels (~0.65 baseline)—retrieval finds gold chunks more often on these filings in this setup.</a:t>
-            </a:r>
-          </a:p>
+              <a:t>Compare within this tier only</a:t>
+            </a:r>
+          </a:p>
+        </p:txBody>
+      </p:sp>
+      <p:graphicFrame>
+        <p:nvGraphicFramePr>
+          <p:cNvPr id="3" name="Table 2"/>
+          <p:cNvGraphicFramePr>
+            <a:graphicFrameLocks noGrp="1"/>
+          </p:cNvGraphicFramePr>
+          <p:nvPr/>
+        </p:nvGraphicFramePr>
+        <p:xfrm>
+          <a:off x="502920" y="1207008"/>
+          <a:ext cx="8321040" cy="2432304"/>
+        </p:xfrm>
+        <a:graphic>
+          <a:graphicData uri="http://schemas.openxmlformats.org/drawingml/2006/table">
+            <a:tbl>
+              <a:tblPr firstRow="1" bandRow="1">
+                <a:tableStyleId>{5C22544A-7EE6-4342-B048-85BDC9FD1C3A}</a:tableStyleId>
+              </a:tblPr>
+              <a:tblGrid>
+                <a:gridCol w="1664208"/>
+                <a:gridCol w="1664208"/>
+                <a:gridCol w="1664208"/>
+                <a:gridCol w="1664208"/>
+                <a:gridCol w="1664208"/>
+              </a:tblGrid>
+              <a:tr h="347472">
+                <a:tc>
+                  <a:txBody>
+                    <a:bodyPr/>
+                    <a:lstStyle/>
+                    <a:p>
+                      <a:pPr>
+                        <a:defRPr sz="1000" b="1">
+                          <a:solidFill>
+                            <a:srgbClr val="FFFFFF"/>
+                          </a:solidFill>
+                        </a:defRPr>
+                      </a:pPr>
+                      <a:r>
+                        <a:t>genre</a:t>
+                      </a:r>
+                    </a:p>
+                  </a:txBody>
+                  <a:tcPr>
+                    <a:solidFill>
+                      <a:srgbClr val="2B7CA8"/>
+                    </a:solidFill>
+                  </a:tcPr>
+                </a:tc>
+                <a:tc>
+                  <a:txBody>
+                    <a:bodyPr/>
+                    <a:lstStyle/>
+                    <a:p>
+                      <a:pPr>
+                        <a:defRPr sz="1000" b="1">
+                          <a:solidFill>
+                            <a:srgbClr val="FFFFFF"/>
+                          </a:solidFill>
+                        </a:defRPr>
+                      </a:pPr>
+                      <a:r>
+                        <a:t>experiment</a:t>
+                      </a:r>
+                    </a:p>
+                  </a:txBody>
+                  <a:tcPr>
+                    <a:solidFill>
+                      <a:srgbClr val="2B7CA8"/>
+                    </a:solidFill>
+                  </a:tcPr>
+                </a:tc>
+                <a:tc>
+                  <a:txBody>
+                    <a:bodyPr/>
+                    <a:lstStyle/>
+                    <a:p>
+                      <a:pPr>
+                        <a:defRPr sz="1000" b="1">
+                          <a:solidFill>
+                            <a:srgbClr val="FFFFFF"/>
+                          </a:solidFill>
+                        </a:defRPr>
+                      </a:pPr>
+                      <a:r>
+                        <a:t>context hallucination</a:t>
+                      </a:r>
+                    </a:p>
+                  </a:txBody>
+                  <a:tcPr>
+                    <a:solidFill>
+                      <a:srgbClr val="2B7CA8"/>
+                    </a:solidFill>
+                  </a:tcPr>
+                </a:tc>
+                <a:tc>
+                  <a:txBody>
+                    <a:bodyPr/>
+                    <a:lstStyle/>
+                    <a:p>
+                      <a:pPr>
+                        <a:defRPr sz="1000" b="1">
+                          <a:solidFill>
+                            <a:srgbClr val="FFFFFF"/>
+                          </a:solidFill>
+                        </a:defRPr>
+                      </a:pPr>
+                      <a:r>
+                        <a:t>answer correctness</a:t>
+                      </a:r>
+                    </a:p>
+                  </a:txBody>
+                  <a:tcPr>
+                    <a:solidFill>
+                      <a:srgbClr val="2B7CA8"/>
+                    </a:solidFill>
+                  </a:tcPr>
+                </a:tc>
+                <a:tc>
+                  <a:txBody>
+                    <a:bodyPr/>
+                    <a:lstStyle/>
+                    <a:p>
+                      <a:pPr>
+                        <a:defRPr sz="1000" b="1">
+                          <a:solidFill>
+                            <a:srgbClr val="FFFFFF"/>
+                          </a:solidFill>
+                        </a:defRPr>
+                      </a:pPr>
+                      <a:r>
+                        <a:t>faithfulness</a:t>
+                      </a:r>
+                    </a:p>
+                  </a:txBody>
+                  <a:tcPr>
+                    <a:solidFill>
+                      <a:srgbClr val="2B7CA8"/>
+                    </a:solidFill>
+                  </a:tcPr>
+                </a:tc>
+              </a:tr>
+              <a:tr h="347472">
+                <a:tc>
+                  <a:txBody>
+                    <a:bodyPr/>
+                    <a:lstStyle/>
+                    <a:p>
+                      <a:pPr>
+                        <a:defRPr sz="1000"/>
+                      </a:pPr>
+                      <a:r>
+                        <a:t>fda_label</a:t>
+                      </a:r>
+                    </a:p>
+                  </a:txBody>
+                  <a:tcPr/>
+                </a:tc>
+                <a:tc>
+                  <a:txBody>
+                    <a:bodyPr/>
+                    <a:lstStyle/>
+                    <a:p>
+                      <a:pPr>
+                        <a:defRPr sz="1000"/>
+                      </a:pPr>
+                      <a:r>
+                        <a:t>coarse_chunks</a:t>
+                      </a:r>
+                    </a:p>
+                  </a:txBody>
+                  <a:tcPr/>
+                </a:tc>
+                <a:tc>
+                  <a:txBody>
+                    <a:bodyPr/>
+                    <a:lstStyle/>
+                    <a:p>
+                      <a:pPr>
+                        <a:defRPr sz="1000"/>
+                      </a:pPr>
+                      <a:r>
+                        <a:t>0.100</a:t>
+                      </a:r>
+                    </a:p>
+                  </a:txBody>
+                  <a:tcPr/>
+                </a:tc>
+                <a:tc>
+                  <a:txBody>
+                    <a:bodyPr/>
+                    <a:lstStyle/>
+                    <a:p>
+                      <a:pPr>
+                        <a:defRPr sz="1000"/>
+                      </a:pPr>
+                      <a:r>
+                        <a:t>0.740</a:t>
+                      </a:r>
+                    </a:p>
+                  </a:txBody>
+                  <a:tcPr/>
+                </a:tc>
+                <a:tc>
+                  <a:txBody>
+                    <a:bodyPr/>
+                    <a:lstStyle/>
+                    <a:p>
+                      <a:pPr>
+                        <a:defRPr sz="1000"/>
+                      </a:pPr>
+                      <a:r>
+                        <a:t>0.805</a:t>
+                      </a:r>
+                    </a:p>
+                  </a:txBody>
+                  <a:tcPr/>
+                </a:tc>
+              </a:tr>
+              <a:tr h="347472">
+                <a:tc>
+                  <a:txBody>
+                    <a:bodyPr/>
+                    <a:lstStyle/>
+                    <a:p>
+                      <a:pPr>
+                        <a:defRPr sz="1000"/>
+                      </a:pPr>
+                      <a:r>
+                        <a:t>fda_label</a:t>
+                      </a:r>
+                    </a:p>
+                  </a:txBody>
+                  <a:tcPr/>
+                </a:tc>
+                <a:tc>
+                  <a:txBody>
+                    <a:bodyPr/>
+                    <a:lstStyle/>
+                    <a:p>
+                      <a:pPr>
+                        <a:defRPr sz="1000"/>
+                      </a:pPr>
+                      <a:r>
+                        <a:t>deep_headers_fine</a:t>
+                      </a:r>
+                    </a:p>
+                  </a:txBody>
+                  <a:tcPr/>
+                </a:tc>
+                <a:tc>
+                  <a:txBody>
+                    <a:bodyPr/>
+                    <a:lstStyle/>
+                    <a:p>
+                      <a:pPr>
+                        <a:defRPr sz="1000"/>
+                      </a:pPr>
+                      <a:r>
+                        <a:t>0.100</a:t>
+                      </a:r>
+                    </a:p>
+                  </a:txBody>
+                  <a:tcPr/>
+                </a:tc>
+                <a:tc>
+                  <a:txBody>
+                    <a:bodyPr/>
+                    <a:lstStyle/>
+                    <a:p>
+                      <a:pPr>
+                        <a:defRPr sz="1000"/>
+                      </a:pPr>
+                      <a:r>
+                        <a:t>0.566</a:t>
+                      </a:r>
+                    </a:p>
+                  </a:txBody>
+                  <a:tcPr/>
+                </a:tc>
+                <a:tc>
+                  <a:txBody>
+                    <a:bodyPr/>
+                    <a:lstStyle/>
+                    <a:p>
+                      <a:pPr>
+                        <a:defRPr sz="1000"/>
+                      </a:pPr>
+                      <a:r>
+                        <a:t>0.800</a:t>
+                      </a:r>
+                    </a:p>
+                  </a:txBody>
+                  <a:tcPr/>
+                </a:tc>
+              </a:tr>
+              <a:tr h="347472">
+                <a:tc>
+                  <a:txBody>
+                    <a:bodyPr/>
+                    <a:lstStyle/>
+                    <a:p>
+                      <a:pPr>
+                        <a:defRPr sz="1000"/>
+                      </a:pPr>
+                      <a:r>
+                        <a:t>fda_label</a:t>
+                      </a:r>
+                    </a:p>
+                  </a:txBody>
+                  <a:tcPr/>
+                </a:tc>
+                <a:tc>
+                  <a:txBody>
+                    <a:bodyPr/>
+                    <a:lstStyle/>
+                    <a:p>
+                      <a:pPr>
+                        <a:defRPr sz="1000"/>
+                      </a:pPr>
+                      <a:r>
+                        <a:t>fine_chunks</a:t>
+                      </a:r>
+                    </a:p>
+                  </a:txBody>
+                  <a:tcPr/>
+                </a:tc>
+                <a:tc>
+                  <a:txBody>
+                    <a:bodyPr/>
+                    <a:lstStyle/>
+                    <a:p>
+                      <a:pPr>
+                        <a:defRPr sz="1000"/>
+                      </a:pPr>
+                      <a:r>
+                        <a:t>0.000</a:t>
+                      </a:r>
+                    </a:p>
+                  </a:txBody>
+                  <a:tcPr/>
+                </a:tc>
+                <a:tc>
+                  <a:txBody>
+                    <a:bodyPr/>
+                    <a:lstStyle/>
+                    <a:p>
+                      <a:pPr>
+                        <a:defRPr sz="1000"/>
+                      </a:pPr>
+                      <a:r>
+                        <a:t>0.551</a:t>
+                      </a:r>
+                    </a:p>
+                  </a:txBody>
+                  <a:tcPr/>
+                </a:tc>
+                <a:tc>
+                  <a:txBody>
+                    <a:bodyPr/>
+                    <a:lstStyle/>
+                    <a:p>
+                      <a:pPr>
+                        <a:defRPr sz="1000"/>
+                      </a:pPr>
+                      <a:r>
+                        <a:t>0.738</a:t>
+                      </a:r>
+                    </a:p>
+                  </a:txBody>
+                  <a:tcPr/>
+                </a:tc>
+              </a:tr>
+              <a:tr h="347472">
+                <a:tc>
+                  <a:txBody>
+                    <a:bodyPr/>
+                    <a:lstStyle/>
+                    <a:p>
+                      <a:pPr>
+                        <a:defRPr sz="1000"/>
+                      </a:pPr>
+                      <a:r>
+                        <a:t>finance_10k</a:t>
+                      </a:r>
+                    </a:p>
+                  </a:txBody>
+                  <a:tcPr/>
+                </a:tc>
+                <a:tc>
+                  <a:txBody>
+                    <a:bodyPr/>
+                    <a:lstStyle/>
+                    <a:p>
+                      <a:pPr>
+                        <a:defRPr sz="1000"/>
+                      </a:pPr>
+                      <a:r>
+                        <a:t>coarse_chunks</a:t>
+                      </a:r>
+                    </a:p>
+                  </a:txBody>
+                  <a:tcPr/>
+                </a:tc>
+                <a:tc>
+                  <a:txBody>
+                    <a:bodyPr/>
+                    <a:lstStyle/>
+                    <a:p>
+                      <a:pPr>
+                        <a:defRPr sz="1000"/>
+                      </a:pPr>
+                      <a:r>
+                        <a:t>0.250</a:t>
+                      </a:r>
+                    </a:p>
+                  </a:txBody>
+                  <a:tcPr/>
+                </a:tc>
+                <a:tc>
+                  <a:txBody>
+                    <a:bodyPr/>
+                    <a:lstStyle/>
+                    <a:p>
+                      <a:pPr>
+                        <a:defRPr sz="1000"/>
+                      </a:pPr>
+                      <a:r>
+                        <a:t>0.809</a:t>
+                      </a:r>
+                    </a:p>
+                  </a:txBody>
+                  <a:tcPr/>
+                </a:tc>
+                <a:tc>
+                  <a:txBody>
+                    <a:bodyPr/>
+                    <a:lstStyle/>
+                    <a:p>
+                      <a:pPr>
+                        <a:defRPr sz="1000"/>
+                      </a:pPr>
+                      <a:r>
+                        <a:t>0.841</a:t>
+                      </a:r>
+                    </a:p>
+                  </a:txBody>
+                  <a:tcPr/>
+                </a:tc>
+              </a:tr>
+              <a:tr h="347472">
+                <a:tc>
+                  <a:txBody>
+                    <a:bodyPr/>
+                    <a:lstStyle/>
+                    <a:p>
+                      <a:pPr>
+                        <a:defRPr sz="1000"/>
+                      </a:pPr>
+                      <a:r>
+                        <a:t>finance_10k</a:t>
+                      </a:r>
+                    </a:p>
+                  </a:txBody>
+                  <a:tcPr/>
+                </a:tc>
+                <a:tc>
+                  <a:txBody>
+                    <a:bodyPr/>
+                    <a:lstStyle/>
+                    <a:p>
+                      <a:pPr>
+                        <a:defRPr sz="1000"/>
+                      </a:pPr>
+                      <a:r>
+                        <a:t>deep_headers_fine</a:t>
+                      </a:r>
+                    </a:p>
+                  </a:txBody>
+                  <a:tcPr/>
+                </a:tc>
+                <a:tc>
+                  <a:txBody>
+                    <a:bodyPr/>
+                    <a:lstStyle/>
+                    <a:p>
+                      <a:pPr>
+                        <a:defRPr sz="1000"/>
+                      </a:pPr>
+                      <a:r>
+                        <a:t>0.050</a:t>
+                      </a:r>
+                    </a:p>
+                  </a:txBody>
+                  <a:tcPr/>
+                </a:tc>
+                <a:tc>
+                  <a:txBody>
+                    <a:bodyPr/>
+                    <a:lstStyle/>
+                    <a:p>
+                      <a:pPr>
+                        <a:defRPr sz="1000"/>
+                      </a:pPr>
+                      <a:r>
+                        <a:t>0.693</a:t>
+                      </a:r>
+                    </a:p>
+                  </a:txBody>
+                  <a:tcPr/>
+                </a:tc>
+                <a:tc>
+                  <a:txBody>
+                    <a:bodyPr/>
+                    <a:lstStyle/>
+                    <a:p>
+                      <a:pPr>
+                        <a:defRPr sz="1000"/>
+                      </a:pPr>
+                      <a:r>
+                        <a:t>0.721</a:t>
+                      </a:r>
+                    </a:p>
+                  </a:txBody>
+                  <a:tcPr/>
+                </a:tc>
+              </a:tr>
+              <a:tr h="347472">
+                <a:tc>
+                  <a:txBody>
+                    <a:bodyPr/>
+                    <a:lstStyle/>
+                    <a:p>
+                      <a:pPr>
+                        <a:defRPr sz="1000"/>
+                      </a:pPr>
+                      <a:r>
+                        <a:t>finance_10k</a:t>
+                      </a:r>
+                    </a:p>
+                  </a:txBody>
+                  <a:tcPr/>
+                </a:tc>
+                <a:tc>
+                  <a:txBody>
+                    <a:bodyPr/>
+                    <a:lstStyle/>
+                    <a:p>
+                      <a:pPr>
+                        <a:defRPr sz="1000"/>
+                      </a:pPr>
+                      <a:r>
+                        <a:t>fine_chunks</a:t>
+                      </a:r>
+                    </a:p>
+                  </a:txBody>
+                  <a:tcPr/>
+                </a:tc>
+                <a:tc>
+                  <a:txBody>
+                    <a:bodyPr/>
+                    <a:lstStyle/>
+                    <a:p>
+                      <a:pPr>
+                        <a:defRPr sz="1000"/>
+                      </a:pPr>
+                      <a:r>
+                        <a:t>0.050</a:t>
+                      </a:r>
+                    </a:p>
+                  </a:txBody>
+                  <a:tcPr/>
+                </a:tc>
+                <a:tc>
+                  <a:txBody>
+                    <a:bodyPr/>
+                    <a:lstStyle/>
+                    <a:p>
+                      <a:pPr>
+                        <a:defRPr sz="1000"/>
+                      </a:pPr>
+                      <a:r>
+                        <a:t>0.835</a:t>
+                      </a:r>
+                    </a:p>
+                  </a:txBody>
+                  <a:tcPr/>
+                </a:tc>
+                <a:tc>
+                  <a:txBody>
+                    <a:bodyPr/>
+                    <a:lstStyle/>
+                    <a:p>
+                      <a:pPr>
+                        <a:defRPr sz="1000"/>
+                      </a:pPr>
+                      <a:r>
+                        <a:t>0.963</a:t>
+                      </a:r>
+                    </a:p>
+                  </a:txBody>
+                  <a:tcPr/>
+                </a:tc>
+              </a:tr>
+            </a:tbl>
+          </a:graphicData>
+        </a:graphic>
+      </p:graphicFrame>
+      <p:sp>
+        <p:nvSpPr>
+          <p:cNvPr id="4" name="TextBox 3"/>
+          <p:cNvSpPr txBox="1"/>
+          <p:nvPr/>
+        </p:nvSpPr>
+        <p:spPr>
+          <a:xfrm>
+            <a:off x="502920" y="4160520"/>
+            <a:ext cx="8229600" cy="2286000"/>
+          </a:xfrm>
+          <a:prstGeom prst="rect">
+            <a:avLst/>
+          </a:prstGeom>
+          <a:noFill/>
+        </p:spPr>
+        <p:txBody>
+          <a:bodyPr wrap="square">
+            <a:spAutoFit/>
+          </a:bodyPr>
+          <a:lstStyle/>
           <a:p>
             <a:pPr>
-              <a:defRPr sz="1800"/>
+              <a:spcAft>
+                <a:spcPts val="600"/>
+              </a:spcAft>
+              <a:defRPr sz="1300">
+                <a:solidFill>
+                  <a:srgbClr val="4A5568"/>
+                </a:solidFill>
+              </a:defRPr>
             </a:pPr>
             <a:r>
-              <a:t>Healthcare labels (2x FDA), pooled: baseline context-hallucination flag ~0.10 mean vs finance ~0.15 (lower is better)—genre differences appear in aggregate (still small n).</a:t>
+              <a:t>Each preset re-chunks + regenerates Q/A — not comparable to Tier A deltas.</a:t>
             </a:r>
           </a:p>
           <a:p>
             <a:pPr>
-              <a:defRPr sz="1800"/>
+              <a:spcAft>
+                <a:spcPts val="600"/>
+              </a:spcAft>
+              <a:defRPr sz="1300">
+                <a:solidFill>
+                  <a:srgbClr val="4A5568"/>
+                </a:solidFill>
+              </a:defRPr>
             </a:pPr>
             <a:r>
-              <a:t>k=3 on labels: context flag 0.0 pooled vs baseline 0.10—promising directionally; verify stability with larger n.</a:t>
-            </a:r>
-          </a:p>
-          <a:p>
-            <a:pPr>
-              <a:defRPr sz="1800"/>
-            </a:pPr>
-            <a:r>
-              <a:t>Takeaway: No single winner for both industries; best preset depends on metric priority (grounding vs correctness vs abstention).</a:t>
+              <a:t>Use for chunking strategy exploration; confirm with larger n.</a:t>
             </a:r>
           </a:p>
         </p:txBody>

--- a/outputs/presentation/RAG_Hallucination_Capstone.pptx
+++ b/outputs/presentation/RAG_Hallucination_Capstone.pptx
@@ -17,6 +17,7 @@
     <p:sldId id="265" r:id="rId16"/>
     <p:sldId id="266" r:id="rId17"/>
     <p:sldId id="267" r:id="rId18"/>
+    <p:sldId id="268" r:id="rId19"/>
   </p:sldIdLst>
   <p:sldSz cx="9144000" cy="6858000" type="screen4x3"/>
   <p:notesSz cx="6858000" cy="9144000"/>
@@ -136,11 +137,64 @@
               <c:strCache>
                 <c:ptCount val="1"/>
                 <c:pt idx="0">
-                  <c:v>Delta: context halluc. (lower better)</c:v>
+                  <c:v>Δ context halluc. (blue = this metric; lower is better)</c:v>
                 </c:pt>
               </c:strCache>
             </c:strRef>
           </c:tx>
+          <c:spPr>
+            <a:solidFill>
+              <a:srgbClr val="1E5A8E"/>
+            </a:solidFill>
+          </c:spPr>
+          <c:dPt>
+            <c:idx val="0"/>
+            <c:spPr>
+              <a:solidFill>
+                <a:srgbClr val="1E5A8E"/>
+              </a:solidFill>
+            </c:spPr>
+          </c:dPt>
+          <c:dPt>
+            <c:idx val="1"/>
+            <c:spPr>
+              <a:solidFill>
+                <a:srgbClr val="1E5A8E"/>
+              </a:solidFill>
+            </c:spPr>
+          </c:dPt>
+          <c:dPt>
+            <c:idx val="2"/>
+            <c:spPr>
+              <a:solidFill>
+                <a:srgbClr val="1E5A8E"/>
+              </a:solidFill>
+            </c:spPr>
+          </c:dPt>
+          <c:dPt>
+            <c:idx val="3"/>
+            <c:spPr>
+              <a:solidFill>
+                <a:srgbClr val="1E5A8E"/>
+              </a:solidFill>
+            </c:spPr>
+          </c:dPt>
+          <c:dPt>
+            <c:idx val="4"/>
+            <c:spPr>
+              <a:solidFill>
+                <a:srgbClr val="1E5A8E"/>
+              </a:solidFill>
+            </c:spPr>
+          </c:dPt>
+          <c:dPt>
+            <c:idx val="5"/>
+            <c:spPr>
+              <a:solidFill>
+                <a:srgbClr val="1E5A8E"/>
+              </a:solidFill>
+            </c:spPr>
+          </c:dPt>
           <c:cat>
             <c:strRef>
               <c:f>Sheet1!$A$2:$A$7</c:f>
@@ -204,11 +258,64 @@
               <c:strCache>
                 <c:ptCount val="1"/>
                 <c:pt idx="0">
-                  <c:v>Delta: answer correctness (higher better)</c:v>
+                  <c:v>Δ answer correctness (red = this metric; higher is better)</c:v>
                 </c:pt>
               </c:strCache>
             </c:strRef>
           </c:tx>
+          <c:spPr>
+            <a:solidFill>
+              <a:srgbClr val="B91C1C"/>
+            </a:solidFill>
+          </c:spPr>
+          <c:dPt>
+            <c:idx val="0"/>
+            <c:spPr>
+              <a:solidFill>
+                <a:srgbClr val="B91C1C"/>
+              </a:solidFill>
+            </c:spPr>
+          </c:dPt>
+          <c:dPt>
+            <c:idx val="1"/>
+            <c:spPr>
+              <a:solidFill>
+                <a:srgbClr val="B91C1C"/>
+              </a:solidFill>
+            </c:spPr>
+          </c:dPt>
+          <c:dPt>
+            <c:idx val="2"/>
+            <c:spPr>
+              <a:solidFill>
+                <a:srgbClr val="B91C1C"/>
+              </a:solidFill>
+            </c:spPr>
+          </c:dPt>
+          <c:dPt>
+            <c:idx val="3"/>
+            <c:spPr>
+              <a:solidFill>
+                <a:srgbClr val="B91C1C"/>
+              </a:solidFill>
+            </c:spPr>
+          </c:dPt>
+          <c:dPt>
+            <c:idx val="4"/>
+            <c:spPr>
+              <a:solidFill>
+                <a:srgbClr val="B91C1C"/>
+              </a:solidFill>
+            </c:spPr>
+          </c:dPt>
+          <c:dPt>
+            <c:idx val="5"/>
+            <c:spPr>
+              <a:solidFill>
+                <a:srgbClr val="B91C1C"/>
+              </a:solidFill>
+            </c:spPr>
+          </c:dPt>
           <c:cat>
             <c:strRef>
               <c:f>Sheet1!$A$2:$A$7</c:f>
@@ -3611,7 +3718,7 @@
               </a:defRPr>
             </a:pPr>
             <a:r>
-              <a:t>Design takeaway</a:t>
+              <a:t>Tier B — Chunking presets (separate gold)</a:t>
             </a:r>
           </a:p>
           <a:p>
@@ -3623,168 +3730,629 @@
               </a:defRPr>
             </a:pPr>
             <a:r>
-              <a:t>Tradeoffs, not a single winner</a:t>
-            </a:r>
-          </a:p>
-        </p:txBody>
-      </p:sp>
-      <p:sp>
-        <p:nvSpPr>
-          <p:cNvPr id="3" name="Oval 2"/>
-          <p:cNvSpPr/>
+              <a:t>Compare within this tier only</a:t>
+            </a:r>
+          </a:p>
+        </p:txBody>
+      </p:sp>
+      <p:graphicFrame>
+        <p:nvGraphicFramePr>
+          <p:cNvPr id="3" name="Table 2"/>
+          <p:cNvGraphicFramePr>
+            <a:graphicFrameLocks noGrp="1"/>
+          </p:cNvGraphicFramePr>
+          <p:nvPr/>
+        </p:nvGraphicFramePr>
+        <p:xfrm>
+          <a:off x="502920" y="1207008"/>
+          <a:ext cx="8321040" cy="2432304"/>
+        </p:xfrm>
+        <a:graphic>
+          <a:graphicData uri="http://schemas.openxmlformats.org/drawingml/2006/table">
+            <a:tbl>
+              <a:tblPr firstRow="1" bandRow="1">
+                <a:tableStyleId>{5C22544A-7EE6-4342-B048-85BDC9FD1C3A}</a:tableStyleId>
+              </a:tblPr>
+              <a:tblGrid>
+                <a:gridCol w="1664208"/>
+                <a:gridCol w="1664208"/>
+                <a:gridCol w="1664208"/>
+                <a:gridCol w="1664208"/>
+                <a:gridCol w="1664208"/>
+              </a:tblGrid>
+              <a:tr h="347472">
+                <a:tc>
+                  <a:txBody>
+                    <a:bodyPr/>
+                    <a:lstStyle/>
+                    <a:p>
+                      <a:pPr>
+                        <a:defRPr sz="1000" b="1">
+                          <a:solidFill>
+                            <a:srgbClr val="FFFFFF"/>
+                          </a:solidFill>
+                        </a:defRPr>
+                      </a:pPr>
+                      <a:r>
+                        <a:t>genre</a:t>
+                      </a:r>
+                    </a:p>
+                  </a:txBody>
+                  <a:tcPr>
+                    <a:solidFill>
+                      <a:srgbClr val="2B7CA8"/>
+                    </a:solidFill>
+                  </a:tcPr>
+                </a:tc>
+                <a:tc>
+                  <a:txBody>
+                    <a:bodyPr/>
+                    <a:lstStyle/>
+                    <a:p>
+                      <a:pPr>
+                        <a:defRPr sz="1000" b="1">
+                          <a:solidFill>
+                            <a:srgbClr val="FFFFFF"/>
+                          </a:solidFill>
+                        </a:defRPr>
+                      </a:pPr>
+                      <a:r>
+                        <a:t>experiment</a:t>
+                      </a:r>
+                    </a:p>
+                  </a:txBody>
+                  <a:tcPr>
+                    <a:solidFill>
+                      <a:srgbClr val="2B7CA8"/>
+                    </a:solidFill>
+                  </a:tcPr>
+                </a:tc>
+                <a:tc>
+                  <a:txBody>
+                    <a:bodyPr/>
+                    <a:lstStyle/>
+                    <a:p>
+                      <a:pPr>
+                        <a:defRPr sz="1000" b="1">
+                          <a:solidFill>
+                            <a:srgbClr val="FFFFFF"/>
+                          </a:solidFill>
+                        </a:defRPr>
+                      </a:pPr>
+                      <a:r>
+                        <a:t>context hallucination</a:t>
+                      </a:r>
+                    </a:p>
+                  </a:txBody>
+                  <a:tcPr>
+                    <a:solidFill>
+                      <a:srgbClr val="2B7CA8"/>
+                    </a:solidFill>
+                  </a:tcPr>
+                </a:tc>
+                <a:tc>
+                  <a:txBody>
+                    <a:bodyPr/>
+                    <a:lstStyle/>
+                    <a:p>
+                      <a:pPr>
+                        <a:defRPr sz="1000" b="1">
+                          <a:solidFill>
+                            <a:srgbClr val="FFFFFF"/>
+                          </a:solidFill>
+                        </a:defRPr>
+                      </a:pPr>
+                      <a:r>
+                        <a:t>answer correctness</a:t>
+                      </a:r>
+                    </a:p>
+                  </a:txBody>
+                  <a:tcPr>
+                    <a:solidFill>
+                      <a:srgbClr val="2B7CA8"/>
+                    </a:solidFill>
+                  </a:tcPr>
+                </a:tc>
+                <a:tc>
+                  <a:txBody>
+                    <a:bodyPr/>
+                    <a:lstStyle/>
+                    <a:p>
+                      <a:pPr>
+                        <a:defRPr sz="1000" b="1">
+                          <a:solidFill>
+                            <a:srgbClr val="FFFFFF"/>
+                          </a:solidFill>
+                        </a:defRPr>
+                      </a:pPr>
+                      <a:r>
+                        <a:t>faithfulness</a:t>
+                      </a:r>
+                    </a:p>
+                  </a:txBody>
+                  <a:tcPr>
+                    <a:solidFill>
+                      <a:srgbClr val="2B7CA8"/>
+                    </a:solidFill>
+                  </a:tcPr>
+                </a:tc>
+              </a:tr>
+              <a:tr h="347472">
+                <a:tc>
+                  <a:txBody>
+                    <a:bodyPr/>
+                    <a:lstStyle/>
+                    <a:p>
+                      <a:pPr>
+                        <a:defRPr sz="1000"/>
+                      </a:pPr>
+                      <a:r>
+                        <a:t>fda_label</a:t>
+                      </a:r>
+                    </a:p>
+                  </a:txBody>
+                  <a:tcPr/>
+                </a:tc>
+                <a:tc>
+                  <a:txBody>
+                    <a:bodyPr/>
+                    <a:lstStyle/>
+                    <a:p>
+                      <a:pPr>
+                        <a:defRPr sz="1000"/>
+                      </a:pPr>
+                      <a:r>
+                        <a:t>coarse_chunks</a:t>
+                      </a:r>
+                    </a:p>
+                  </a:txBody>
+                  <a:tcPr/>
+                </a:tc>
+                <a:tc>
+                  <a:txBody>
+                    <a:bodyPr/>
+                    <a:lstStyle/>
+                    <a:p>
+                      <a:pPr>
+                        <a:defRPr sz="1000"/>
+                      </a:pPr>
+                      <a:r>
+                        <a:t>0.100</a:t>
+                      </a:r>
+                    </a:p>
+                  </a:txBody>
+                  <a:tcPr/>
+                </a:tc>
+                <a:tc>
+                  <a:txBody>
+                    <a:bodyPr/>
+                    <a:lstStyle/>
+                    <a:p>
+                      <a:pPr>
+                        <a:defRPr sz="1000"/>
+                      </a:pPr>
+                      <a:r>
+                        <a:t>0.740</a:t>
+                      </a:r>
+                    </a:p>
+                  </a:txBody>
+                  <a:tcPr/>
+                </a:tc>
+                <a:tc>
+                  <a:txBody>
+                    <a:bodyPr/>
+                    <a:lstStyle/>
+                    <a:p>
+                      <a:pPr>
+                        <a:defRPr sz="1000"/>
+                      </a:pPr>
+                      <a:r>
+                        <a:t>0.805</a:t>
+                      </a:r>
+                    </a:p>
+                  </a:txBody>
+                  <a:tcPr/>
+                </a:tc>
+              </a:tr>
+              <a:tr h="347472">
+                <a:tc>
+                  <a:txBody>
+                    <a:bodyPr/>
+                    <a:lstStyle/>
+                    <a:p>
+                      <a:pPr>
+                        <a:defRPr sz="1000"/>
+                      </a:pPr>
+                      <a:r>
+                        <a:t>fda_label</a:t>
+                      </a:r>
+                    </a:p>
+                  </a:txBody>
+                  <a:tcPr/>
+                </a:tc>
+                <a:tc>
+                  <a:txBody>
+                    <a:bodyPr/>
+                    <a:lstStyle/>
+                    <a:p>
+                      <a:pPr>
+                        <a:defRPr sz="1000"/>
+                      </a:pPr>
+                      <a:r>
+                        <a:t>deep_headers_fine</a:t>
+                      </a:r>
+                    </a:p>
+                  </a:txBody>
+                  <a:tcPr/>
+                </a:tc>
+                <a:tc>
+                  <a:txBody>
+                    <a:bodyPr/>
+                    <a:lstStyle/>
+                    <a:p>
+                      <a:pPr>
+                        <a:defRPr sz="1000"/>
+                      </a:pPr>
+                      <a:r>
+                        <a:t>0.100</a:t>
+                      </a:r>
+                    </a:p>
+                  </a:txBody>
+                  <a:tcPr/>
+                </a:tc>
+                <a:tc>
+                  <a:txBody>
+                    <a:bodyPr/>
+                    <a:lstStyle/>
+                    <a:p>
+                      <a:pPr>
+                        <a:defRPr sz="1000"/>
+                      </a:pPr>
+                      <a:r>
+                        <a:t>0.566</a:t>
+                      </a:r>
+                    </a:p>
+                  </a:txBody>
+                  <a:tcPr/>
+                </a:tc>
+                <a:tc>
+                  <a:txBody>
+                    <a:bodyPr/>
+                    <a:lstStyle/>
+                    <a:p>
+                      <a:pPr>
+                        <a:defRPr sz="1000"/>
+                      </a:pPr>
+                      <a:r>
+                        <a:t>0.800</a:t>
+                      </a:r>
+                    </a:p>
+                  </a:txBody>
+                  <a:tcPr/>
+                </a:tc>
+              </a:tr>
+              <a:tr h="347472">
+                <a:tc>
+                  <a:txBody>
+                    <a:bodyPr/>
+                    <a:lstStyle/>
+                    <a:p>
+                      <a:pPr>
+                        <a:defRPr sz="1000"/>
+                      </a:pPr>
+                      <a:r>
+                        <a:t>fda_label</a:t>
+                      </a:r>
+                    </a:p>
+                  </a:txBody>
+                  <a:tcPr/>
+                </a:tc>
+                <a:tc>
+                  <a:txBody>
+                    <a:bodyPr/>
+                    <a:lstStyle/>
+                    <a:p>
+                      <a:pPr>
+                        <a:defRPr sz="1000"/>
+                      </a:pPr>
+                      <a:r>
+                        <a:t>fine_chunks</a:t>
+                      </a:r>
+                    </a:p>
+                  </a:txBody>
+                  <a:tcPr/>
+                </a:tc>
+                <a:tc>
+                  <a:txBody>
+                    <a:bodyPr/>
+                    <a:lstStyle/>
+                    <a:p>
+                      <a:pPr>
+                        <a:defRPr sz="1000"/>
+                      </a:pPr>
+                      <a:r>
+                        <a:t>0.000</a:t>
+                      </a:r>
+                    </a:p>
+                  </a:txBody>
+                  <a:tcPr/>
+                </a:tc>
+                <a:tc>
+                  <a:txBody>
+                    <a:bodyPr/>
+                    <a:lstStyle/>
+                    <a:p>
+                      <a:pPr>
+                        <a:defRPr sz="1000"/>
+                      </a:pPr>
+                      <a:r>
+                        <a:t>0.551</a:t>
+                      </a:r>
+                    </a:p>
+                  </a:txBody>
+                  <a:tcPr/>
+                </a:tc>
+                <a:tc>
+                  <a:txBody>
+                    <a:bodyPr/>
+                    <a:lstStyle/>
+                    <a:p>
+                      <a:pPr>
+                        <a:defRPr sz="1000"/>
+                      </a:pPr>
+                      <a:r>
+                        <a:t>0.738</a:t>
+                      </a:r>
+                    </a:p>
+                  </a:txBody>
+                  <a:tcPr/>
+                </a:tc>
+              </a:tr>
+              <a:tr h="347472">
+                <a:tc>
+                  <a:txBody>
+                    <a:bodyPr/>
+                    <a:lstStyle/>
+                    <a:p>
+                      <a:pPr>
+                        <a:defRPr sz="1000"/>
+                      </a:pPr>
+                      <a:r>
+                        <a:t>finance_10k</a:t>
+                      </a:r>
+                    </a:p>
+                  </a:txBody>
+                  <a:tcPr/>
+                </a:tc>
+                <a:tc>
+                  <a:txBody>
+                    <a:bodyPr/>
+                    <a:lstStyle/>
+                    <a:p>
+                      <a:pPr>
+                        <a:defRPr sz="1000"/>
+                      </a:pPr>
+                      <a:r>
+                        <a:t>coarse_chunks</a:t>
+                      </a:r>
+                    </a:p>
+                  </a:txBody>
+                  <a:tcPr/>
+                </a:tc>
+                <a:tc>
+                  <a:txBody>
+                    <a:bodyPr/>
+                    <a:lstStyle/>
+                    <a:p>
+                      <a:pPr>
+                        <a:defRPr sz="1000"/>
+                      </a:pPr>
+                      <a:r>
+                        <a:t>0.250</a:t>
+                      </a:r>
+                    </a:p>
+                  </a:txBody>
+                  <a:tcPr/>
+                </a:tc>
+                <a:tc>
+                  <a:txBody>
+                    <a:bodyPr/>
+                    <a:lstStyle/>
+                    <a:p>
+                      <a:pPr>
+                        <a:defRPr sz="1000"/>
+                      </a:pPr>
+                      <a:r>
+                        <a:t>0.809</a:t>
+                      </a:r>
+                    </a:p>
+                  </a:txBody>
+                  <a:tcPr/>
+                </a:tc>
+                <a:tc>
+                  <a:txBody>
+                    <a:bodyPr/>
+                    <a:lstStyle/>
+                    <a:p>
+                      <a:pPr>
+                        <a:defRPr sz="1000"/>
+                      </a:pPr>
+                      <a:r>
+                        <a:t>0.841</a:t>
+                      </a:r>
+                    </a:p>
+                  </a:txBody>
+                  <a:tcPr/>
+                </a:tc>
+              </a:tr>
+              <a:tr h="347472">
+                <a:tc>
+                  <a:txBody>
+                    <a:bodyPr/>
+                    <a:lstStyle/>
+                    <a:p>
+                      <a:pPr>
+                        <a:defRPr sz="1000"/>
+                      </a:pPr>
+                      <a:r>
+                        <a:t>finance_10k</a:t>
+                      </a:r>
+                    </a:p>
+                  </a:txBody>
+                  <a:tcPr/>
+                </a:tc>
+                <a:tc>
+                  <a:txBody>
+                    <a:bodyPr/>
+                    <a:lstStyle/>
+                    <a:p>
+                      <a:pPr>
+                        <a:defRPr sz="1000"/>
+                      </a:pPr>
+                      <a:r>
+                        <a:t>deep_headers_fine</a:t>
+                      </a:r>
+                    </a:p>
+                  </a:txBody>
+                  <a:tcPr/>
+                </a:tc>
+                <a:tc>
+                  <a:txBody>
+                    <a:bodyPr/>
+                    <a:lstStyle/>
+                    <a:p>
+                      <a:pPr>
+                        <a:defRPr sz="1000"/>
+                      </a:pPr>
+                      <a:r>
+                        <a:t>0.050</a:t>
+                      </a:r>
+                    </a:p>
+                  </a:txBody>
+                  <a:tcPr/>
+                </a:tc>
+                <a:tc>
+                  <a:txBody>
+                    <a:bodyPr/>
+                    <a:lstStyle/>
+                    <a:p>
+                      <a:pPr>
+                        <a:defRPr sz="1000"/>
+                      </a:pPr>
+                      <a:r>
+                        <a:t>0.693</a:t>
+                      </a:r>
+                    </a:p>
+                  </a:txBody>
+                  <a:tcPr/>
+                </a:tc>
+                <a:tc>
+                  <a:txBody>
+                    <a:bodyPr/>
+                    <a:lstStyle/>
+                    <a:p>
+                      <a:pPr>
+                        <a:defRPr sz="1000"/>
+                      </a:pPr>
+                      <a:r>
+                        <a:t>0.721</a:t>
+                      </a:r>
+                    </a:p>
+                  </a:txBody>
+                  <a:tcPr/>
+                </a:tc>
+              </a:tr>
+              <a:tr h="347472">
+                <a:tc>
+                  <a:txBody>
+                    <a:bodyPr/>
+                    <a:lstStyle/>
+                    <a:p>
+                      <a:pPr>
+                        <a:defRPr sz="1000"/>
+                      </a:pPr>
+                      <a:r>
+                        <a:t>finance_10k</a:t>
+                      </a:r>
+                    </a:p>
+                  </a:txBody>
+                  <a:tcPr/>
+                </a:tc>
+                <a:tc>
+                  <a:txBody>
+                    <a:bodyPr/>
+                    <a:lstStyle/>
+                    <a:p>
+                      <a:pPr>
+                        <a:defRPr sz="1000"/>
+                      </a:pPr>
+                      <a:r>
+                        <a:t>fine_chunks</a:t>
+                      </a:r>
+                    </a:p>
+                  </a:txBody>
+                  <a:tcPr/>
+                </a:tc>
+                <a:tc>
+                  <a:txBody>
+                    <a:bodyPr/>
+                    <a:lstStyle/>
+                    <a:p>
+                      <a:pPr>
+                        <a:defRPr sz="1000"/>
+                      </a:pPr>
+                      <a:r>
+                        <a:t>0.050</a:t>
+                      </a:r>
+                    </a:p>
+                  </a:txBody>
+                  <a:tcPr/>
+                </a:tc>
+                <a:tc>
+                  <a:txBody>
+                    <a:bodyPr/>
+                    <a:lstStyle/>
+                    <a:p>
+                      <a:pPr>
+                        <a:defRPr sz="1000"/>
+                      </a:pPr>
+                      <a:r>
+                        <a:t>0.835</a:t>
+                      </a:r>
+                    </a:p>
+                  </a:txBody>
+                  <a:tcPr/>
+                </a:tc>
+                <a:tc>
+                  <a:txBody>
+                    <a:bodyPr/>
+                    <a:lstStyle/>
+                    <a:p>
+                      <a:pPr>
+                        <a:defRPr sz="1000"/>
+                      </a:pPr>
+                      <a:r>
+                        <a:t>0.963</a:t>
+                      </a:r>
+                    </a:p>
+                  </a:txBody>
+                  <a:tcPr/>
+                </a:tc>
+              </a:tr>
+            </a:tbl>
+          </a:graphicData>
+        </a:graphic>
+      </p:graphicFrame>
+      <p:sp>
+        <p:nvSpPr>
+          <p:cNvPr id="4" name="TextBox 3"/>
+          <p:cNvSpPr txBox="1"/>
           <p:nvPr/>
         </p:nvSpPr>
         <p:spPr>
           <a:xfrm>
-            <a:off x="1097280" y="1920240"/>
-            <a:ext cx="1828800" cy="1828800"/>
-          </a:xfrm>
-          <a:prstGeom prst="ellipse">
-            <a:avLst/>
-          </a:prstGeom>
-          <a:solidFill>
-            <a:srgbClr val="2B7CA8"/>
-          </a:solidFill>
-        </p:spPr>
-        <p:style>
-          <a:lnRef idx="1">
-            <a:schemeClr val="accent1"/>
-          </a:lnRef>
-          <a:fillRef idx="3">
-            <a:schemeClr val="accent1"/>
-          </a:fillRef>
-          <a:effectRef idx="2">
-            <a:schemeClr val="accent1"/>
-          </a:effectRef>
-          <a:fontRef idx="minor">
-            <a:schemeClr val="lt1"/>
-          </a:fontRef>
-        </p:style>
-        <p:txBody>
-          <a:bodyPr rtlCol="0" anchor="ctr"/>
-          <a:lstStyle/>
-          <a:p>
-            <a:pPr algn="ctr">
-              <a:defRPr sz="1200" b="1">
-                <a:solidFill>
-                  <a:srgbClr val="FFFFFF"/>
-                </a:solidFill>
-              </a:defRPr>
-            </a:pPr>
-            <a:r>
-              <a:t>Retrieval depth (k)</a:t>
-            </a:r>
-          </a:p>
-        </p:txBody>
-      </p:sp>
-      <p:sp>
-        <p:nvSpPr>
-          <p:cNvPr id="4" name="Oval 3"/>
-          <p:cNvSpPr/>
-          <p:nvPr/>
-        </p:nvSpPr>
-        <p:spPr>
-          <a:xfrm>
-            <a:off x="3474720" y="1920240"/>
-            <a:ext cx="1828800" cy="1828800"/>
-          </a:xfrm>
-          <a:prstGeom prst="ellipse">
-            <a:avLst/>
-          </a:prstGeom>
-          <a:solidFill>
-            <a:srgbClr val="1E3A5F"/>
-          </a:solidFill>
-        </p:spPr>
-        <p:style>
-          <a:lnRef idx="1">
-            <a:schemeClr val="accent1"/>
-          </a:lnRef>
-          <a:fillRef idx="3">
-            <a:schemeClr val="accent1"/>
-          </a:fillRef>
-          <a:effectRef idx="2">
-            <a:schemeClr val="accent1"/>
-          </a:effectRef>
-          <a:fontRef idx="minor">
-            <a:schemeClr val="lt1"/>
-          </a:fontRef>
-        </p:style>
-        <p:txBody>
-          <a:bodyPr rtlCol="0" anchor="ctr"/>
-          <a:lstStyle/>
-          <a:p>
-            <a:pPr algn="ctr">
-              <a:defRPr sz="1200" b="1">
-                <a:solidFill>
-                  <a:srgbClr val="FFFFFF"/>
-                </a:solidFill>
-              </a:defRPr>
-            </a:pPr>
-            <a:r>
-              <a:t>Prompting (CoT)</a:t>
-            </a:r>
-          </a:p>
-        </p:txBody>
-      </p:sp>
-      <p:sp>
-        <p:nvSpPr>
-          <p:cNvPr id="5" name="Oval 4"/>
-          <p:cNvSpPr/>
-          <p:nvPr/>
-        </p:nvSpPr>
-        <p:spPr>
-          <a:xfrm>
-            <a:off x="5852160" y="1920240"/>
-            <a:ext cx="1828800" cy="1828800"/>
-          </a:xfrm>
-          <a:prstGeom prst="ellipse">
-            <a:avLst/>
-          </a:prstGeom>
-          <a:solidFill>
-            <a:srgbClr val="276F47"/>
-          </a:solidFill>
-        </p:spPr>
-        <p:style>
-          <a:lnRef idx="1">
-            <a:schemeClr val="accent1"/>
-          </a:lnRef>
-          <a:fillRef idx="3">
-            <a:schemeClr val="accent1"/>
-          </a:fillRef>
-          <a:effectRef idx="2">
-            <a:schemeClr val="accent1"/>
-          </a:effectRef>
-          <a:fontRef idx="minor">
-            <a:schemeClr val="lt1"/>
-          </a:fontRef>
-        </p:style>
-        <p:txBody>
-          <a:bodyPr rtlCol="0" anchor="ctr"/>
-          <a:lstStyle/>
-          <a:p>
-            <a:pPr algn="ctr">
-              <a:defRPr sz="1200" b="1">
-                <a:solidFill>
-                  <a:srgbClr val="FFFFFF"/>
-                </a:solidFill>
-              </a:defRPr>
-            </a:pPr>
-            <a:r>
-              <a:t>Strict citations</a:t>
-            </a:r>
-          </a:p>
-        </p:txBody>
-      </p:sp>
-      <p:sp>
-        <p:nvSpPr>
-          <p:cNvPr id="6" name="TextBox 5"/>
-          <p:cNvSpPr txBox="1"/>
-          <p:nvPr/>
-        </p:nvSpPr>
-        <p:spPr>
-          <a:xfrm>
-            <a:off x="640080" y="4434840"/>
-            <a:ext cx="7863840" cy="2011680"/>
+            <a:off x="502920" y="4160520"/>
+            <a:ext cx="8229600" cy="2286000"/>
           </a:xfrm>
           <a:prstGeom prst="rect">
             <a:avLst/>
@@ -3801,14 +4369,14 @@
               <a:spcAft>
                 <a:spcPts val="600"/>
               </a:spcAft>
-              <a:defRPr sz="1500">
+              <a:defRPr sz="1300">
                 <a:solidFill>
                   <a:srgbClr val="4A5568"/>
                 </a:solidFill>
               </a:defRPr>
             </a:pPr>
             <a:r>
-              <a:t>Choose metrics first: minimize hallucination flag vs maximize correctness vs force abstention.</a:t>
+              <a:t>Each preset re-chunks + regenerates Q/A — not comparable to Tier A deltas.</a:t>
             </a:r>
           </a:p>
           <a:p>
@@ -3816,14 +4384,14 @@
               <a:spcAft>
                 <a:spcPts val="600"/>
               </a:spcAft>
-              <a:defRPr sz="1500">
+              <a:defRPr sz="1300">
                 <a:solidFill>
                   <a:srgbClr val="4A5568"/>
                 </a:solidFill>
               </a:defRPr>
             </a:pPr>
             <a:r>
-              <a:t>Pilot n=10 — directional; scale n for confidence.</a:t>
+              <a:t>Use for chunking strategy exploration; confirm with larger n.</a:t>
             </a:r>
           </a:p>
         </p:txBody>
@@ -3901,21 +4469,180 @@
               </a:defRPr>
             </a:pPr>
             <a:r>
-              <a:t>Limitations &amp; next steps</a:t>
-            </a:r>
-          </a:p>
-        </p:txBody>
-      </p:sp>
-      <p:sp>
-        <p:nvSpPr>
-          <p:cNvPr id="3" name="TextBox 2"/>
+              <a:t>Design takeaway — answering the core questions</a:t>
+            </a:r>
+          </a:p>
+          <a:p>
+            <a:pPr>
+              <a:defRPr sz="1400">
+                <a:solidFill>
+                  <a:srgbClr val="E2E8F0"/>
+                </a:solidFill>
+              </a:defRPr>
+            </a:pPr>
+            <a:r>
+              <a:t>What the data suggests for practitioners</a:t>
+            </a:r>
+          </a:p>
+        </p:txBody>
+      </p:sp>
+      <p:sp>
+        <p:nvSpPr>
+          <p:cNvPr id="3" name="Oval 2"/>
+          <p:cNvSpPr/>
+          <p:nvPr/>
+        </p:nvSpPr>
+        <p:spPr>
+          <a:xfrm>
+            <a:off x="777240" y="1261872"/>
+            <a:ext cx="1600200" cy="1600200"/>
+          </a:xfrm>
+          <a:prstGeom prst="ellipse">
+            <a:avLst/>
+          </a:prstGeom>
+          <a:solidFill>
+            <a:srgbClr val="2B7CA8"/>
+          </a:solidFill>
+        </p:spPr>
+        <p:style>
+          <a:lnRef idx="1">
+            <a:schemeClr val="accent1"/>
+          </a:lnRef>
+          <a:fillRef idx="3">
+            <a:schemeClr val="accent1"/>
+          </a:fillRef>
+          <a:effectRef idx="2">
+            <a:schemeClr val="accent1"/>
+          </a:effectRef>
+          <a:fontRef idx="minor">
+            <a:schemeClr val="lt1"/>
+          </a:fontRef>
+        </p:style>
+        <p:txBody>
+          <a:bodyPr rtlCol="0" anchor="ctr"/>
+          <a:lstStyle/>
+          <a:p>
+            <a:pPr algn="ctr">
+              <a:defRPr sz="1100" b="1">
+                <a:solidFill>
+                  <a:srgbClr val="FFFFFF"/>
+                </a:solidFill>
+              </a:defRPr>
+            </a:pPr>
+            <a:r>
+              <a:t>Retrieval (k)</a:t>
+            </a:r>
+          </a:p>
+        </p:txBody>
+      </p:sp>
+      <p:sp>
+        <p:nvSpPr>
+          <p:cNvPr id="4" name="Oval 3"/>
+          <p:cNvSpPr/>
+          <p:nvPr/>
+        </p:nvSpPr>
+        <p:spPr>
+          <a:xfrm>
+            <a:off x="3383280" y="1261872"/>
+            <a:ext cx="1600200" cy="1600200"/>
+          </a:xfrm>
+          <a:prstGeom prst="ellipse">
+            <a:avLst/>
+          </a:prstGeom>
+          <a:solidFill>
+            <a:srgbClr val="1E3A5F"/>
+          </a:solidFill>
+        </p:spPr>
+        <p:style>
+          <a:lnRef idx="1">
+            <a:schemeClr val="accent1"/>
+          </a:lnRef>
+          <a:fillRef idx="3">
+            <a:schemeClr val="accent1"/>
+          </a:fillRef>
+          <a:effectRef idx="2">
+            <a:schemeClr val="accent1"/>
+          </a:effectRef>
+          <a:fontRef idx="minor">
+            <a:schemeClr val="lt1"/>
+          </a:fontRef>
+        </p:style>
+        <p:txBody>
+          <a:bodyPr rtlCol="0" anchor="ctr"/>
+          <a:lstStyle/>
+          <a:p>
+            <a:pPr algn="ctr">
+              <a:defRPr sz="1100" b="1">
+                <a:solidFill>
+                  <a:srgbClr val="FFFFFF"/>
+                </a:solidFill>
+              </a:defRPr>
+            </a:pPr>
+            <a:r>
+              <a:t>Prompting (CoT)</a:t>
+            </a:r>
+          </a:p>
+        </p:txBody>
+      </p:sp>
+      <p:sp>
+        <p:nvSpPr>
+          <p:cNvPr id="5" name="Oval 4"/>
+          <p:cNvSpPr/>
+          <p:nvPr/>
+        </p:nvSpPr>
+        <p:spPr>
+          <a:xfrm>
+            <a:off x="5989320" y="1261872"/>
+            <a:ext cx="1600200" cy="1600200"/>
+          </a:xfrm>
+          <a:prstGeom prst="ellipse">
+            <a:avLst/>
+          </a:prstGeom>
+          <a:solidFill>
+            <a:srgbClr val="276F47"/>
+          </a:solidFill>
+        </p:spPr>
+        <p:style>
+          <a:lnRef idx="1">
+            <a:schemeClr val="accent1"/>
+          </a:lnRef>
+          <a:fillRef idx="3">
+            <a:schemeClr val="accent1"/>
+          </a:fillRef>
+          <a:effectRef idx="2">
+            <a:schemeClr val="accent1"/>
+          </a:effectRef>
+          <a:fontRef idx="minor">
+            <a:schemeClr val="lt1"/>
+          </a:fontRef>
+        </p:style>
+        <p:txBody>
+          <a:bodyPr rtlCol="0" anchor="ctr"/>
+          <a:lstStyle/>
+          <a:p>
+            <a:pPr algn="ctr">
+              <a:defRPr sz="1100" b="1">
+                <a:solidFill>
+                  <a:srgbClr val="FFFFFF"/>
+                </a:solidFill>
+              </a:defRPr>
+            </a:pPr>
+            <a:r>
+              <a:t>Strict cites</a:t>
+            </a:r>
+          </a:p>
+        </p:txBody>
+      </p:sp>
+      <p:sp>
+        <p:nvSpPr>
+          <p:cNvPr id="6" name="TextBox 5"/>
           <p:cNvSpPr txBox="1"/>
           <p:nvPr/>
         </p:nvSpPr>
         <p:spPr>
           <a:xfrm>
-            <a:off x="685800" y="1325880"/>
-            <a:ext cx="7772400" cy="5029200"/>
+            <a:off x="594360" y="3063240"/>
+            <a:ext cx="8092440" cy="3520440"/>
           </a:xfrm>
           <a:prstGeom prst="rect">
             <a:avLst/>
@@ -3932,14 +4659,14 @@
               <a:spcAft>
                 <a:spcPts val="600"/>
               </a:spcAft>
-              <a:defRPr sz="1700">
+              <a:defRPr sz="1200">
                 <a:solidFill>
                   <a:srgbClr val="4A5568"/>
                 </a:solidFill>
               </a:defRPr>
             </a:pPr>
             <a:r>
-              <a:t>• n=10 questions / experiment — exploratory.</a:t>
+              <a:t>Fundamental question: which RAG design best reduces hallucinations for professional use? On average across four corpora, k=3 (narrower retrieval) delivered the largest reduction in the context-grounded hallucination flag vs baseline—suggesting smaller top-k can reduce unsupported content when the right passages are still retrieved.</a:t>
             </a:r>
           </a:p>
           <a:p>
@@ -3947,14 +4674,14 @@
               <a:spcAft>
                 <a:spcPts val="600"/>
               </a:spcAft>
-              <a:defRPr sz="1700">
+              <a:defRPr sz="1200">
                 <a:solidFill>
                   <a:srgbClr val="4A5568"/>
                 </a:solidFill>
               </a:defRPr>
             </a:pPr>
             <a:r>
-              <a:t>• Four PDFs — illustrative genres, not universal finance/healthcare.</a:t>
+              <a:t>Tradeoff: k8 + chain-of-thought delivered the largest average gain in answer correctness vs baseline, but also the largest average increase in the hallucination flag vs baseline. So “best for correctness” and “best for grounding” are not the same preset.</a:t>
             </a:r>
           </a:p>
           <a:p>
@@ -3962,14 +4689,14 @@
               <a:spcAft>
                 <a:spcPts val="600"/>
               </a:spcAft>
-              <a:defRPr sz="1700">
+              <a:defRPr sz="1200">
                 <a:solidFill>
                   <a:srgbClr val="4A5568"/>
                 </a:solidFill>
               </a:defRPr>
             </a:pPr>
             <a:r>
-              <a:t>• LLM judges add variance; triangulate with rule-based metrics.</a:t>
+              <a:t>Industry nuance: pooled 10-Ks showed higher recall@5 than pooled FDA labels in this setup—retrieval difficulty differs by genre. No single winner for both finance-style and label-style text; teams should pick metrics (grounding vs correctness vs abstention) first, then select a preset.</a:t>
             </a:r>
           </a:p>
           <a:p>
@@ -3977,14 +4704,29 @@
               <a:spcAft>
                 <a:spcPts val="600"/>
               </a:spcAft>
-              <a:defRPr sz="1700">
+              <a:defRPr sz="1200">
                 <a:solidFill>
                   <a:srgbClr val="4A5568"/>
                 </a:solidFill>
               </a:defRPr>
             </a:pPr>
             <a:r>
-              <a:t>• Next: larger n, CIs, more rerankers &amp; abstention policies.</a:t>
+              <a:t>Strict citation post-processing: near-zero average change in the hallucination flag in the aggregate, with a small average drop in correctness—consistent with more forced abstention when cites are imperfect.</a:t>
+            </a:r>
+          </a:p>
+          <a:p>
+            <a:pPr>
+              <a:spcAft>
+                <a:spcPts val="600"/>
+              </a:spcAft>
+              <a:defRPr sz="1200">
+                <a:solidFill>
+                  <a:srgbClr val="4A5568"/>
+                </a:solidFill>
+              </a:defRPr>
+            </a:pPr>
+            <a:r>
+              <a:t>Tier B (chunking): compare chunk presets within that tier only; they use different gold questions—useful for chunking strategy, not for ranking against Tier A deltas.</a:t>
             </a:r>
           </a:p>
         </p:txBody>
@@ -4062,6 +4804,167 @@
               </a:defRPr>
             </a:pPr>
             <a:r>
+              <a:t>Limitations &amp; next steps</a:t>
+            </a:r>
+          </a:p>
+        </p:txBody>
+      </p:sp>
+      <p:sp>
+        <p:nvSpPr>
+          <p:cNvPr id="3" name="TextBox 2"/>
+          <p:cNvSpPr txBox="1"/>
+          <p:nvPr/>
+        </p:nvSpPr>
+        <p:spPr>
+          <a:xfrm>
+            <a:off x="685800" y="1325880"/>
+            <a:ext cx="7772400" cy="5029200"/>
+          </a:xfrm>
+          <a:prstGeom prst="rect">
+            <a:avLst/>
+          </a:prstGeom>
+          <a:noFill/>
+        </p:spPr>
+        <p:txBody>
+          <a:bodyPr wrap="square">
+            <a:spAutoFit/>
+          </a:bodyPr>
+          <a:lstStyle/>
+          <a:p>
+            <a:pPr>
+              <a:spcAft>
+                <a:spcPts val="600"/>
+              </a:spcAft>
+              <a:defRPr sz="1700">
+                <a:solidFill>
+                  <a:srgbClr val="4A5568"/>
+                </a:solidFill>
+              </a:defRPr>
+            </a:pPr>
+            <a:r>
+              <a:t>• n=10 questions / experiment — exploratory.</a:t>
+            </a:r>
+          </a:p>
+          <a:p>
+            <a:pPr>
+              <a:spcAft>
+                <a:spcPts val="600"/>
+              </a:spcAft>
+              <a:defRPr sz="1700">
+                <a:solidFill>
+                  <a:srgbClr val="4A5568"/>
+                </a:solidFill>
+              </a:defRPr>
+            </a:pPr>
+            <a:r>
+              <a:t>• Four PDFs — illustrative genres, not universal finance/healthcare.</a:t>
+            </a:r>
+          </a:p>
+          <a:p>
+            <a:pPr>
+              <a:spcAft>
+                <a:spcPts val="600"/>
+              </a:spcAft>
+              <a:defRPr sz="1700">
+                <a:solidFill>
+                  <a:srgbClr val="4A5568"/>
+                </a:solidFill>
+              </a:defRPr>
+            </a:pPr>
+            <a:r>
+              <a:t>• LLM judges add variance; triangulate with rule-based metrics.</a:t>
+            </a:r>
+          </a:p>
+          <a:p>
+            <a:pPr>
+              <a:spcAft>
+                <a:spcPts val="600"/>
+              </a:spcAft>
+              <a:defRPr sz="1700">
+                <a:solidFill>
+                  <a:srgbClr val="4A5568"/>
+                </a:solidFill>
+              </a:defRPr>
+            </a:pPr>
+            <a:r>
+              <a:t>• Next: larger n, CIs, more rerankers &amp; abstention policies.</a:t>
+            </a:r>
+          </a:p>
+        </p:txBody>
+      </p:sp>
+    </p:spTree>
+  </p:cSld>
+  <p:clrMapOvr>
+    <a:masterClrMapping/>
+  </p:clrMapOvr>
+</p:sld>
+</file>
+
+<file path=ppt/slides/slide13.xml><?xml version="1.0" encoding="utf-8"?>
+<p:sld xmlns:a="http://schemas.openxmlformats.org/drawingml/2006/main" xmlns:p="http://schemas.openxmlformats.org/presentationml/2006/main" xmlns:r="http://schemas.openxmlformats.org/officeDocument/2006/relationships">
+  <p:cSld>
+    <p:bg>
+      <p:bgPr>
+        <a:solidFill>
+          <a:srgbClr val="F8FAFC"/>
+        </a:solidFill>
+        <a:effectLst/>
+      </p:bgPr>
+    </p:bg>
+    <p:spTree>
+      <p:nvGrpSpPr>
+        <p:cNvPr id="1" name=""/>
+        <p:cNvGrpSpPr/>
+        <p:nvPr/>
+      </p:nvGrpSpPr>
+      <p:grpSpPr/>
+      <p:sp>
+        <p:nvSpPr>
+          <p:cNvPr id="2" name="Rectangle 1"/>
+          <p:cNvSpPr/>
+          <p:nvPr/>
+        </p:nvSpPr>
+        <p:spPr>
+          <a:xfrm>
+            <a:off x="0" y="0"/>
+            <a:ext cx="9144000" cy="1051560"/>
+          </a:xfrm>
+          <a:prstGeom prst="rect">
+            <a:avLst/>
+          </a:prstGeom>
+          <a:solidFill>
+            <a:srgbClr val="1E3A5F"/>
+          </a:solidFill>
+          <a:ln>
+            <a:noFill/>
+          </a:ln>
+        </p:spPr>
+        <p:style>
+          <a:lnRef idx="1">
+            <a:schemeClr val="accent1"/>
+          </a:lnRef>
+          <a:fillRef idx="3">
+            <a:schemeClr val="accent1"/>
+          </a:fillRef>
+          <a:effectRef idx="2">
+            <a:schemeClr val="accent1"/>
+          </a:effectRef>
+          <a:fontRef idx="minor">
+            <a:schemeClr val="lt1"/>
+          </a:fontRef>
+        </p:style>
+        <p:txBody>
+          <a:bodyPr rtlCol="0" anchor="ctr" lIns="457200" tIns="228600" wrap="square"/>
+          <a:lstStyle/>
+          <a:p>
+            <a:pPr algn="l">
+              <a:defRPr sz="2800" b="1">
+                <a:solidFill>
+                  <a:srgbClr val="FFFFFF"/>
+                </a:solidFill>
+              </a:defRPr>
+            </a:pPr>
+            <a:r>
               <a:t>Conclusion</a:t>
             </a:r>
           </a:p>
@@ -4562,7 +5465,7 @@
               </a:defRPr>
             </a:pPr>
             <a:r>
-              <a:t>Motivation</a:t>
+              <a:t>Motivation &amp; goal</a:t>
             </a:r>
           </a:p>
           <a:p>
@@ -4574,7 +5477,7 @@
               </a:defRPr>
             </a:pPr>
             <a:r>
-              <a:t>Precision industries need reliable grounded answers</a:t>
+              <a:t>Industry-relevant RAG for finance &amp; healthcare text</a:t>
             </a:r>
           </a:p>
         </p:txBody>
@@ -4587,8 +5490,8 @@
         </p:nvSpPr>
         <p:spPr>
           <a:xfrm>
-            <a:off x="594360" y="1280160"/>
-            <a:ext cx="3840480" cy="4572000"/>
+            <a:off x="594360" y="1207008"/>
+            <a:ext cx="4892040" cy="3063240"/>
           </a:xfrm>
           <a:prstGeom prst="rect">
             <a:avLst/>
@@ -4605,14 +5508,14 @@
               <a:spcAft>
                 <a:spcPts val="600"/>
               </a:spcAft>
-              <a:defRPr sz="1700">
+              <a:defRPr sz="1400">
                 <a:solidFill>
                   <a:srgbClr val="4A5568"/>
                 </a:solidFill>
               </a:defRPr>
             </a:pPr>
             <a:r>
-              <a:t>Goal: Compare RAG configurations on real finance + healthcare PDFs.</a:t>
+              <a:t>Professionals are adopting AI for productivity, but in finance and healthcare answers must be precise and auditable.</a:t>
             </a:r>
           </a:p>
           <a:p>
@@ -4620,14 +5523,14 @@
               <a:spcAft>
                 <a:spcPts val="600"/>
               </a:spcAft>
-              <a:defRPr sz="1700">
+              <a:defRPr sz="1400">
                 <a:solidFill>
                   <a:srgbClr val="4A5568"/>
                 </a:solidFill>
               </a:defRPr>
             </a:pPr>
             <a:r>
-              <a:t>Measure hallucination-related failure vs answer quality — same harness, varied designs.</a:t>
+              <a:t>Hallucinations are the main blocker to trust—especially when data is sensitive or regulated.</a:t>
             </a:r>
           </a:p>
           <a:p>
@@ -4635,14 +5538,29 @@
               <a:spcAft>
                 <a:spcPts val="600"/>
               </a:spcAft>
-              <a:defRPr sz="1700">
+              <a:defRPr sz="1400">
                 <a:solidFill>
                   <a:srgbClr val="4A5568"/>
                 </a:solidFill>
               </a:defRPr>
             </a:pPr>
             <a:r>
-              <a:t>Outcome: Actionable tradeoffs for teams deploying AI on sensitive text.</a:t>
+              <a:t>Goal of this project: empirically compare RAG system designs (retrieval, prompting, citations, chunking) and measure which configurations best reduce hallucination-style failures while preserving answer quality.</a:t>
+            </a:r>
+          </a:p>
+          <a:p>
+            <a:pPr>
+              <a:spcAft>
+                <a:spcPts val="600"/>
+              </a:spcAft>
+              <a:defRPr sz="1400">
+                <a:solidFill>
+                  <a:srgbClr val="4A5568"/>
+                </a:solidFill>
+              </a:defRPr>
+            </a:pPr>
+            <a:r>
+              <a:t>I also ask whether certain designs work better with different document types (e.g., SEC filings vs FDA labels) so teams can tune RAG with evidence—not guesswork.</a:t>
             </a:r>
           </a:p>
         </p:txBody>
@@ -4655,8 +5573,8 @@
         </p:nvSpPr>
         <p:spPr>
           <a:xfrm>
-            <a:off x="4663440" y="1783080"/>
-            <a:ext cx="3886200" cy="1828800"/>
+            <a:off x="5532120" y="1207008"/>
+            <a:ext cx="3063240" cy="3063240"/>
           </a:xfrm>
           <a:prstGeom prst="roundRect">
             <a:avLst/>
@@ -4685,27 +5603,93 @@
           </a:fontRef>
         </p:style>
         <p:txBody>
-          <a:bodyPr rtlCol="0" anchor="ctr"/>
+          <a:bodyPr rtlCol="0" anchor="ctr" wrap="square"/>
           <a:lstStyle/>
           <a:p>
             <a:pPr>
-              <a:defRPr b="1" sz="1400">
+              <a:defRPr b="1" sz="1300">
                 <a:solidFill>
                   <a:srgbClr val="C05621"/>
                 </a:solidFill>
               </a:defRPr>
             </a:pPr>
             <a:r>
-              <a:t>Industry signal</a:t>
-            </a:r>
-          </a:p>
-          <a:p>
-            <a:r>
-              <a:t>(EY)</a:t>
+              <a:t>Industry perspective (EY)</a:t>
             </a:r>
           </a:p>
           <a:p>
             <a:pPr>
+              <a:spcAft>
+                <a:spcPts val="400"/>
+              </a:spcAft>
+              <a:defRPr sz="1100">
+                <a:solidFill>
+                  <a:srgbClr val="4A5568"/>
+                </a:solidFill>
+              </a:defRPr>
+            </a:pPr>
+            <a:r>
+              <a:t>AI &amp; data technology consulting (EY): client concern about hallucinations and reliability on sensitive workloads.</a:t>
+            </a:r>
+          </a:p>
+          <a:p>
+            <a:pPr>
+              <a:spcAft>
+                <a:spcPts val="400"/>
+              </a:spcAft>
+              <a:defRPr sz="1100">
+                <a:solidFill>
+                  <a:srgbClr val="4A5568"/>
+                </a:solidFill>
+              </a:defRPr>
+            </a:pPr>
+            <a:r>
+              <a:t>Interviews with tech risk partners: among customer complaints, trust and hallucinations rank at the top—even when efficiency benefits are clear.</a:t>
+            </a:r>
+          </a:p>
+          <a:p>
+            <a:pPr>
+              <a:spcAft>
+                <a:spcPts val="400"/>
+              </a:spcAft>
+              <a:defRPr sz="1100">
+                <a:solidFill>
+                  <a:srgbClr val="4A5568"/>
+                </a:solidFill>
+              </a:defRPr>
+            </a:pPr>
+            <a:r>
+              <a:t>This work connects that practitioner concern to a reproducible evaluation harness.</a:t>
+            </a:r>
+          </a:p>
+        </p:txBody>
+      </p:sp>
+      <p:sp>
+        <p:nvSpPr>
+          <p:cNvPr id="5" name="TextBox 4"/>
+          <p:cNvSpPr txBox="1"/>
+          <p:nvPr/>
+        </p:nvSpPr>
+        <p:spPr>
+          <a:xfrm>
+            <a:off x="594360" y="4434840"/>
+            <a:ext cx="8001000" cy="2148840"/>
+          </a:xfrm>
+          <a:prstGeom prst="rect">
+            <a:avLst/>
+          </a:prstGeom>
+          <a:noFill/>
+        </p:spPr>
+        <p:txBody>
+          <a:bodyPr wrap="square">
+            <a:spAutoFit/>
+          </a:bodyPr>
+          <a:lstStyle/>
+          <a:p>
+            <a:pPr>
+              <a:spcAft>
+                <a:spcPts val="600"/>
+              </a:spcAft>
               <a:defRPr sz="1300">
                 <a:solidFill>
                   <a:srgbClr val="4A5568"/>
@@ -4713,7 +5697,7 @@
               </a:defRPr>
             </a:pPr>
             <a:r>
-              <a:t>Clients rank hallucinations #1 risk for AI on sensitive data — even when efficiency gains are clear.</a:t>
+              <a:t>Who benefits: any organization deploying RAG on dense technical prose—risk, compliance, clinical ops, IR, research analysts.</a:t>
             </a:r>
           </a:p>
         </p:txBody>
@@ -4791,7 +5775,7 @@
               </a:defRPr>
             </a:pPr>
             <a:r>
-              <a:t>Background</a:t>
+              <a:t>Background &amp; related work</a:t>
             </a:r>
           </a:p>
           <a:p>
@@ -4803,169 +5787,90 @@
               </a:defRPr>
             </a:pPr>
             <a:r>
-              <a:t>Hallucinations persist even with RAG</a:t>
-            </a:r>
-          </a:p>
-        </p:txBody>
-      </p:sp>
-      <p:sp>
-        <p:nvSpPr>
-          <p:cNvPr id="3" name="Rectangle 2"/>
-          <p:cNvSpPr/>
+              <a:t>Where NLP consensus stands</a:t>
+            </a:r>
+          </a:p>
+        </p:txBody>
+      </p:sp>
+      <p:sp>
+        <p:nvSpPr>
+          <p:cNvPr id="3" name="TextBox 2"/>
+          <p:cNvSpPr txBox="1"/>
           <p:nvPr/>
         </p:nvSpPr>
         <p:spPr>
           <a:xfrm>
-            <a:off x="640080" y="1325880"/>
-            <a:ext cx="7863840" cy="1325880"/>
+            <a:off x="594360" y="1188720"/>
+            <a:ext cx="8001000" cy="5212080"/>
           </a:xfrm>
           <a:prstGeom prst="rect">
             <a:avLst/>
           </a:prstGeom>
-          <a:solidFill>
-            <a:srgbClr val="EDF2F7"/>
-          </a:solidFill>
-          <a:ln>
-            <a:solidFill>
-              <a:srgbClr val="CBD5E0"/>
-            </a:solidFill>
-          </a:ln>
+          <a:noFill/>
         </p:spPr>
-        <p:style>
-          <a:lnRef idx="1">
-            <a:schemeClr val="accent1"/>
-          </a:lnRef>
-          <a:fillRef idx="3">
-            <a:schemeClr val="accent1"/>
-          </a:fillRef>
-          <a:effectRef idx="2">
-            <a:schemeClr val="accent1"/>
-          </a:effectRef>
-          <a:fontRef idx="minor">
-            <a:schemeClr val="lt1"/>
-          </a:fontRef>
-        </p:style>
-        <p:txBody>
-          <a:bodyPr rtlCol="0" anchor="ctr"/>
+        <p:txBody>
+          <a:bodyPr wrap="square">
+            <a:spAutoFit/>
+          </a:bodyPr>
           <a:lstStyle/>
           <a:p>
             <a:pPr>
-              <a:defRPr sz="1500" b="1">
-                <a:solidFill>
-                  <a:srgbClr val="1E3A5F"/>
+              <a:spcAft>
+                <a:spcPts val="600"/>
+              </a:spcAft>
+              <a:defRPr sz="1400">
+                <a:solidFill>
+                  <a:srgbClr val="4A5568"/>
                 </a:solidFill>
               </a:defRPr>
             </a:pPr>
             <a:r>
-              <a:t>Consensus: RAG grounds answers but does not remove unsupported generations.</a:t>
-            </a:r>
-          </a:p>
-        </p:txBody>
-      </p:sp>
-      <p:sp>
-        <p:nvSpPr>
-          <p:cNvPr id="4" name="Rectangle 3"/>
-          <p:cNvSpPr/>
-          <p:nvPr/>
-        </p:nvSpPr>
-        <p:spPr>
-          <a:xfrm>
-            <a:off x="640080" y="2926080"/>
-            <a:ext cx="7863840" cy="1325880"/>
-          </a:xfrm>
-          <a:prstGeom prst="rect">
-            <a:avLst/>
-          </a:prstGeom>
-          <a:solidFill>
-            <a:srgbClr val="EDF2F7"/>
-          </a:solidFill>
-          <a:ln>
-            <a:solidFill>
-              <a:srgbClr val="CBD5E0"/>
-            </a:solidFill>
-          </a:ln>
-        </p:spPr>
-        <p:style>
-          <a:lnRef idx="1">
-            <a:schemeClr val="accent1"/>
-          </a:lnRef>
-          <a:fillRef idx="3">
-            <a:schemeClr val="accent1"/>
-          </a:fillRef>
-          <a:effectRef idx="2">
-            <a:schemeClr val="accent1"/>
-          </a:effectRef>
-          <a:fontRef idx="minor">
-            <a:schemeClr val="lt1"/>
-          </a:fontRef>
-        </p:style>
-        <p:txBody>
-          <a:bodyPr rtlCol="0" anchor="ctr"/>
-          <a:lstStyle/>
+              <a:t>Consensus: LLMs can sound authoritative while stating content not supported by evidence. Retrieval-Augmented Generation (RAG) grounds answers in retrieved passages and usually reduces—but does not remove—unsupported or conflicting outputs.</a:t>
+            </a:r>
+          </a:p>
           <a:p>
             <a:pPr>
-              <a:defRPr sz="1500" b="1">
-                <a:solidFill>
-                  <a:srgbClr val="1E3A5F"/>
+              <a:spcAft>
+                <a:spcPts val="600"/>
+              </a:spcAft>
+              <a:defRPr sz="1400">
+                <a:solidFill>
+                  <a:srgbClr val="4A5568"/>
                 </a:solidFill>
               </a:defRPr>
             </a:pPr>
             <a:r>
-              <a:t>Literature: Surveys cover taxonomy, detection (faithfulness judges), mitigation.</a:t>
-            </a:r>
-          </a:p>
-        </p:txBody>
-      </p:sp>
-      <p:sp>
-        <p:nvSpPr>
-          <p:cNvPr id="5" name="Rectangle 4"/>
-          <p:cNvSpPr/>
-          <p:nvPr/>
-        </p:nvSpPr>
-        <p:spPr>
-          <a:xfrm>
-            <a:off x="640080" y="4526280"/>
-            <a:ext cx="7863840" cy="1325880"/>
-          </a:xfrm>
-          <a:prstGeom prst="rect">
-            <a:avLst/>
-          </a:prstGeom>
-          <a:solidFill>
-            <a:srgbClr val="EDF2F7"/>
-          </a:solidFill>
-          <a:ln>
-            <a:solidFill>
-              <a:srgbClr val="CBD5E0"/>
-            </a:solidFill>
-          </a:ln>
-        </p:spPr>
-        <p:style>
-          <a:lnRef idx="1">
-            <a:schemeClr val="accent1"/>
-          </a:lnRef>
-          <a:fillRef idx="3">
-            <a:schemeClr val="accent1"/>
-          </a:fillRef>
-          <a:effectRef idx="2">
-            <a:schemeClr val="accent1"/>
-          </a:effectRef>
-          <a:fontRef idx="minor">
-            <a:schemeClr val="lt1"/>
-          </a:fontRef>
-        </p:style>
-        <p:txBody>
-          <a:bodyPr rtlCol="0" anchor="ctr"/>
-          <a:lstStyle/>
+              <a:t>Research surveys (e.g., recent arXiv surveys on LLM hallucinations; RAG mitigation reviews) organize causes: bad retrieval, context overload, parametric knowledge overriding evidence, and evaluation gaps.</a:t>
+            </a:r>
+          </a:p>
           <a:p>
             <a:pPr>
-              <a:defRPr sz="1500" b="1">
-                <a:solidFill>
-                  <a:srgbClr val="1E3A5F"/>
+              <a:spcAft>
+                <a:spcPts val="600"/>
+              </a:spcAft>
+              <a:defRPr sz="1400">
+                <a:solidFill>
+                  <a:srgbClr val="4A5568"/>
                 </a:solidFill>
               </a:defRPr>
             </a:pPr>
             <a:r>
-              <a:t>Gap: Less empirical guidance on which RAG knobs work for which document genres.</a:t>
+              <a:t>Industry products: many vendors offer RAG stacks, guardrails, and observability—yet defaults are often tuned for generic chat, not long regulatory PDFs or filings.</a:t>
+            </a:r>
+          </a:p>
+          <a:p>
+            <a:pPr>
+              <a:spcAft>
+                <a:spcPts val="600"/>
+              </a:spcAft>
+              <a:defRPr sz="1400">
+                <a:solidFill>
+                  <a:srgbClr val="4A5568"/>
+                </a:solidFill>
+              </a:defRPr>
+            </a:pPr>
+            <a:r>
+              <a:t>Gap this project fills: controlled comparison of concrete RAG knobs on real finance vs healthcare-style documents, with multi-metric evaluation (grounding judges + automated scores)—not only a single accuracy number.</a:t>
             </a:r>
           </a:p>
         </p:txBody>
@@ -5055,7 +5960,7 @@
               </a:defRPr>
             </a:pPr>
             <a:r>
-              <a:t>End-to-end evaluation pipeline</a:t>
+              <a:t>Pipeline, experiments, and evaluation stack</a:t>
             </a:r>
           </a:p>
         </p:txBody>
@@ -5570,8 +6475,8 @@
         </p:nvSpPr>
         <p:spPr>
           <a:xfrm>
-            <a:off x="594360" y="4617720"/>
-            <a:ext cx="7955279" cy="1737360"/>
+            <a:off x="548640" y="4526280"/>
+            <a:ext cx="8092440" cy="2148840"/>
           </a:xfrm>
           <a:prstGeom prst="rect">
             <a:avLst/>
@@ -5588,14 +6493,14 @@
               <a:spcAft>
                 <a:spcPts val="600"/>
               </a:spcAft>
-              <a:defRPr sz="1400">
+              <a:defRPr sz="1200">
                 <a:solidFill>
                   <a:srgbClr val="4A5568"/>
                 </a:solidFill>
               </a:defRPr>
             </a:pPr>
             <a:r>
-              <a:t>Tools: LlamaParse, LangChain chunking, Chroma, BGE reranker, OpenAI GPT-4o.</a:t>
+              <a:t>Ingestion: LlamaParse converts PDFs to Markdown; LangChain splits on headings + fixed window size (preset-specific for chunk ablations).</a:t>
             </a:r>
           </a:p>
           <a:p>
@@ -5603,14 +6508,44 @@
               <a:spcAft>
                 <a:spcPts val="600"/>
               </a:spcAft>
-              <a:defRPr sz="1400">
+              <a:defRPr sz="1200">
                 <a:solidFill>
                   <a:srgbClr val="4A5568"/>
                 </a:solidFill>
               </a:defRPr>
             </a:pPr>
             <a:r>
-              <a:t>Metrics: recall &amp; citations, LLM judge (context/claims), RAGAS scores.</a:t>
+              <a:t>Retrieval: vector store (Chroma) + BM25 + cross-encoder rerank (BGE). Generation: GPT-4o with mandatory chunk-ID citations; optional strict post-process (replace answer with “Insufficient Information.” if cites are invalid or missing).</a:t>
+            </a:r>
+          </a:p>
+          <a:p>
+            <a:pPr>
+              <a:spcAft>
+                <a:spcPts val="600"/>
+              </a:spcAft>
+              <a:defRPr sz="1200">
+                <a:solidFill>
+                  <a:srgbClr val="4A5568"/>
+                </a:solidFill>
+              </a:defRPr>
+            </a:pPr>
+            <a:r>
+              <a:t>Gold questions: synthetic Q/A from sampled chunks + critique filter. Experiments: baseline (k=5), k∈{3,8,10}, chain-of-thought prompt, strict-cite, k8+CoT; Tier B varies chunking presets with regenerated gold.</a:t>
+            </a:r>
+          </a:p>
+          <a:p>
+            <a:pPr>
+              <a:spcAft>
+                <a:spcPts val="600"/>
+              </a:spcAft>
+              <a:defRPr sz="1200">
+                <a:solidFill>
+                  <a:srgbClr val="4A5568"/>
+                </a:solidFill>
+              </a:defRPr>
+            </a:pPr>
+            <a:r>
+              <a:t>Evaluation: n=10 questions per run in this study; rule metrics (recall@k, citation checks), dedicated LLM judge for context-grounded hallucinations &amp; claim rates, RAGAS (faithfulness, relevancy, correctness).</a:t>
             </a:r>
           </a:p>
         </p:txBody>
@@ -5688,6 +6623,179 @@
               </a:defRPr>
             </a:pPr>
             <a:r>
+              <a:t>Results — what you are about to see</a:t>
+            </a:r>
+          </a:p>
+          <a:p>
+            <a:pPr>
+              <a:defRPr sz="1400">
+                <a:solidFill>
+                  <a:srgbClr val="E2E8F0"/>
+                </a:solidFill>
+              </a:defRPr>
+            </a:pPr>
+            <a:r>
+              <a:t>How experiments &amp; tiers are defined</a:t>
+            </a:r>
+          </a:p>
+        </p:txBody>
+      </p:sp>
+      <p:sp>
+        <p:nvSpPr>
+          <p:cNvPr id="3" name="TextBox 2"/>
+          <p:cNvSpPr txBox="1"/>
+          <p:nvPr/>
+        </p:nvSpPr>
+        <p:spPr>
+          <a:xfrm>
+            <a:off x="594360" y="1170432"/>
+            <a:ext cx="8001000" cy="5257800"/>
+          </a:xfrm>
+          <a:prstGeom prst="rect">
+            <a:avLst/>
+          </a:prstGeom>
+          <a:noFill/>
+        </p:spPr>
+        <p:txBody>
+          <a:bodyPr wrap="square">
+            <a:spAutoFit/>
+          </a:bodyPr>
+          <a:lstStyle/>
+          <a:p>
+            <a:pPr>
+              <a:spcAft>
+                <a:spcPts val="600"/>
+              </a:spcAft>
+              <a:defRPr sz="1400">
+                <a:solidFill>
+                  <a:srgbClr val="4A5568"/>
+                </a:solidFill>
+              </a:defRPr>
+            </a:pPr>
+            <a:r>
+              <a:t>Data: four public PDFs — two SEC-style 10-Ks and two FDA drug labels — same code path, different corpora.</a:t>
+            </a:r>
+          </a:p>
+          <a:p>
+            <a:pPr>
+              <a:spcAft>
+                <a:spcPts val="600"/>
+              </a:spcAft>
+              <a:defRPr sz="1400">
+                <a:solidFill>
+                  <a:srgbClr val="4A5568"/>
+                </a:solidFill>
+              </a:defRPr>
+            </a:pPr>
+            <a:r>
+              <a:t>Tier A (same chunking &amp; gold): fair comparison of presets against baseline—same 10 evaluation questions and gold chunk IDs. Includes baseline, top-k variants, CoT, strict citations, k8+CoT.</a:t>
+            </a:r>
+          </a:p>
+          <a:p>
+            <a:pPr>
+              <a:spcAft>
+                <a:spcPts val="600"/>
+              </a:spcAft>
+              <a:defRPr sz="1400">
+                <a:solidFill>
+                  <a:srgbClr val="4A5568"/>
+                </a:solidFill>
+              </a:defRPr>
+            </a:pPr>
+            <a:r>
+              <a:t>Tier B (chunking ablations): fine / coarse / deep-header presets each rebuild the corpus and regenerate gold — not the same questions as Tier A. Interpret Tier B as “alternative chunking strategies,” not as Δ vs Tier A baseline.</a:t>
+            </a:r>
+          </a:p>
+          <a:p>
+            <a:pPr>
+              <a:spcAft>
+                <a:spcPts val="600"/>
+              </a:spcAft>
+              <a:defRPr sz="1400">
+                <a:solidFill>
+                  <a:srgbClr val="4A5568"/>
+                </a:solidFill>
+              </a:defRPr>
+            </a:pPr>
+            <a:r>
+              <a:t>Charts: cross-corpus bars show mean change vs baseline averaged over all four documents. Tables pool metrics by genre (finance vs FDA labels). Colors: blue series = Δ context-hallucination flag; red = Δ answer correctness (negative values stay colored).</a:t>
+            </a:r>
+          </a:p>
+        </p:txBody>
+      </p:sp>
+    </p:spTree>
+  </p:cSld>
+  <p:clrMapOvr>
+    <a:masterClrMapping/>
+  </p:clrMapOvr>
+</p:sld>
+</file>
+
+<file path=ppt/slides/slide7.xml><?xml version="1.0" encoding="utf-8"?>
+<p:sld xmlns:a="http://schemas.openxmlformats.org/drawingml/2006/main" xmlns:p="http://schemas.openxmlformats.org/presentationml/2006/main" xmlns:r="http://schemas.openxmlformats.org/officeDocument/2006/relationships">
+  <p:cSld>
+    <p:bg>
+      <p:bgPr>
+        <a:solidFill>
+          <a:srgbClr val="F8FAFC"/>
+        </a:solidFill>
+        <a:effectLst/>
+      </p:bgPr>
+    </p:bg>
+    <p:spTree>
+      <p:nvGrpSpPr>
+        <p:cNvPr id="1" name=""/>
+        <p:cNvGrpSpPr/>
+        <p:nvPr/>
+      </p:nvGrpSpPr>
+      <p:grpSpPr/>
+      <p:sp>
+        <p:nvSpPr>
+          <p:cNvPr id="2" name="Rectangle 1"/>
+          <p:cNvSpPr/>
+          <p:nvPr/>
+        </p:nvSpPr>
+        <p:spPr>
+          <a:xfrm>
+            <a:off x="0" y="0"/>
+            <a:ext cx="9144000" cy="1051560"/>
+          </a:xfrm>
+          <a:prstGeom prst="rect">
+            <a:avLst/>
+          </a:prstGeom>
+          <a:solidFill>
+            <a:srgbClr val="1E3A5F"/>
+          </a:solidFill>
+          <a:ln>
+            <a:noFill/>
+          </a:ln>
+        </p:spPr>
+        <p:style>
+          <a:lnRef idx="1">
+            <a:schemeClr val="accent1"/>
+          </a:lnRef>
+          <a:fillRef idx="3">
+            <a:schemeClr val="accent1"/>
+          </a:fillRef>
+          <a:effectRef idx="2">
+            <a:schemeClr val="accent1"/>
+          </a:effectRef>
+          <a:fontRef idx="minor">
+            <a:schemeClr val="lt1"/>
+          </a:fontRef>
+        </p:style>
+        <p:txBody>
+          <a:bodyPr rtlCol="0" anchor="ctr" lIns="457200" tIns="228600" wrap="square"/>
+          <a:lstStyle/>
+          <a:p>
+            <a:pPr algn="l">
+              <a:defRPr sz="2800" b="1">
+                <a:solidFill>
+                  <a:srgbClr val="FFFFFF"/>
+                </a:solidFill>
+              </a:defRPr>
+            </a:pPr>
+            <a:r>
               <a:t>Tier A — Cross-corpus change vs baseline</a:t>
             </a:r>
           </a:p>
@@ -5731,8 +6839,8 @@
         </p:nvSpPr>
         <p:spPr>
           <a:xfrm>
-            <a:off x="502920" y="5806440"/>
-            <a:ext cx="8321040" cy="777240"/>
+            <a:off x="502920" y="5779008"/>
+            <a:ext cx="8321040" cy="960120"/>
           </a:xfrm>
           <a:prstGeom prst="rect">
             <a:avLst/>
@@ -5749,14 +6857,14 @@
               <a:spcAft>
                 <a:spcPts val="600"/>
               </a:spcAft>
-              <a:defRPr sz="1100">
+              <a:defRPr sz="1000">
                 <a:solidFill>
                   <a:srgbClr val="4A5568"/>
                 </a:solidFill>
               </a:defRPr>
             </a:pPr>
             <a:r>
-              <a:t>Left bars: lower context-hallucination flag is better. Right bars: higher answer correctness is better.</a:t>
+              <a:t>Blue columns = Δ context-hallucination flag (lower is better). Red = Δ answer correctness (higher is better). Colors stay blue/red even when Δ is negative.</a:t>
             </a:r>
           </a:p>
           <a:p>
@@ -5764,14 +6872,14 @@
               <a:spcAft>
                 <a:spcPts val="600"/>
               </a:spcAft>
-              <a:defRPr sz="1100">
+              <a:defRPr sz="1000">
                 <a:solidFill>
                   <a:srgbClr val="4A5568"/>
                 </a:solidFill>
               </a:defRPr>
             </a:pPr>
             <a:r>
-              <a:t>k3 best avg drop in hallucination flag; k8+CoT best avg gain in correctness but raises hallucination flag on average.</a:t>
+              <a:t>Pattern: k3 shows the largest average reduction in the hallucination flag vs baseline; k8+CoT shows the largest average gain in correctness but also increases the hallucination flag on average—a tradeoff.</a:t>
             </a:r>
           </a:p>
         </p:txBody>
@@ -5784,7 +6892,7 @@
 </p:sld>
 </file>
 
-<file path=ppt/slides/slide7.xml><?xml version="1.0" encoding="utf-8"?>
+<file path=ppt/slides/slide8.xml><?xml version="1.0" encoding="utf-8"?>
 <p:sld xmlns:a="http://schemas.openxmlformats.org/drawingml/2006/main" xmlns:p="http://schemas.openxmlformats.org/presentationml/2006/main" xmlns:r="http://schemas.openxmlformats.org/officeDocument/2006/relationships">
   <p:cSld>
     <p:bg>
@@ -6640,7 +7748,7 @@
 </p:sld>
 </file>
 
-<file path=ppt/slides/slide8.xml><?xml version="1.0" encoding="utf-8"?>
+<file path=ppt/slides/slide9.xml><?xml version="1.0" encoding="utf-8"?>
 <p:sld xmlns:a="http://schemas.openxmlformats.org/drawingml/2006/main" xmlns:p="http://schemas.openxmlformats.org/presentationml/2006/main" xmlns:r="http://schemas.openxmlformats.org/officeDocument/2006/relationships">
   <p:cSld>
     <p:bg>
@@ -6774,757 +7882,6 @@
             </a:pPr>
             <a:r>
               <a:t>Context halluc. = fraction of questions with flagged unsupported content (judge). Lower is better.</a:t>
-            </a:r>
-          </a:p>
-        </p:txBody>
-      </p:sp>
-    </p:spTree>
-  </p:cSld>
-  <p:clrMapOvr>
-    <a:masterClrMapping/>
-  </p:clrMapOvr>
-</p:sld>
-</file>
-
-<file path=ppt/slides/slide9.xml><?xml version="1.0" encoding="utf-8"?>
-<p:sld xmlns:a="http://schemas.openxmlformats.org/drawingml/2006/main" xmlns:p="http://schemas.openxmlformats.org/presentationml/2006/main" xmlns:r="http://schemas.openxmlformats.org/officeDocument/2006/relationships">
-  <p:cSld>
-    <p:bg>
-      <p:bgPr>
-        <a:solidFill>
-          <a:srgbClr val="F8FAFC"/>
-        </a:solidFill>
-        <a:effectLst/>
-      </p:bgPr>
-    </p:bg>
-    <p:spTree>
-      <p:nvGrpSpPr>
-        <p:cNvPr id="1" name=""/>
-        <p:cNvGrpSpPr/>
-        <p:nvPr/>
-      </p:nvGrpSpPr>
-      <p:grpSpPr/>
-      <p:sp>
-        <p:nvSpPr>
-          <p:cNvPr id="2" name="Rectangle 1"/>
-          <p:cNvSpPr/>
-          <p:nvPr/>
-        </p:nvSpPr>
-        <p:spPr>
-          <a:xfrm>
-            <a:off x="0" y="0"/>
-            <a:ext cx="9144000" cy="1051560"/>
-          </a:xfrm>
-          <a:prstGeom prst="rect">
-            <a:avLst/>
-          </a:prstGeom>
-          <a:solidFill>
-            <a:srgbClr val="1E3A5F"/>
-          </a:solidFill>
-          <a:ln>
-            <a:noFill/>
-          </a:ln>
-        </p:spPr>
-        <p:style>
-          <a:lnRef idx="1">
-            <a:schemeClr val="accent1"/>
-          </a:lnRef>
-          <a:fillRef idx="3">
-            <a:schemeClr val="accent1"/>
-          </a:fillRef>
-          <a:effectRef idx="2">
-            <a:schemeClr val="accent1"/>
-          </a:effectRef>
-          <a:fontRef idx="minor">
-            <a:schemeClr val="lt1"/>
-          </a:fontRef>
-        </p:style>
-        <p:txBody>
-          <a:bodyPr rtlCol="0" anchor="ctr" lIns="457200" tIns="228600" wrap="square"/>
-          <a:lstStyle/>
-          <a:p>
-            <a:pPr algn="l">
-              <a:defRPr sz="2800" b="1">
-                <a:solidFill>
-                  <a:srgbClr val="FFFFFF"/>
-                </a:solidFill>
-              </a:defRPr>
-            </a:pPr>
-            <a:r>
-              <a:t>Tier B — Chunking presets (separate gold)</a:t>
-            </a:r>
-          </a:p>
-          <a:p>
-            <a:pPr>
-              <a:defRPr sz="1400">
-                <a:solidFill>
-                  <a:srgbClr val="E2E8F0"/>
-                </a:solidFill>
-              </a:defRPr>
-            </a:pPr>
-            <a:r>
-              <a:t>Compare within this tier only</a:t>
-            </a:r>
-          </a:p>
-        </p:txBody>
-      </p:sp>
-      <p:graphicFrame>
-        <p:nvGraphicFramePr>
-          <p:cNvPr id="3" name="Table 2"/>
-          <p:cNvGraphicFramePr>
-            <a:graphicFrameLocks noGrp="1"/>
-          </p:cNvGraphicFramePr>
-          <p:nvPr/>
-        </p:nvGraphicFramePr>
-        <p:xfrm>
-          <a:off x="502920" y="1207008"/>
-          <a:ext cx="8321040" cy="2432304"/>
-        </p:xfrm>
-        <a:graphic>
-          <a:graphicData uri="http://schemas.openxmlformats.org/drawingml/2006/table">
-            <a:tbl>
-              <a:tblPr firstRow="1" bandRow="1">
-                <a:tableStyleId>{5C22544A-7EE6-4342-B048-85BDC9FD1C3A}</a:tableStyleId>
-              </a:tblPr>
-              <a:tblGrid>
-                <a:gridCol w="1664208"/>
-                <a:gridCol w="1664208"/>
-                <a:gridCol w="1664208"/>
-                <a:gridCol w="1664208"/>
-                <a:gridCol w="1664208"/>
-              </a:tblGrid>
-              <a:tr h="347472">
-                <a:tc>
-                  <a:txBody>
-                    <a:bodyPr/>
-                    <a:lstStyle/>
-                    <a:p>
-                      <a:pPr>
-                        <a:defRPr sz="1000" b="1">
-                          <a:solidFill>
-                            <a:srgbClr val="FFFFFF"/>
-                          </a:solidFill>
-                        </a:defRPr>
-                      </a:pPr>
-                      <a:r>
-                        <a:t>genre</a:t>
-                      </a:r>
-                    </a:p>
-                  </a:txBody>
-                  <a:tcPr>
-                    <a:solidFill>
-                      <a:srgbClr val="2B7CA8"/>
-                    </a:solidFill>
-                  </a:tcPr>
-                </a:tc>
-                <a:tc>
-                  <a:txBody>
-                    <a:bodyPr/>
-                    <a:lstStyle/>
-                    <a:p>
-                      <a:pPr>
-                        <a:defRPr sz="1000" b="1">
-                          <a:solidFill>
-                            <a:srgbClr val="FFFFFF"/>
-                          </a:solidFill>
-                        </a:defRPr>
-                      </a:pPr>
-                      <a:r>
-                        <a:t>experiment</a:t>
-                      </a:r>
-                    </a:p>
-                  </a:txBody>
-                  <a:tcPr>
-                    <a:solidFill>
-                      <a:srgbClr val="2B7CA8"/>
-                    </a:solidFill>
-                  </a:tcPr>
-                </a:tc>
-                <a:tc>
-                  <a:txBody>
-                    <a:bodyPr/>
-                    <a:lstStyle/>
-                    <a:p>
-                      <a:pPr>
-                        <a:defRPr sz="1000" b="1">
-                          <a:solidFill>
-                            <a:srgbClr val="FFFFFF"/>
-                          </a:solidFill>
-                        </a:defRPr>
-                      </a:pPr>
-                      <a:r>
-                        <a:t>context hallucination</a:t>
-                      </a:r>
-                    </a:p>
-                  </a:txBody>
-                  <a:tcPr>
-                    <a:solidFill>
-                      <a:srgbClr val="2B7CA8"/>
-                    </a:solidFill>
-                  </a:tcPr>
-                </a:tc>
-                <a:tc>
-                  <a:txBody>
-                    <a:bodyPr/>
-                    <a:lstStyle/>
-                    <a:p>
-                      <a:pPr>
-                        <a:defRPr sz="1000" b="1">
-                          <a:solidFill>
-                            <a:srgbClr val="FFFFFF"/>
-                          </a:solidFill>
-                        </a:defRPr>
-                      </a:pPr>
-                      <a:r>
-                        <a:t>answer correctness</a:t>
-                      </a:r>
-                    </a:p>
-                  </a:txBody>
-                  <a:tcPr>
-                    <a:solidFill>
-                      <a:srgbClr val="2B7CA8"/>
-                    </a:solidFill>
-                  </a:tcPr>
-                </a:tc>
-                <a:tc>
-                  <a:txBody>
-                    <a:bodyPr/>
-                    <a:lstStyle/>
-                    <a:p>
-                      <a:pPr>
-                        <a:defRPr sz="1000" b="1">
-                          <a:solidFill>
-                            <a:srgbClr val="FFFFFF"/>
-                          </a:solidFill>
-                        </a:defRPr>
-                      </a:pPr>
-                      <a:r>
-                        <a:t>faithfulness</a:t>
-                      </a:r>
-                    </a:p>
-                  </a:txBody>
-                  <a:tcPr>
-                    <a:solidFill>
-                      <a:srgbClr val="2B7CA8"/>
-                    </a:solidFill>
-                  </a:tcPr>
-                </a:tc>
-              </a:tr>
-              <a:tr h="347472">
-                <a:tc>
-                  <a:txBody>
-                    <a:bodyPr/>
-                    <a:lstStyle/>
-                    <a:p>
-                      <a:pPr>
-                        <a:defRPr sz="1000"/>
-                      </a:pPr>
-                      <a:r>
-                        <a:t>fda_label</a:t>
-                      </a:r>
-                    </a:p>
-                  </a:txBody>
-                  <a:tcPr/>
-                </a:tc>
-                <a:tc>
-                  <a:txBody>
-                    <a:bodyPr/>
-                    <a:lstStyle/>
-                    <a:p>
-                      <a:pPr>
-                        <a:defRPr sz="1000"/>
-                      </a:pPr>
-                      <a:r>
-                        <a:t>coarse_chunks</a:t>
-                      </a:r>
-                    </a:p>
-                  </a:txBody>
-                  <a:tcPr/>
-                </a:tc>
-                <a:tc>
-                  <a:txBody>
-                    <a:bodyPr/>
-                    <a:lstStyle/>
-                    <a:p>
-                      <a:pPr>
-                        <a:defRPr sz="1000"/>
-                      </a:pPr>
-                      <a:r>
-                        <a:t>0.100</a:t>
-                      </a:r>
-                    </a:p>
-                  </a:txBody>
-                  <a:tcPr/>
-                </a:tc>
-                <a:tc>
-                  <a:txBody>
-                    <a:bodyPr/>
-                    <a:lstStyle/>
-                    <a:p>
-                      <a:pPr>
-                        <a:defRPr sz="1000"/>
-                      </a:pPr>
-                      <a:r>
-                        <a:t>0.740</a:t>
-                      </a:r>
-                    </a:p>
-                  </a:txBody>
-                  <a:tcPr/>
-                </a:tc>
-                <a:tc>
-                  <a:txBody>
-                    <a:bodyPr/>
-                    <a:lstStyle/>
-                    <a:p>
-                      <a:pPr>
-                        <a:defRPr sz="1000"/>
-                      </a:pPr>
-                      <a:r>
-                        <a:t>0.805</a:t>
-                      </a:r>
-                    </a:p>
-                  </a:txBody>
-                  <a:tcPr/>
-                </a:tc>
-              </a:tr>
-              <a:tr h="347472">
-                <a:tc>
-                  <a:txBody>
-                    <a:bodyPr/>
-                    <a:lstStyle/>
-                    <a:p>
-                      <a:pPr>
-                        <a:defRPr sz="1000"/>
-                      </a:pPr>
-                      <a:r>
-                        <a:t>fda_label</a:t>
-                      </a:r>
-                    </a:p>
-                  </a:txBody>
-                  <a:tcPr/>
-                </a:tc>
-                <a:tc>
-                  <a:txBody>
-                    <a:bodyPr/>
-                    <a:lstStyle/>
-                    <a:p>
-                      <a:pPr>
-                        <a:defRPr sz="1000"/>
-                      </a:pPr>
-                      <a:r>
-                        <a:t>deep_headers_fine</a:t>
-                      </a:r>
-                    </a:p>
-                  </a:txBody>
-                  <a:tcPr/>
-                </a:tc>
-                <a:tc>
-                  <a:txBody>
-                    <a:bodyPr/>
-                    <a:lstStyle/>
-                    <a:p>
-                      <a:pPr>
-                        <a:defRPr sz="1000"/>
-                      </a:pPr>
-                      <a:r>
-                        <a:t>0.100</a:t>
-                      </a:r>
-                    </a:p>
-                  </a:txBody>
-                  <a:tcPr/>
-                </a:tc>
-                <a:tc>
-                  <a:txBody>
-                    <a:bodyPr/>
-                    <a:lstStyle/>
-                    <a:p>
-                      <a:pPr>
-                        <a:defRPr sz="1000"/>
-                      </a:pPr>
-                      <a:r>
-                        <a:t>0.566</a:t>
-                      </a:r>
-                    </a:p>
-                  </a:txBody>
-                  <a:tcPr/>
-                </a:tc>
-                <a:tc>
-                  <a:txBody>
-                    <a:bodyPr/>
-                    <a:lstStyle/>
-                    <a:p>
-                      <a:pPr>
-                        <a:defRPr sz="1000"/>
-                      </a:pPr>
-                      <a:r>
-                        <a:t>0.800</a:t>
-                      </a:r>
-                    </a:p>
-                  </a:txBody>
-                  <a:tcPr/>
-                </a:tc>
-              </a:tr>
-              <a:tr h="347472">
-                <a:tc>
-                  <a:txBody>
-                    <a:bodyPr/>
-                    <a:lstStyle/>
-                    <a:p>
-                      <a:pPr>
-                        <a:defRPr sz="1000"/>
-                      </a:pPr>
-                      <a:r>
-                        <a:t>fda_label</a:t>
-                      </a:r>
-                    </a:p>
-                  </a:txBody>
-                  <a:tcPr/>
-                </a:tc>
-                <a:tc>
-                  <a:txBody>
-                    <a:bodyPr/>
-                    <a:lstStyle/>
-                    <a:p>
-                      <a:pPr>
-                        <a:defRPr sz="1000"/>
-                      </a:pPr>
-                      <a:r>
-                        <a:t>fine_chunks</a:t>
-                      </a:r>
-                    </a:p>
-                  </a:txBody>
-                  <a:tcPr/>
-                </a:tc>
-                <a:tc>
-                  <a:txBody>
-                    <a:bodyPr/>
-                    <a:lstStyle/>
-                    <a:p>
-                      <a:pPr>
-                        <a:defRPr sz="1000"/>
-                      </a:pPr>
-                      <a:r>
-                        <a:t>0.000</a:t>
-                      </a:r>
-                    </a:p>
-                  </a:txBody>
-                  <a:tcPr/>
-                </a:tc>
-                <a:tc>
-                  <a:txBody>
-                    <a:bodyPr/>
-                    <a:lstStyle/>
-                    <a:p>
-                      <a:pPr>
-                        <a:defRPr sz="1000"/>
-                      </a:pPr>
-                      <a:r>
-                        <a:t>0.551</a:t>
-                      </a:r>
-                    </a:p>
-                  </a:txBody>
-                  <a:tcPr/>
-                </a:tc>
-                <a:tc>
-                  <a:txBody>
-                    <a:bodyPr/>
-                    <a:lstStyle/>
-                    <a:p>
-                      <a:pPr>
-                        <a:defRPr sz="1000"/>
-                      </a:pPr>
-                      <a:r>
-                        <a:t>0.738</a:t>
-                      </a:r>
-                    </a:p>
-                  </a:txBody>
-                  <a:tcPr/>
-                </a:tc>
-              </a:tr>
-              <a:tr h="347472">
-                <a:tc>
-                  <a:txBody>
-                    <a:bodyPr/>
-                    <a:lstStyle/>
-                    <a:p>
-                      <a:pPr>
-                        <a:defRPr sz="1000"/>
-                      </a:pPr>
-                      <a:r>
-                        <a:t>finance_10k</a:t>
-                      </a:r>
-                    </a:p>
-                  </a:txBody>
-                  <a:tcPr/>
-                </a:tc>
-                <a:tc>
-                  <a:txBody>
-                    <a:bodyPr/>
-                    <a:lstStyle/>
-                    <a:p>
-                      <a:pPr>
-                        <a:defRPr sz="1000"/>
-                      </a:pPr>
-                      <a:r>
-                        <a:t>coarse_chunks</a:t>
-                      </a:r>
-                    </a:p>
-                  </a:txBody>
-                  <a:tcPr/>
-                </a:tc>
-                <a:tc>
-                  <a:txBody>
-                    <a:bodyPr/>
-                    <a:lstStyle/>
-                    <a:p>
-                      <a:pPr>
-                        <a:defRPr sz="1000"/>
-                      </a:pPr>
-                      <a:r>
-                        <a:t>0.250</a:t>
-                      </a:r>
-                    </a:p>
-                  </a:txBody>
-                  <a:tcPr/>
-                </a:tc>
-                <a:tc>
-                  <a:txBody>
-                    <a:bodyPr/>
-                    <a:lstStyle/>
-                    <a:p>
-                      <a:pPr>
-                        <a:defRPr sz="1000"/>
-                      </a:pPr>
-                      <a:r>
-                        <a:t>0.809</a:t>
-                      </a:r>
-                    </a:p>
-                  </a:txBody>
-                  <a:tcPr/>
-                </a:tc>
-                <a:tc>
-                  <a:txBody>
-                    <a:bodyPr/>
-                    <a:lstStyle/>
-                    <a:p>
-                      <a:pPr>
-                        <a:defRPr sz="1000"/>
-                      </a:pPr>
-                      <a:r>
-                        <a:t>0.841</a:t>
-                      </a:r>
-                    </a:p>
-                  </a:txBody>
-                  <a:tcPr/>
-                </a:tc>
-              </a:tr>
-              <a:tr h="347472">
-                <a:tc>
-                  <a:txBody>
-                    <a:bodyPr/>
-                    <a:lstStyle/>
-                    <a:p>
-                      <a:pPr>
-                        <a:defRPr sz="1000"/>
-                      </a:pPr>
-                      <a:r>
-                        <a:t>finance_10k</a:t>
-                      </a:r>
-                    </a:p>
-                  </a:txBody>
-                  <a:tcPr/>
-                </a:tc>
-                <a:tc>
-                  <a:txBody>
-                    <a:bodyPr/>
-                    <a:lstStyle/>
-                    <a:p>
-                      <a:pPr>
-                        <a:defRPr sz="1000"/>
-                      </a:pPr>
-                      <a:r>
-                        <a:t>deep_headers_fine</a:t>
-                      </a:r>
-                    </a:p>
-                  </a:txBody>
-                  <a:tcPr/>
-                </a:tc>
-                <a:tc>
-                  <a:txBody>
-                    <a:bodyPr/>
-                    <a:lstStyle/>
-                    <a:p>
-                      <a:pPr>
-                        <a:defRPr sz="1000"/>
-                      </a:pPr>
-                      <a:r>
-                        <a:t>0.050</a:t>
-                      </a:r>
-                    </a:p>
-                  </a:txBody>
-                  <a:tcPr/>
-                </a:tc>
-                <a:tc>
-                  <a:txBody>
-                    <a:bodyPr/>
-                    <a:lstStyle/>
-                    <a:p>
-                      <a:pPr>
-                        <a:defRPr sz="1000"/>
-                      </a:pPr>
-                      <a:r>
-                        <a:t>0.693</a:t>
-                      </a:r>
-                    </a:p>
-                  </a:txBody>
-                  <a:tcPr/>
-                </a:tc>
-                <a:tc>
-                  <a:txBody>
-                    <a:bodyPr/>
-                    <a:lstStyle/>
-                    <a:p>
-                      <a:pPr>
-                        <a:defRPr sz="1000"/>
-                      </a:pPr>
-                      <a:r>
-                        <a:t>0.721</a:t>
-                      </a:r>
-                    </a:p>
-                  </a:txBody>
-                  <a:tcPr/>
-                </a:tc>
-              </a:tr>
-              <a:tr h="347472">
-                <a:tc>
-                  <a:txBody>
-                    <a:bodyPr/>
-                    <a:lstStyle/>
-                    <a:p>
-                      <a:pPr>
-                        <a:defRPr sz="1000"/>
-                      </a:pPr>
-                      <a:r>
-                        <a:t>finance_10k</a:t>
-                      </a:r>
-                    </a:p>
-                  </a:txBody>
-                  <a:tcPr/>
-                </a:tc>
-                <a:tc>
-                  <a:txBody>
-                    <a:bodyPr/>
-                    <a:lstStyle/>
-                    <a:p>
-                      <a:pPr>
-                        <a:defRPr sz="1000"/>
-                      </a:pPr>
-                      <a:r>
-                        <a:t>fine_chunks</a:t>
-                      </a:r>
-                    </a:p>
-                  </a:txBody>
-                  <a:tcPr/>
-                </a:tc>
-                <a:tc>
-                  <a:txBody>
-                    <a:bodyPr/>
-                    <a:lstStyle/>
-                    <a:p>
-                      <a:pPr>
-                        <a:defRPr sz="1000"/>
-                      </a:pPr>
-                      <a:r>
-                        <a:t>0.050</a:t>
-                      </a:r>
-                    </a:p>
-                  </a:txBody>
-                  <a:tcPr/>
-                </a:tc>
-                <a:tc>
-                  <a:txBody>
-                    <a:bodyPr/>
-                    <a:lstStyle/>
-                    <a:p>
-                      <a:pPr>
-                        <a:defRPr sz="1000"/>
-                      </a:pPr>
-                      <a:r>
-                        <a:t>0.835</a:t>
-                      </a:r>
-                    </a:p>
-                  </a:txBody>
-                  <a:tcPr/>
-                </a:tc>
-                <a:tc>
-                  <a:txBody>
-                    <a:bodyPr/>
-                    <a:lstStyle/>
-                    <a:p>
-                      <a:pPr>
-                        <a:defRPr sz="1000"/>
-                      </a:pPr>
-                      <a:r>
-                        <a:t>0.963</a:t>
-                      </a:r>
-                    </a:p>
-                  </a:txBody>
-                  <a:tcPr/>
-                </a:tc>
-              </a:tr>
-            </a:tbl>
-          </a:graphicData>
-        </a:graphic>
-      </p:graphicFrame>
-      <p:sp>
-        <p:nvSpPr>
-          <p:cNvPr id="4" name="TextBox 3"/>
-          <p:cNvSpPr txBox="1"/>
-          <p:nvPr/>
-        </p:nvSpPr>
-        <p:spPr>
-          <a:xfrm>
-            <a:off x="502920" y="4160520"/>
-            <a:ext cx="8229600" cy="2286000"/>
-          </a:xfrm>
-          <a:prstGeom prst="rect">
-            <a:avLst/>
-          </a:prstGeom>
-          <a:noFill/>
-        </p:spPr>
-        <p:txBody>
-          <a:bodyPr wrap="square">
-            <a:spAutoFit/>
-          </a:bodyPr>
-          <a:lstStyle/>
-          <a:p>
-            <a:pPr>
-              <a:spcAft>
-                <a:spcPts val="600"/>
-              </a:spcAft>
-              <a:defRPr sz="1300">
-                <a:solidFill>
-                  <a:srgbClr val="4A5568"/>
-                </a:solidFill>
-              </a:defRPr>
-            </a:pPr>
-            <a:r>
-              <a:t>Each preset re-chunks + regenerates Q/A — not comparable to Tier A deltas.</a:t>
-            </a:r>
-          </a:p>
-          <a:p>
-            <a:pPr>
-              <a:spcAft>
-                <a:spcPts val="600"/>
-              </a:spcAft>
-              <a:defRPr sz="1300">
-                <a:solidFill>
-                  <a:srgbClr val="4A5568"/>
-                </a:solidFill>
-              </a:defRPr>
-            </a:pPr>
-            <a:r>
-              <a:t>Use for chunking strategy exploration; confirm with larger n.</a:t>
             </a:r>
           </a:p>
         </p:txBody>

--- a/outputs/presentation/RAG_Hallucination_Capstone.pptx
+++ b/outputs/presentation/RAG_Hallucination_Capstone.pptx
@@ -4807,6 +4807,18 @@
               <a:t>Limitations &amp; next steps</a:t>
             </a:r>
           </a:p>
+          <a:p>
+            <a:pPr>
+              <a:defRPr sz="1400">
+                <a:solidFill>
+                  <a:srgbClr val="E2E8F0"/>
+                </a:solidFill>
+              </a:defRPr>
+            </a:pPr>
+            <a:r>
+              <a:t>Honest scope — and how I would extend the work</a:t>
+            </a:r>
+          </a:p>
         </p:txBody>
       </p:sp>
       <p:sp>
@@ -4817,8 +4829,8 @@
         </p:nvSpPr>
         <p:spPr>
           <a:xfrm>
-            <a:off x="685800" y="1325880"/>
-            <a:ext cx="7772400" cy="5029200"/>
+            <a:off x="594360" y="1207008"/>
+            <a:ext cx="8092440" cy="5349240"/>
           </a:xfrm>
           <a:prstGeom prst="rect">
             <a:avLst/>
@@ -4835,14 +4847,14 @@
               <a:spcAft>
                 <a:spcPts val="600"/>
               </a:spcAft>
-              <a:defRPr sz="1700">
+              <a:defRPr sz="1300">
                 <a:solidFill>
                   <a:srgbClr val="4A5568"/>
                 </a:solidFill>
               </a:defRPr>
             </a:pPr>
             <a:r>
-              <a:t>• n=10 questions / experiment — exploratory.</a:t>
+              <a:t>Sample size: Each experiment used 10 evaluated questions per corpus. That is enough to see directional patterns and engineering tradeoffs, but not to claim statistical significance or stable rankings—one or two hard questions can move averages.</a:t>
             </a:r>
           </a:p>
           <a:p>
@@ -4850,14 +4862,14 @@
               <a:spcAft>
                 <a:spcPts val="600"/>
               </a:spcAft>
-              <a:defRPr sz="1700">
+              <a:defRPr sz="1300">
                 <a:solidFill>
                   <a:srgbClr val="4A5568"/>
                 </a:solidFill>
               </a:defRPr>
             </a:pPr>
             <a:r>
-              <a:t>• Four PDFs — illustrative genres, not universal finance/healthcare.</a:t>
+              <a:t>Generalization: Four long PDFs (two 10-Ks, two FDA labels) illustrate SEC-style financial prose vs regulatory drug-label prose. Results should not be read as covering all of finance or healthcare (e.g., earnings calls, EHR notes, or other jurisdictions).</a:t>
             </a:r>
           </a:p>
           <a:p>
@@ -4865,14 +4877,14 @@
               <a:spcAft>
                 <a:spcPts val="600"/>
               </a:spcAft>
-              <a:defRPr sz="1700">
+              <a:defRPr sz="1300">
                 <a:solidFill>
                   <a:srgbClr val="4A5568"/>
                 </a:solidFill>
               </a:defRPr>
             </a:pPr>
             <a:r>
-              <a:t>• LLM judges add variance; triangulate with rule-based metrics.</a:t>
+              <a:t>Metrics: RAGAS scores and our LLM judges depend on model choice and prompts; they can disagree with each other. Rule-based metrics (recall, citation checks) are more stable but do not capture every failure mode. Human spot-checks would strengthen claims.</a:t>
             </a:r>
           </a:p>
           <a:p>
@@ -4880,14 +4892,29 @@
               <a:spcAft>
                 <a:spcPts val="600"/>
               </a:spcAft>
-              <a:defRPr sz="1700">
+              <a:defRPr sz="1300">
                 <a:solidFill>
                   <a:srgbClr val="4A5568"/>
                 </a:solidFill>
               </a:defRPr>
             </a:pPr>
             <a:r>
-              <a:t>• Next: larger n, CIs, more rerankers &amp; abstention policies.</a:t>
+              <a:t>Operational reality: Runs depend on OpenAI and LlamaParse availability, cost, and rate limits; reproduction requires the same tooling or careful substitution.</a:t>
+            </a:r>
+          </a:p>
+          <a:p>
+            <a:pPr>
+              <a:spcAft>
+                <a:spcPts val="600"/>
+              </a:spcAft>
+              <a:defRPr sz="1300">
+                <a:solidFill>
+                  <a:srgbClr val="4A5568"/>
+                </a:solidFill>
+              </a:defRPr>
+            </a:pPr>
+            <a:r>
+              <a:t>Next steps I would prioritize: (1) increase n and report confidence intervals or bootstrap bands; (2) add more corpora per genre; (3) optional human evaluation on a stratified subset; (4) test additional rerankers and abstention thresholds; (5) document-type-specific chunking defaults informed by Tier B–style ablations at larger n.</a:t>
             </a:r>
           </a:p>
         </p:txBody>
@@ -4968,6 +4995,18 @@
               <a:t>Conclusion</a:t>
             </a:r>
           </a:p>
+          <a:p>
+            <a:pPr>
+              <a:defRPr sz="1400">
+                <a:solidFill>
+                  <a:srgbClr val="E2E8F0"/>
+                </a:solidFill>
+              </a:defRPr>
+            </a:pPr>
+            <a:r>
+              <a:t>What we set out to do — what we learned</a:t>
+            </a:r>
+          </a:p>
         </p:txBody>
       </p:sp>
       <p:sp>
@@ -4978,8 +5017,8 @@
         </p:nvSpPr>
         <p:spPr>
           <a:xfrm>
-            <a:off x="777240" y="1417320"/>
-            <a:ext cx="7589520" cy="4572000"/>
+            <a:off x="594360" y="1207008"/>
+            <a:ext cx="8092440" cy="5349240"/>
           </a:xfrm>
           <a:prstGeom prst="rect">
             <a:avLst/>
@@ -4996,14 +5035,14 @@
               <a:spcAft>
                 <a:spcPts val="600"/>
               </a:spcAft>
-              <a:defRPr sz="2200">
+              <a:defRPr sz="1600">
                 <a:solidFill>
                   <a:srgbClr val="1E3A5F"/>
                 </a:solidFill>
               </a:defRPr>
             </a:pPr>
             <a:r>
-              <a:t>RAG design choices measurably shift grounding vs correctness — differently on 10-Ks vs FDA labels.</a:t>
+              <a:t>Problem: Organizations need reliable, grounded AI for dense professional text; hallucinations block adoption even when efficiency gains are real.</a:t>
             </a:r>
           </a:p>
           <a:p>
@@ -5011,14 +5050,14 @@
               <a:spcAft>
                 <a:spcPts val="600"/>
               </a:spcAft>
-              <a:defRPr sz="2200">
+              <a:defRPr sz="1600">
                 <a:solidFill>
                   <a:srgbClr val="1E3A5F"/>
                 </a:solidFill>
               </a:defRPr>
             </a:pPr>
             <a:r>
-              <a:t>Deliverable: reproducible pipeline + data-driven comparison tables for practitioners.</a:t>
+              <a:t>What this project did: Built an end-to-end RAG evaluation pipeline and compared multiple system designs on real finance and healthcare documents, with tiered experiments (same-gold vs chunking ablations) and multi-metric scoring.</a:t>
             </a:r>
           </a:p>
           <a:p>
@@ -5026,14 +5065,44 @@
               <a:spcAft>
                 <a:spcPts val="600"/>
               </a:spcAft>
-              <a:defRPr sz="2200">
+              <a:defRPr sz="1600">
                 <a:solidFill>
                   <a:srgbClr val="1E3A5F"/>
                 </a:solidFill>
               </a:defRPr>
             </a:pPr>
             <a:r>
-              <a:t>Thank you — questions?</a:t>
+              <a:t>What the results suggest: There is no single “best” RAG preset for every industry or metric—narrower retrieval (e.g., k=3) leaned toward lower hallucination flags on average, while richer retrieval plus chain-of-thought leaned toward higher answer correctness but worse average hallucination flags—a tradeoff practitioners must choose explicitly.</a:t>
+            </a:r>
+          </a:p>
+          <a:p>
+            <a:pPr>
+              <a:spcAft>
+                <a:spcPts val="600"/>
+              </a:spcAft>
+              <a:defRPr sz="1600">
+                <a:solidFill>
+                  <a:srgbClr val="1E3A5F"/>
+                </a:solidFill>
+              </a:defRPr>
+            </a:pPr>
+            <a:r>
+              <a:t>Deliverable: A reproducible codebase, logged runs, and aggregated tables/charts that teams can extend with their own PDFs and larger evaluation sets.</a:t>
+            </a:r>
+          </a:p>
+          <a:p>
+            <a:pPr>
+              <a:spcAft>
+                <a:spcPts val="600"/>
+              </a:spcAft>
+              <a:defRPr sz="1600">
+                <a:solidFill>
+                  <a:srgbClr val="1E3A5F"/>
+                </a:solidFill>
+              </a:defRPr>
+            </a:pPr>
+            <a:r>
+              <a:t>Thank you — I am happy to take questions.</a:t>
             </a:r>
           </a:p>
         </p:txBody>

--- a/outputs/presentation/RAG_Hallucination_Capstone.pptx
+++ b/outputs/presentation/RAG_Hallucination_Capstone.pptx
@@ -4823,14 +4823,208 @@
       </p:sp>
       <p:sp>
         <p:nvSpPr>
-          <p:cNvPr id="3" name="TextBox 2"/>
+          <p:cNvPr id="3" name="Rounded Rectangle 2"/>
+          <p:cNvSpPr/>
+          <p:nvPr/>
+        </p:nvSpPr>
+        <p:spPr>
+          <a:xfrm>
+            <a:off x="502920" y="1170432"/>
+            <a:ext cx="4069080" cy="5257800"/>
+          </a:xfrm>
+          <a:prstGeom prst="roundRect">
+            <a:avLst/>
+          </a:prstGeom>
+          <a:solidFill>
+            <a:srgbClr val="FFF7F5"/>
+          </a:solidFill>
+          <a:ln>
+            <a:solidFill>
+              <a:srgbClr val="FEE2E2"/>
+            </a:solidFill>
+          </a:ln>
+        </p:spPr>
+        <p:style>
+          <a:lnRef idx="1">
+            <a:schemeClr val="accent1"/>
+          </a:lnRef>
+          <a:fillRef idx="3">
+            <a:schemeClr val="accent1"/>
+          </a:fillRef>
+          <a:effectRef idx="2">
+            <a:schemeClr val="accent1"/>
+          </a:effectRef>
+          <a:fontRef idx="minor">
+            <a:schemeClr val="lt1"/>
+          </a:fontRef>
+        </p:style>
+        <p:txBody>
+          <a:bodyPr rtlCol="0" anchor="ctr"/>
+          <a:lstStyle/>
+          <a:p>
+            <a:pPr algn="ctr"/>
+          </a:p>
+        </p:txBody>
+      </p:sp>
+      <p:sp>
+        <p:nvSpPr>
+          <p:cNvPr id="4" name="Rounded Rectangle 3"/>
+          <p:cNvSpPr/>
+          <p:nvPr/>
+        </p:nvSpPr>
+        <p:spPr>
+          <a:xfrm>
+            <a:off x="4663440" y="1170432"/>
+            <a:ext cx="4023360" cy="5257800"/>
+          </a:xfrm>
+          <a:prstGeom prst="roundRect">
+            <a:avLst/>
+          </a:prstGeom>
+          <a:solidFill>
+            <a:srgbClr val="F0FDF4"/>
+          </a:solidFill>
+          <a:ln>
+            <a:solidFill>
+              <a:srgbClr val="BBF7D0"/>
+            </a:solidFill>
+          </a:ln>
+        </p:spPr>
+        <p:style>
+          <a:lnRef idx="1">
+            <a:schemeClr val="accent1"/>
+          </a:lnRef>
+          <a:fillRef idx="3">
+            <a:schemeClr val="accent1"/>
+          </a:fillRef>
+          <a:effectRef idx="2">
+            <a:schemeClr val="accent1"/>
+          </a:effectRef>
+          <a:fontRef idx="minor">
+            <a:schemeClr val="lt1"/>
+          </a:fontRef>
+        </p:style>
+        <p:txBody>
+          <a:bodyPr rtlCol="0" anchor="ctr"/>
+          <a:lstStyle/>
+          <a:p>
+            <a:pPr algn="ctr"/>
+          </a:p>
+        </p:txBody>
+      </p:sp>
+      <p:sp>
+        <p:nvSpPr>
+          <p:cNvPr id="5" name="Oval 4"/>
+          <p:cNvSpPr/>
+          <p:nvPr/>
+        </p:nvSpPr>
+        <p:spPr>
+          <a:xfrm>
+            <a:off x="640080" y="1261872"/>
+            <a:ext cx="347472" cy="347472"/>
+          </a:xfrm>
+          <a:prstGeom prst="ellipse">
+            <a:avLst/>
+          </a:prstGeom>
+          <a:solidFill>
+            <a:srgbClr val="C05621"/>
+          </a:solidFill>
+          <a:ln>
+            <a:noFill/>
+          </a:ln>
+        </p:spPr>
+        <p:style>
+          <a:lnRef idx="1">
+            <a:schemeClr val="accent1"/>
+          </a:lnRef>
+          <a:fillRef idx="3">
+            <a:schemeClr val="accent1"/>
+          </a:fillRef>
+          <a:effectRef idx="2">
+            <a:schemeClr val="accent1"/>
+          </a:effectRef>
+          <a:fontRef idx="minor">
+            <a:schemeClr val="lt1"/>
+          </a:fontRef>
+        </p:style>
+        <p:txBody>
+          <a:bodyPr rtlCol="0" anchor="ctr"/>
+          <a:lstStyle/>
+          <a:p>
+            <a:pPr algn="ctr">
+              <a:defRPr sz="1300" b="1">
+                <a:solidFill>
+                  <a:srgbClr val="FFFFFF"/>
+                </a:solidFill>
+              </a:defRPr>
+            </a:pPr>
+            <a:r>
+              <a:t>!</a:t>
+            </a:r>
+          </a:p>
+        </p:txBody>
+      </p:sp>
+      <p:sp>
+        <p:nvSpPr>
+          <p:cNvPr id="6" name="Oval 5"/>
+          <p:cNvSpPr/>
+          <p:nvPr/>
+        </p:nvSpPr>
+        <p:spPr>
+          <a:xfrm>
+            <a:off x="4800600" y="1261872"/>
+            <a:ext cx="347472" cy="347472"/>
+          </a:xfrm>
+          <a:prstGeom prst="ellipse">
+            <a:avLst/>
+          </a:prstGeom>
+          <a:solidFill>
+            <a:srgbClr val="276F47"/>
+          </a:solidFill>
+          <a:ln>
+            <a:noFill/>
+          </a:ln>
+        </p:spPr>
+        <p:style>
+          <a:lnRef idx="1">
+            <a:schemeClr val="accent1"/>
+          </a:lnRef>
+          <a:fillRef idx="3">
+            <a:schemeClr val="accent1"/>
+          </a:fillRef>
+          <a:effectRef idx="2">
+            <a:schemeClr val="accent1"/>
+          </a:effectRef>
+          <a:fontRef idx="minor">
+            <a:schemeClr val="lt1"/>
+          </a:fontRef>
+        </p:style>
+        <p:txBody>
+          <a:bodyPr rtlCol="0" anchor="ctr"/>
+          <a:lstStyle/>
+          <a:p>
+            <a:pPr algn="ctr">
+              <a:defRPr sz="1300" b="1">
+                <a:solidFill>
+                  <a:srgbClr val="FFFFFF"/>
+                </a:solidFill>
+              </a:defRPr>
+            </a:pPr>
+            <a:r>
+              <a:t>→</a:t>
+            </a:r>
+          </a:p>
+        </p:txBody>
+      </p:sp>
+      <p:sp>
+        <p:nvSpPr>
+          <p:cNvPr id="7" name="TextBox 6"/>
           <p:cNvSpPr txBox="1"/>
           <p:nvPr/>
         </p:nvSpPr>
         <p:spPr>
           <a:xfrm>
-            <a:off x="594360" y="1207008"/>
-            <a:ext cx="8092440" cy="5349240"/>
+            <a:off x="1051560" y="1243584"/>
+            <a:ext cx="3291840" cy="365760"/>
           </a:xfrm>
           <a:prstGeom prst="rect">
             <a:avLst/>
@@ -4838,6 +5032,76 @@
           <a:noFill/>
         </p:spPr>
         <p:txBody>
+          <a:bodyPr wrap="none">
+            <a:spAutoFit/>
+          </a:bodyPr>
+          <a:lstStyle/>
+          <a:p>
+            <a:pPr>
+              <a:defRPr sz="1300" b="1">
+                <a:solidFill>
+                  <a:srgbClr val="1E3A5F"/>
+                </a:solidFill>
+              </a:defRPr>
+            </a:pPr>
+            <a:r>
+              <a:t>What this study does not fully establish</a:t>
+            </a:r>
+          </a:p>
+        </p:txBody>
+      </p:sp>
+      <p:sp>
+        <p:nvSpPr>
+          <p:cNvPr id="8" name="TextBox 7"/>
+          <p:cNvSpPr txBox="1"/>
+          <p:nvPr/>
+        </p:nvSpPr>
+        <p:spPr>
+          <a:xfrm>
+            <a:off x="5212080" y="1243584"/>
+            <a:ext cx="3200400" cy="365760"/>
+          </a:xfrm>
+          <a:prstGeom prst="rect">
+            <a:avLst/>
+          </a:prstGeom>
+          <a:noFill/>
+        </p:spPr>
+        <p:txBody>
+          <a:bodyPr wrap="none">
+            <a:spAutoFit/>
+          </a:bodyPr>
+          <a:lstStyle/>
+          <a:p>
+            <a:pPr>
+              <a:defRPr sz="1300" b="1">
+                <a:solidFill>
+                  <a:srgbClr val="1E3A5F"/>
+                </a:solidFill>
+              </a:defRPr>
+            </a:pPr>
+            <a:r>
+              <a:t>Natural extensions of the work</a:t>
+            </a:r>
+          </a:p>
+        </p:txBody>
+      </p:sp>
+      <p:sp>
+        <p:nvSpPr>
+          <p:cNvPr id="9" name="TextBox 8"/>
+          <p:cNvSpPr txBox="1"/>
+          <p:nvPr/>
+        </p:nvSpPr>
+        <p:spPr>
+          <a:xfrm>
+            <a:off x="658368" y="1719072"/>
+            <a:ext cx="3794760" cy="4572000"/>
+          </a:xfrm>
+          <a:prstGeom prst="rect">
+            <a:avLst/>
+          </a:prstGeom>
+          <a:noFill/>
+        </p:spPr>
+        <p:txBody>
           <a:bodyPr wrap="square">
             <a:spAutoFit/>
           </a:bodyPr>
@@ -4847,14 +5111,14 @@
               <a:spcAft>
                 <a:spcPts val="600"/>
               </a:spcAft>
-              <a:defRPr sz="1300">
+              <a:defRPr sz="1200">
                 <a:solidFill>
                   <a:srgbClr val="4A5568"/>
                 </a:solidFill>
               </a:defRPr>
             </a:pPr>
             <a:r>
-              <a:t>Sample size: Each experiment used 10 evaluated questions per corpus. That is enough to see directional patterns and engineering tradeoffs, but not to claim statistical significance or stable rankings—one or two hard questions can move averages.</a:t>
+              <a:t>Sample size: 10 evaluated questions per experiment per corpus — good for directional patterns, not for significance; a few hard items can move averages.</a:t>
             </a:r>
           </a:p>
           <a:p>
@@ -4862,14 +5126,14 @@
               <a:spcAft>
                 <a:spcPts val="600"/>
               </a:spcAft>
-              <a:defRPr sz="1300">
+              <a:defRPr sz="1200">
                 <a:solidFill>
                   <a:srgbClr val="4A5568"/>
                 </a:solidFill>
               </a:defRPr>
             </a:pPr>
             <a:r>
-              <a:t>Generalization: Four long PDFs (two 10-Ks, two FDA labels) illustrate SEC-style financial prose vs regulatory drug-label prose. Results should not be read as covering all of finance or healthcare (e.g., earnings calls, EHR notes, or other jurisdictions).</a:t>
+              <a:t>Generalization: Four PDFs (two 10-Ks, two FDA labels) illustrate two genres, not all of finance or healthcare (e.g., calls, clinical notes, other regulators).</a:t>
             </a:r>
           </a:p>
           <a:p>
@@ -4877,14 +5141,14 @@
               <a:spcAft>
                 <a:spcPts val="600"/>
               </a:spcAft>
-              <a:defRPr sz="1300">
+              <a:defRPr sz="1200">
                 <a:solidFill>
                   <a:srgbClr val="4A5568"/>
                 </a:solidFill>
               </a:defRPr>
             </a:pPr>
             <a:r>
-              <a:t>Metrics: RAGAS scores and our LLM judges depend on model choice and prompts; they can disagree with each other. Rule-based metrics (recall, citation checks) are more stable but do not capture every failure mode. Human spot-checks would strengthen claims.</a:t>
+              <a:t>Metrics: LLM judges and RAGAS depend on model settings; they can disagree. Rule metrics (recall, citations) are stable but incomplete. Human spot-checks would strengthen claims.</a:t>
             </a:r>
           </a:p>
           <a:p>
@@ -4892,29 +5156,127 @@
               <a:spcAft>
                 <a:spcPts val="600"/>
               </a:spcAft>
-              <a:defRPr sz="1300">
+              <a:defRPr sz="1200">
                 <a:solidFill>
                   <a:srgbClr val="4A5568"/>
                 </a:solidFill>
               </a:defRPr>
             </a:pPr>
             <a:r>
-              <a:t>Operational reality: Runs depend on OpenAI and LlamaParse availability, cost, and rate limits; reproduction requires the same tooling or careful substitution.</a:t>
-            </a:r>
-          </a:p>
+              <a:t>Operations: Depends on OpenAI / LlamaParse availability, cost, and rate limits; reproducing runs needs the same stack or documented substitutes.</a:t>
+            </a:r>
+          </a:p>
+        </p:txBody>
+      </p:sp>
+      <p:sp>
+        <p:nvSpPr>
+          <p:cNvPr id="10" name="TextBox 9"/>
+          <p:cNvSpPr txBox="1"/>
+          <p:nvPr/>
+        </p:nvSpPr>
+        <p:spPr>
+          <a:xfrm>
+            <a:off x="4773168" y="1719072"/>
+            <a:ext cx="3657600" cy="4572000"/>
+          </a:xfrm>
+          <a:prstGeom prst="rect">
+            <a:avLst/>
+          </a:prstGeom>
+          <a:noFill/>
+        </p:spPr>
+        <p:txBody>
+          <a:bodyPr wrap="square">
+            <a:spAutoFit/>
+          </a:bodyPr>
+          <a:lstStyle/>
           <a:p>
             <a:pPr>
               <a:spcAft>
                 <a:spcPts val="600"/>
               </a:spcAft>
-              <a:defRPr sz="1300">
+              <a:defRPr sz="1200">
                 <a:solidFill>
                   <a:srgbClr val="4A5568"/>
                 </a:solidFill>
               </a:defRPr>
             </a:pPr>
             <a:r>
-              <a:t>Next steps I would prioritize: (1) increase n and report confidence intervals or bootstrap bands; (2) add more corpora per genre; (3) optional human evaluation on a stratified subset; (4) test additional rerankers and abstention thresholds; (5) document-type-specific chunking defaults informed by Tier B–style ablations at larger n.</a:t>
+              <a:t>Prioritized next steps:</a:t>
+            </a:r>
+          </a:p>
+          <a:p>
+            <a:pPr>
+              <a:spcAft>
+                <a:spcPts val="600"/>
+              </a:spcAft>
+              <a:defRPr sz="1200">
+                <a:solidFill>
+                  <a:srgbClr val="4A5568"/>
+                </a:solidFill>
+              </a:defRPr>
+            </a:pPr>
+            <a:r>
+              <a:t>(1) Larger n + confidence intervals or bootstrap bands.</a:t>
+            </a:r>
+          </a:p>
+          <a:p>
+            <a:pPr>
+              <a:spcAft>
+                <a:spcPts val="600"/>
+              </a:spcAft>
+              <a:defRPr sz="1200">
+                <a:solidFill>
+                  <a:srgbClr val="4A5568"/>
+                </a:solidFill>
+              </a:defRPr>
+            </a:pPr>
+            <a:r>
+              <a:t>(2) More corpora per genre and out-of-sample documents.</a:t>
+            </a:r>
+          </a:p>
+          <a:p>
+            <a:pPr>
+              <a:spcAft>
+                <a:spcPts val="600"/>
+              </a:spcAft>
+              <a:defRPr sz="1200">
+                <a:solidFill>
+                  <a:srgbClr val="4A5568"/>
+                </a:solidFill>
+              </a:defRPr>
+            </a:pPr>
+            <a:r>
+              <a:t>(3) Optional stratified human evaluation on failure cases.</a:t>
+            </a:r>
+          </a:p>
+          <a:p>
+            <a:pPr>
+              <a:spcAft>
+                <a:spcPts val="600"/>
+              </a:spcAft>
+              <a:defRPr sz="1200">
+                <a:solidFill>
+                  <a:srgbClr val="4A5568"/>
+                </a:solidFill>
+              </a:defRPr>
+            </a:pPr>
+            <a:r>
+              <a:t>(4) More rerankers and abstention / citation policies.</a:t>
+            </a:r>
+          </a:p>
+          <a:p>
+            <a:pPr>
+              <a:spcAft>
+                <a:spcPts val="600"/>
+              </a:spcAft>
+              <a:defRPr sz="1200">
+                <a:solidFill>
+                  <a:srgbClr val="4A5568"/>
+                </a:solidFill>
+              </a:defRPr>
+            </a:pPr>
+            <a:r>
+              <a:t>(5) Chunking defaults informed by Tier B–style ablations at scale.</a:t>
             </a:r>
           </a:p>
         </p:txBody>
@@ -5011,14 +5373,380 @@
       </p:sp>
       <p:sp>
         <p:nvSpPr>
-          <p:cNvPr id="3" name="TextBox 2"/>
+          <p:cNvPr id="3" name="Rounded Rectangle 2"/>
+          <p:cNvSpPr/>
+          <p:nvPr/>
+        </p:nvSpPr>
+        <p:spPr>
+          <a:xfrm>
+            <a:off x="800100" y="1207008"/>
+            <a:ext cx="2148840" cy="868680"/>
+          </a:xfrm>
+          <a:prstGeom prst="roundRect">
+            <a:avLst/>
+          </a:prstGeom>
+          <a:solidFill>
+            <a:srgbClr val="1E3A5F"/>
+          </a:solidFill>
+          <a:ln>
+            <a:noFill/>
+          </a:ln>
+        </p:spPr>
+        <p:style>
+          <a:lnRef idx="1">
+            <a:schemeClr val="accent1"/>
+          </a:lnRef>
+          <a:fillRef idx="3">
+            <a:schemeClr val="accent1"/>
+          </a:fillRef>
+          <a:effectRef idx="2">
+            <a:schemeClr val="accent1"/>
+          </a:effectRef>
+          <a:fontRef idx="minor">
+            <a:schemeClr val="lt1"/>
+          </a:fontRef>
+        </p:style>
+        <p:txBody>
+          <a:bodyPr rtlCol="0" anchor="ctr" wrap="square"/>
+          <a:lstStyle/>
+          <a:p>
+            <a:pPr>
+              <a:defRPr sz="1200" b="1">
+                <a:solidFill>
+                  <a:srgbClr val="FFFFFF"/>
+                </a:solidFill>
+              </a:defRPr>
+            </a:pPr>
+            <a:r>
+              <a:t>Industry need</a:t>
+            </a:r>
+          </a:p>
+          <a:p>
+            <a:pPr>
+              <a:defRPr sz="1000">
+                <a:solidFill>
+                  <a:srgbClr val="E2E8F0"/>
+                </a:solidFill>
+              </a:defRPr>
+            </a:pPr>
+            <a:r>
+              <a:t>Trust &amp; grounded answers</a:t>
+            </a:r>
+          </a:p>
+        </p:txBody>
+      </p:sp>
+      <p:sp>
+        <p:nvSpPr>
+          <p:cNvPr id="4" name="Right Arrow 3"/>
+          <p:cNvSpPr/>
+          <p:nvPr/>
+        </p:nvSpPr>
+        <p:spPr>
+          <a:xfrm>
+            <a:off x="3049524" y="1540763"/>
+            <a:ext cx="347472" cy="201168"/>
+          </a:xfrm>
+          <a:prstGeom prst="rightArrow">
+            <a:avLst/>
+          </a:prstGeom>
+          <a:solidFill>
+            <a:srgbClr val="A0AEC0"/>
+          </a:solidFill>
+          <a:ln>
+            <a:noFill/>
+          </a:ln>
+        </p:spPr>
+        <p:style>
+          <a:lnRef idx="1">
+            <a:schemeClr val="accent1"/>
+          </a:lnRef>
+          <a:fillRef idx="3">
+            <a:schemeClr val="accent1"/>
+          </a:fillRef>
+          <a:effectRef idx="2">
+            <a:schemeClr val="accent1"/>
+          </a:effectRef>
+          <a:fontRef idx="minor">
+            <a:schemeClr val="lt1"/>
+          </a:fontRef>
+        </p:style>
+        <p:txBody>
+          <a:bodyPr rtlCol="0" anchor="ctr"/>
+          <a:lstStyle/>
+          <a:p>
+            <a:pPr algn="ctr"/>
+          </a:p>
+        </p:txBody>
+      </p:sp>
+      <p:sp>
+        <p:nvSpPr>
+          <p:cNvPr id="5" name="Rounded Rectangle 4"/>
+          <p:cNvSpPr/>
+          <p:nvPr/>
+        </p:nvSpPr>
+        <p:spPr>
+          <a:xfrm>
+            <a:off x="3497580" y="1207008"/>
+            <a:ext cx="2148840" cy="868680"/>
+          </a:xfrm>
+          <a:prstGeom prst="roundRect">
+            <a:avLst/>
+          </a:prstGeom>
+          <a:solidFill>
+            <a:srgbClr val="2B7CA8"/>
+          </a:solidFill>
+          <a:ln>
+            <a:noFill/>
+          </a:ln>
+        </p:spPr>
+        <p:style>
+          <a:lnRef idx="1">
+            <a:schemeClr val="accent1"/>
+          </a:lnRef>
+          <a:fillRef idx="3">
+            <a:schemeClr val="accent1"/>
+          </a:fillRef>
+          <a:effectRef idx="2">
+            <a:schemeClr val="accent1"/>
+          </a:effectRef>
+          <a:fontRef idx="minor">
+            <a:schemeClr val="lt1"/>
+          </a:fontRef>
+        </p:style>
+        <p:txBody>
+          <a:bodyPr rtlCol="0" anchor="ctr" wrap="square"/>
+          <a:lstStyle/>
+          <a:p>
+            <a:pPr>
+              <a:defRPr sz="1200" b="1">
+                <a:solidFill>
+                  <a:srgbClr val="FFFFFF"/>
+                </a:solidFill>
+              </a:defRPr>
+            </a:pPr>
+            <a:r>
+              <a:t>This study</a:t>
+            </a:r>
+          </a:p>
+          <a:p>
+            <a:pPr>
+              <a:defRPr sz="1000">
+                <a:solidFill>
+                  <a:srgbClr val="E2E8F0"/>
+                </a:solidFill>
+              </a:defRPr>
+            </a:pPr>
+            <a:r>
+              <a:t>Controlled RAG comparison</a:t>
+            </a:r>
+          </a:p>
+        </p:txBody>
+      </p:sp>
+      <p:sp>
+        <p:nvSpPr>
+          <p:cNvPr id="6" name="Right Arrow 5"/>
+          <p:cNvSpPr/>
+          <p:nvPr/>
+        </p:nvSpPr>
+        <p:spPr>
+          <a:xfrm>
+            <a:off x="5747004" y="1540763"/>
+            <a:ext cx="347472" cy="201168"/>
+          </a:xfrm>
+          <a:prstGeom prst="rightArrow">
+            <a:avLst/>
+          </a:prstGeom>
+          <a:solidFill>
+            <a:srgbClr val="A0AEC0"/>
+          </a:solidFill>
+          <a:ln>
+            <a:noFill/>
+          </a:ln>
+        </p:spPr>
+        <p:style>
+          <a:lnRef idx="1">
+            <a:schemeClr val="accent1"/>
+          </a:lnRef>
+          <a:fillRef idx="3">
+            <a:schemeClr val="accent1"/>
+          </a:fillRef>
+          <a:effectRef idx="2">
+            <a:schemeClr val="accent1"/>
+          </a:effectRef>
+          <a:fontRef idx="minor">
+            <a:schemeClr val="lt1"/>
+          </a:fontRef>
+        </p:style>
+        <p:txBody>
+          <a:bodyPr rtlCol="0" anchor="ctr"/>
+          <a:lstStyle/>
+          <a:p>
+            <a:pPr algn="ctr"/>
+          </a:p>
+        </p:txBody>
+      </p:sp>
+      <p:sp>
+        <p:nvSpPr>
+          <p:cNvPr id="7" name="Rounded Rectangle 6"/>
+          <p:cNvSpPr/>
+          <p:nvPr/>
+        </p:nvSpPr>
+        <p:spPr>
+          <a:xfrm>
+            <a:off x="6195060" y="1207008"/>
+            <a:ext cx="2148840" cy="868680"/>
+          </a:xfrm>
+          <a:prstGeom prst="roundRect">
+            <a:avLst/>
+          </a:prstGeom>
+          <a:solidFill>
+            <a:srgbClr val="276F47"/>
+          </a:solidFill>
+          <a:ln>
+            <a:noFill/>
+          </a:ln>
+        </p:spPr>
+        <p:style>
+          <a:lnRef idx="1">
+            <a:schemeClr val="accent1"/>
+          </a:lnRef>
+          <a:fillRef idx="3">
+            <a:schemeClr val="accent1"/>
+          </a:fillRef>
+          <a:effectRef idx="2">
+            <a:schemeClr val="accent1"/>
+          </a:effectRef>
+          <a:fontRef idx="minor">
+            <a:schemeClr val="lt1"/>
+          </a:fontRef>
+        </p:style>
+        <p:txBody>
+          <a:bodyPr rtlCol="0" anchor="ctr" wrap="square"/>
+          <a:lstStyle/>
+          <a:p>
+            <a:pPr>
+              <a:defRPr sz="1200" b="1">
+                <a:solidFill>
+                  <a:srgbClr val="FFFFFF"/>
+                </a:solidFill>
+              </a:defRPr>
+            </a:pPr>
+            <a:r>
+              <a:t>Takeaway</a:t>
+            </a:r>
+          </a:p>
+          <a:p>
+            <a:pPr>
+              <a:defRPr sz="1000">
+                <a:solidFill>
+                  <a:srgbClr val="E2E8F0"/>
+                </a:solidFill>
+              </a:defRPr>
+            </a:pPr>
+            <a:r>
+              <a:t>Tradeoffs by domain</a:t>
+            </a:r>
+          </a:p>
+        </p:txBody>
+      </p:sp>
+      <p:sp>
+        <p:nvSpPr>
+          <p:cNvPr id="8" name="Rectangle 7"/>
+          <p:cNvSpPr/>
+          <p:nvPr/>
+        </p:nvSpPr>
+        <p:spPr>
+          <a:xfrm>
+            <a:off x="502920" y="2176272"/>
+            <a:ext cx="8138160" cy="54864"/>
+          </a:xfrm>
+          <a:prstGeom prst="rect">
+            <a:avLst/>
+          </a:prstGeom>
+          <a:solidFill>
+            <a:srgbClr val="E2E8F0"/>
+          </a:solidFill>
+          <a:ln>
+            <a:noFill/>
+          </a:ln>
+        </p:spPr>
+        <p:style>
+          <a:lnRef idx="1">
+            <a:schemeClr val="accent1"/>
+          </a:lnRef>
+          <a:fillRef idx="3">
+            <a:schemeClr val="accent1"/>
+          </a:fillRef>
+          <a:effectRef idx="2">
+            <a:schemeClr val="accent1"/>
+          </a:effectRef>
+          <a:fontRef idx="minor">
+            <a:schemeClr val="lt1"/>
+          </a:fontRef>
+        </p:style>
+        <p:txBody>
+          <a:bodyPr rtlCol="0" anchor="ctr"/>
+          <a:lstStyle/>
+          <a:p>
+            <a:pPr algn="ctr"/>
+          </a:p>
+        </p:txBody>
+      </p:sp>
+      <p:sp>
+        <p:nvSpPr>
+          <p:cNvPr id="9" name="Rounded Rectangle 8"/>
+          <p:cNvSpPr/>
+          <p:nvPr/>
+        </p:nvSpPr>
+        <p:spPr>
+          <a:xfrm>
+            <a:off x="548640" y="2304288"/>
+            <a:ext cx="8092440" cy="4160520"/>
+          </a:xfrm>
+          <a:prstGeom prst="roundRect">
+            <a:avLst/>
+          </a:prstGeom>
+          <a:solidFill>
+            <a:srgbClr val="FFFFFF"/>
+          </a:solidFill>
+          <a:ln>
+            <a:solidFill>
+              <a:srgbClr val="CBD5E0"/>
+            </a:solidFill>
+          </a:ln>
+        </p:spPr>
+        <p:style>
+          <a:lnRef idx="1">
+            <a:schemeClr val="accent1"/>
+          </a:lnRef>
+          <a:fillRef idx="3">
+            <a:schemeClr val="accent1"/>
+          </a:fillRef>
+          <a:effectRef idx="2">
+            <a:schemeClr val="accent1"/>
+          </a:effectRef>
+          <a:fontRef idx="minor">
+            <a:schemeClr val="lt1"/>
+          </a:fontRef>
+        </p:style>
+        <p:txBody>
+          <a:bodyPr rtlCol="0" anchor="ctr"/>
+          <a:lstStyle/>
+          <a:p>
+            <a:pPr algn="ctr"/>
+          </a:p>
+        </p:txBody>
+      </p:sp>
+      <p:sp>
+        <p:nvSpPr>
+          <p:cNvPr id="10" name="TextBox 9"/>
           <p:cNvSpPr txBox="1"/>
           <p:nvPr/>
         </p:nvSpPr>
         <p:spPr>
           <a:xfrm>
-            <a:off x="594360" y="1207008"/>
-            <a:ext cx="8092440" cy="5349240"/>
+            <a:off x="685800" y="2395728"/>
+            <a:ext cx="7818120" cy="3977639"/>
           </a:xfrm>
           <a:prstGeom prst="rect">
             <a:avLst/>
@@ -5035,14 +5763,14 @@
               <a:spcAft>
                 <a:spcPts val="600"/>
               </a:spcAft>
-              <a:defRPr sz="1600">
+              <a:defRPr sz="1500">
                 <a:solidFill>
                   <a:srgbClr val="1E3A5F"/>
                 </a:solidFill>
               </a:defRPr>
             </a:pPr>
             <a:r>
-              <a:t>Problem: Organizations need reliable, grounded AI for dense professional text; hallucinations block adoption even when efficiency gains are real.</a:t>
+              <a:t>Problem: Teams need reliable AI on dense professional text; hallucinations stall adoption despite efficiency upside.</a:t>
             </a:r>
           </a:p>
           <a:p>
@@ -5050,14 +5778,14 @@
               <a:spcAft>
                 <a:spcPts val="600"/>
               </a:spcAft>
-              <a:defRPr sz="1600">
+              <a:defRPr sz="1500">
                 <a:solidFill>
                   <a:srgbClr val="1E3A5F"/>
                 </a:solidFill>
               </a:defRPr>
             </a:pPr>
             <a:r>
-              <a:t>What this project did: Built an end-to-end RAG evaluation pipeline and compared multiple system designs on real finance and healthcare documents, with tiered experiments (same-gold vs chunking ablations) and multi-metric scoring.</a:t>
+              <a:t>What we built: An end-to-end RAG evaluation pipeline — tiered experiments (same-gold vs chunking), multi-metric scoring, four real PDF corpora.</a:t>
             </a:r>
           </a:p>
           <a:p>
@@ -5065,14 +5793,14 @@
               <a:spcAft>
                 <a:spcPts val="600"/>
               </a:spcAft>
-              <a:defRPr sz="1600">
+              <a:defRPr sz="1500">
                 <a:solidFill>
                   <a:srgbClr val="1E3A5F"/>
                 </a:solidFill>
               </a:defRPr>
             </a:pPr>
             <a:r>
-              <a:t>What the results suggest: There is no single “best” RAG preset for every industry or metric—narrower retrieval (e.g., k=3) leaned toward lower hallucination flags on average, while richer retrieval plus chain-of-thought leaned toward higher answer correctness but worse average hallucination flags—a tradeoff practitioners must choose explicitly.</a:t>
+              <a:t>What we saw: No single best preset for every metric or genre. Narrower retrieval (e.g., k=3) leaned toward lower hallucination flags on average; richer retrieval + CoT leaned toward higher correctness but higher hallucination flags — a tradeoff to choose explicitly.</a:t>
             </a:r>
           </a:p>
           <a:p>
@@ -5080,14 +5808,14 @@
               <a:spcAft>
                 <a:spcPts val="600"/>
               </a:spcAft>
-              <a:defRPr sz="1600">
+              <a:defRPr sz="1500">
                 <a:solidFill>
                   <a:srgbClr val="1E3A5F"/>
                 </a:solidFill>
               </a:defRPr>
             </a:pPr>
             <a:r>
-              <a:t>Deliverable: A reproducible codebase, logged runs, and aggregated tables/charts that teams can extend with their own PDFs and larger evaluation sets.</a:t>
+              <a:t>Deliverable: Reproducible code, logs, and analysis tables others can extend with their documents and larger n.</a:t>
             </a:r>
           </a:p>
           <a:p>
@@ -5095,14 +5823,14 @@
               <a:spcAft>
                 <a:spcPts val="600"/>
               </a:spcAft>
-              <a:defRPr sz="1600">
+              <a:defRPr sz="1500">
                 <a:solidFill>
                   <a:srgbClr val="1E3A5F"/>
                 </a:solidFill>
               </a:defRPr>
             </a:pPr>
             <a:r>
-              <a:t>Thank you — I am happy to take questions.</a:t>
+              <a:t>Thank you — questions welcome.</a:t>
             </a:r>
           </a:p>
         </p:txBody>

--- a/outputs/presentation/RAG_Hallucination_Capstone.pptx
+++ b/outputs/presentation/RAG_Hallucination_Capstone.pptx
@@ -4807,224 +4807,18 @@
               <a:t>Limitations &amp; next steps</a:t>
             </a:r>
           </a:p>
-          <a:p>
-            <a:pPr>
-              <a:defRPr sz="1400">
-                <a:solidFill>
-                  <a:srgbClr val="E2E8F0"/>
-                </a:solidFill>
-              </a:defRPr>
-            </a:pPr>
-            <a:r>
-              <a:t>Honest scope — and how I would extend the work</a:t>
-            </a:r>
-          </a:p>
-        </p:txBody>
-      </p:sp>
-      <p:sp>
-        <p:nvSpPr>
-          <p:cNvPr id="3" name="Rounded Rectangle 2"/>
-          <p:cNvSpPr/>
+        </p:txBody>
+      </p:sp>
+      <p:sp>
+        <p:nvSpPr>
+          <p:cNvPr id="3" name="TextBox 2"/>
+          <p:cNvSpPr txBox="1"/>
           <p:nvPr/>
         </p:nvSpPr>
         <p:spPr>
           <a:xfrm>
-            <a:off x="502920" y="1170432"/>
-            <a:ext cx="4069080" cy="5257800"/>
-          </a:xfrm>
-          <a:prstGeom prst="roundRect">
-            <a:avLst/>
-          </a:prstGeom>
-          <a:solidFill>
-            <a:srgbClr val="FFF7F5"/>
-          </a:solidFill>
-          <a:ln>
-            <a:solidFill>
-              <a:srgbClr val="FEE2E2"/>
-            </a:solidFill>
-          </a:ln>
-        </p:spPr>
-        <p:style>
-          <a:lnRef idx="1">
-            <a:schemeClr val="accent1"/>
-          </a:lnRef>
-          <a:fillRef idx="3">
-            <a:schemeClr val="accent1"/>
-          </a:fillRef>
-          <a:effectRef idx="2">
-            <a:schemeClr val="accent1"/>
-          </a:effectRef>
-          <a:fontRef idx="minor">
-            <a:schemeClr val="lt1"/>
-          </a:fontRef>
-        </p:style>
-        <p:txBody>
-          <a:bodyPr rtlCol="0" anchor="ctr"/>
-          <a:lstStyle/>
-          <a:p>
-            <a:pPr algn="ctr"/>
-          </a:p>
-        </p:txBody>
-      </p:sp>
-      <p:sp>
-        <p:nvSpPr>
-          <p:cNvPr id="4" name="Rounded Rectangle 3"/>
-          <p:cNvSpPr/>
-          <p:nvPr/>
-        </p:nvSpPr>
-        <p:spPr>
-          <a:xfrm>
-            <a:off x="4663440" y="1170432"/>
-            <a:ext cx="4023360" cy="5257800"/>
-          </a:xfrm>
-          <a:prstGeom prst="roundRect">
-            <a:avLst/>
-          </a:prstGeom>
-          <a:solidFill>
-            <a:srgbClr val="F0FDF4"/>
-          </a:solidFill>
-          <a:ln>
-            <a:solidFill>
-              <a:srgbClr val="BBF7D0"/>
-            </a:solidFill>
-          </a:ln>
-        </p:spPr>
-        <p:style>
-          <a:lnRef idx="1">
-            <a:schemeClr val="accent1"/>
-          </a:lnRef>
-          <a:fillRef idx="3">
-            <a:schemeClr val="accent1"/>
-          </a:fillRef>
-          <a:effectRef idx="2">
-            <a:schemeClr val="accent1"/>
-          </a:effectRef>
-          <a:fontRef idx="minor">
-            <a:schemeClr val="lt1"/>
-          </a:fontRef>
-        </p:style>
-        <p:txBody>
-          <a:bodyPr rtlCol="0" anchor="ctr"/>
-          <a:lstStyle/>
-          <a:p>
-            <a:pPr algn="ctr"/>
-          </a:p>
-        </p:txBody>
-      </p:sp>
-      <p:sp>
-        <p:nvSpPr>
-          <p:cNvPr id="5" name="Oval 4"/>
-          <p:cNvSpPr/>
-          <p:nvPr/>
-        </p:nvSpPr>
-        <p:spPr>
-          <a:xfrm>
-            <a:off x="640080" y="1261872"/>
-            <a:ext cx="347472" cy="347472"/>
-          </a:xfrm>
-          <a:prstGeom prst="ellipse">
-            <a:avLst/>
-          </a:prstGeom>
-          <a:solidFill>
-            <a:srgbClr val="C05621"/>
-          </a:solidFill>
-          <a:ln>
-            <a:noFill/>
-          </a:ln>
-        </p:spPr>
-        <p:style>
-          <a:lnRef idx="1">
-            <a:schemeClr val="accent1"/>
-          </a:lnRef>
-          <a:fillRef idx="3">
-            <a:schemeClr val="accent1"/>
-          </a:fillRef>
-          <a:effectRef idx="2">
-            <a:schemeClr val="accent1"/>
-          </a:effectRef>
-          <a:fontRef idx="minor">
-            <a:schemeClr val="lt1"/>
-          </a:fontRef>
-        </p:style>
-        <p:txBody>
-          <a:bodyPr rtlCol="0" anchor="ctr"/>
-          <a:lstStyle/>
-          <a:p>
-            <a:pPr algn="ctr">
-              <a:defRPr sz="1300" b="1">
-                <a:solidFill>
-                  <a:srgbClr val="FFFFFF"/>
-                </a:solidFill>
-              </a:defRPr>
-            </a:pPr>
-            <a:r>
-              <a:t>!</a:t>
-            </a:r>
-          </a:p>
-        </p:txBody>
-      </p:sp>
-      <p:sp>
-        <p:nvSpPr>
-          <p:cNvPr id="6" name="Oval 5"/>
-          <p:cNvSpPr/>
-          <p:nvPr/>
-        </p:nvSpPr>
-        <p:spPr>
-          <a:xfrm>
-            <a:off x="4800600" y="1261872"/>
-            <a:ext cx="347472" cy="347472"/>
-          </a:xfrm>
-          <a:prstGeom prst="ellipse">
-            <a:avLst/>
-          </a:prstGeom>
-          <a:solidFill>
-            <a:srgbClr val="276F47"/>
-          </a:solidFill>
-          <a:ln>
-            <a:noFill/>
-          </a:ln>
-        </p:spPr>
-        <p:style>
-          <a:lnRef idx="1">
-            <a:schemeClr val="accent1"/>
-          </a:lnRef>
-          <a:fillRef idx="3">
-            <a:schemeClr val="accent1"/>
-          </a:fillRef>
-          <a:effectRef idx="2">
-            <a:schemeClr val="accent1"/>
-          </a:effectRef>
-          <a:fontRef idx="minor">
-            <a:schemeClr val="lt1"/>
-          </a:fontRef>
-        </p:style>
-        <p:txBody>
-          <a:bodyPr rtlCol="0" anchor="ctr"/>
-          <a:lstStyle/>
-          <a:p>
-            <a:pPr algn="ctr">
-              <a:defRPr sz="1300" b="1">
-                <a:solidFill>
-                  <a:srgbClr val="FFFFFF"/>
-                </a:solidFill>
-              </a:defRPr>
-            </a:pPr>
-            <a:r>
-              <a:t>→</a:t>
-            </a:r>
-          </a:p>
-        </p:txBody>
-      </p:sp>
-      <p:sp>
-        <p:nvSpPr>
-          <p:cNvPr id="7" name="TextBox 6"/>
-          <p:cNvSpPr txBox="1"/>
-          <p:nvPr/>
-        </p:nvSpPr>
-        <p:spPr>
-          <a:xfrm>
-            <a:off x="1051560" y="1243584"/>
-            <a:ext cx="3291840" cy="365760"/>
+            <a:off x="685800" y="1325880"/>
+            <a:ext cx="7772400" cy="5029200"/>
           </a:xfrm>
           <a:prstGeom prst="rect">
             <a:avLst/>
@@ -5032,76 +4826,6 @@
           <a:noFill/>
         </p:spPr>
         <p:txBody>
-          <a:bodyPr wrap="none">
-            <a:spAutoFit/>
-          </a:bodyPr>
-          <a:lstStyle/>
-          <a:p>
-            <a:pPr>
-              <a:defRPr sz="1300" b="1">
-                <a:solidFill>
-                  <a:srgbClr val="1E3A5F"/>
-                </a:solidFill>
-              </a:defRPr>
-            </a:pPr>
-            <a:r>
-              <a:t>What this study does not fully establish</a:t>
-            </a:r>
-          </a:p>
-        </p:txBody>
-      </p:sp>
-      <p:sp>
-        <p:nvSpPr>
-          <p:cNvPr id="8" name="TextBox 7"/>
-          <p:cNvSpPr txBox="1"/>
-          <p:nvPr/>
-        </p:nvSpPr>
-        <p:spPr>
-          <a:xfrm>
-            <a:off x="5212080" y="1243584"/>
-            <a:ext cx="3200400" cy="365760"/>
-          </a:xfrm>
-          <a:prstGeom prst="rect">
-            <a:avLst/>
-          </a:prstGeom>
-          <a:noFill/>
-        </p:spPr>
-        <p:txBody>
-          <a:bodyPr wrap="none">
-            <a:spAutoFit/>
-          </a:bodyPr>
-          <a:lstStyle/>
-          <a:p>
-            <a:pPr>
-              <a:defRPr sz="1300" b="1">
-                <a:solidFill>
-                  <a:srgbClr val="1E3A5F"/>
-                </a:solidFill>
-              </a:defRPr>
-            </a:pPr>
-            <a:r>
-              <a:t>Natural extensions of the work</a:t>
-            </a:r>
-          </a:p>
-        </p:txBody>
-      </p:sp>
-      <p:sp>
-        <p:nvSpPr>
-          <p:cNvPr id="9" name="TextBox 8"/>
-          <p:cNvSpPr txBox="1"/>
-          <p:nvPr/>
-        </p:nvSpPr>
-        <p:spPr>
-          <a:xfrm>
-            <a:off x="658368" y="1719072"/>
-            <a:ext cx="3794760" cy="4572000"/>
-          </a:xfrm>
-          <a:prstGeom prst="rect">
-            <a:avLst/>
-          </a:prstGeom>
-          <a:noFill/>
-        </p:spPr>
-        <p:txBody>
           <a:bodyPr wrap="square">
             <a:spAutoFit/>
           </a:bodyPr>
@@ -5111,14 +4835,14 @@
               <a:spcAft>
                 <a:spcPts val="600"/>
               </a:spcAft>
-              <a:defRPr sz="1200">
+              <a:defRPr sz="1800">
                 <a:solidFill>
                   <a:srgbClr val="4A5568"/>
                 </a:solidFill>
               </a:defRPr>
             </a:pPr>
             <a:r>
-              <a:t>Sample size: 10 evaluated questions per experiment per corpus — good for directional patterns, not for significance; a few hard items can move averages.</a:t>
+              <a:t>n=10 questions / experiment — exploratory, not definitive.</a:t>
             </a:r>
           </a:p>
           <a:p>
@@ -5126,14 +4850,14 @@
               <a:spcAft>
                 <a:spcPts val="600"/>
               </a:spcAft>
-              <a:defRPr sz="1200">
+              <a:defRPr sz="1800">
                 <a:solidFill>
                   <a:srgbClr val="4A5568"/>
                 </a:solidFill>
               </a:defRPr>
             </a:pPr>
             <a:r>
-              <a:t>Generalization: Four PDFs (two 10-Ks, two FDA labels) illustrate two genres, not all of finance or healthcare (e.g., calls, clinical notes, other regulators).</a:t>
+              <a:t>Four PDFs — illustrative genres, not all of finance or healthcare.</a:t>
             </a:r>
           </a:p>
           <a:p>
@@ -5141,14 +4865,14 @@
               <a:spcAft>
                 <a:spcPts val="600"/>
               </a:spcAft>
-              <a:defRPr sz="1200">
+              <a:defRPr sz="1800">
                 <a:solidFill>
                   <a:srgbClr val="4A5568"/>
                 </a:solidFill>
               </a:defRPr>
             </a:pPr>
             <a:r>
-              <a:t>Metrics: LLM judges and RAGAS depend on model settings; they can disagree. Rule metrics (recall, citations) are stable but incomplete. Human spot-checks would strengthen claims.</a:t>
+              <a:t>LLM judges add variance; triangulate with rule-based metrics.</a:t>
             </a:r>
           </a:p>
           <a:p>
@@ -5156,127 +4880,14 @@
               <a:spcAft>
                 <a:spcPts val="600"/>
               </a:spcAft>
-              <a:defRPr sz="1200">
+              <a:defRPr sz="1800">
                 <a:solidFill>
                   <a:srgbClr val="4A5568"/>
                 </a:solidFill>
               </a:defRPr>
             </a:pPr>
             <a:r>
-              <a:t>Operations: Depends on OpenAI / LlamaParse availability, cost, and rate limits; reproducing runs needs the same stack or documented substitutes.</a:t>
-            </a:r>
-          </a:p>
-        </p:txBody>
-      </p:sp>
-      <p:sp>
-        <p:nvSpPr>
-          <p:cNvPr id="10" name="TextBox 9"/>
-          <p:cNvSpPr txBox="1"/>
-          <p:nvPr/>
-        </p:nvSpPr>
-        <p:spPr>
-          <a:xfrm>
-            <a:off x="4773168" y="1719072"/>
-            <a:ext cx="3657600" cy="4572000"/>
-          </a:xfrm>
-          <a:prstGeom prst="rect">
-            <a:avLst/>
-          </a:prstGeom>
-          <a:noFill/>
-        </p:spPr>
-        <p:txBody>
-          <a:bodyPr wrap="square">
-            <a:spAutoFit/>
-          </a:bodyPr>
-          <a:lstStyle/>
-          <a:p>
-            <a:pPr>
-              <a:spcAft>
-                <a:spcPts val="600"/>
-              </a:spcAft>
-              <a:defRPr sz="1200">
-                <a:solidFill>
-                  <a:srgbClr val="4A5568"/>
-                </a:solidFill>
-              </a:defRPr>
-            </a:pPr>
-            <a:r>
-              <a:t>Prioritized next steps:</a:t>
-            </a:r>
-          </a:p>
-          <a:p>
-            <a:pPr>
-              <a:spcAft>
-                <a:spcPts val="600"/>
-              </a:spcAft>
-              <a:defRPr sz="1200">
-                <a:solidFill>
-                  <a:srgbClr val="4A5568"/>
-                </a:solidFill>
-              </a:defRPr>
-            </a:pPr>
-            <a:r>
-              <a:t>(1) Larger n + confidence intervals or bootstrap bands.</a:t>
-            </a:r>
-          </a:p>
-          <a:p>
-            <a:pPr>
-              <a:spcAft>
-                <a:spcPts val="600"/>
-              </a:spcAft>
-              <a:defRPr sz="1200">
-                <a:solidFill>
-                  <a:srgbClr val="4A5568"/>
-                </a:solidFill>
-              </a:defRPr>
-            </a:pPr>
-            <a:r>
-              <a:t>(2) More corpora per genre and out-of-sample documents.</a:t>
-            </a:r>
-          </a:p>
-          <a:p>
-            <a:pPr>
-              <a:spcAft>
-                <a:spcPts val="600"/>
-              </a:spcAft>
-              <a:defRPr sz="1200">
-                <a:solidFill>
-                  <a:srgbClr val="4A5568"/>
-                </a:solidFill>
-              </a:defRPr>
-            </a:pPr>
-            <a:r>
-              <a:t>(3) Optional stratified human evaluation on failure cases.</a:t>
-            </a:r>
-          </a:p>
-          <a:p>
-            <a:pPr>
-              <a:spcAft>
-                <a:spcPts val="600"/>
-              </a:spcAft>
-              <a:defRPr sz="1200">
-                <a:solidFill>
-                  <a:srgbClr val="4A5568"/>
-                </a:solidFill>
-              </a:defRPr>
-            </a:pPr>
-            <a:r>
-              <a:t>(4) More rerankers and abstention / citation policies.</a:t>
-            </a:r>
-          </a:p>
-          <a:p>
-            <a:pPr>
-              <a:spcAft>
-                <a:spcPts val="600"/>
-              </a:spcAft>
-              <a:defRPr sz="1200">
-                <a:solidFill>
-                  <a:srgbClr val="4A5568"/>
-                </a:solidFill>
-              </a:defRPr>
-            </a:pPr>
-            <a:r>
-              <a:t>(5) Chunking defaults informed by Tier B–style ablations at scale.</a:t>
+              <a:t>Next: larger n, confidence intervals, more rerankers &amp; abstention policies.</a:t>
             </a:r>
           </a:p>
         </p:txBody>
@@ -5357,396 +4968,18 @@
               <a:t>Conclusion</a:t>
             </a:r>
           </a:p>
-          <a:p>
-            <a:pPr>
-              <a:defRPr sz="1400">
-                <a:solidFill>
-                  <a:srgbClr val="E2E8F0"/>
-                </a:solidFill>
-              </a:defRPr>
-            </a:pPr>
-            <a:r>
-              <a:t>What we set out to do — what we learned</a:t>
-            </a:r>
-          </a:p>
-        </p:txBody>
-      </p:sp>
-      <p:sp>
-        <p:nvSpPr>
-          <p:cNvPr id="3" name="Rounded Rectangle 2"/>
-          <p:cNvSpPr/>
+        </p:txBody>
+      </p:sp>
+      <p:sp>
+        <p:nvSpPr>
+          <p:cNvPr id="3" name="TextBox 2"/>
+          <p:cNvSpPr txBox="1"/>
           <p:nvPr/>
         </p:nvSpPr>
         <p:spPr>
           <a:xfrm>
-            <a:off x="800100" y="1207008"/>
-            <a:ext cx="2148840" cy="868680"/>
-          </a:xfrm>
-          <a:prstGeom prst="roundRect">
-            <a:avLst/>
-          </a:prstGeom>
-          <a:solidFill>
-            <a:srgbClr val="1E3A5F"/>
-          </a:solidFill>
-          <a:ln>
-            <a:noFill/>
-          </a:ln>
-        </p:spPr>
-        <p:style>
-          <a:lnRef idx="1">
-            <a:schemeClr val="accent1"/>
-          </a:lnRef>
-          <a:fillRef idx="3">
-            <a:schemeClr val="accent1"/>
-          </a:fillRef>
-          <a:effectRef idx="2">
-            <a:schemeClr val="accent1"/>
-          </a:effectRef>
-          <a:fontRef idx="minor">
-            <a:schemeClr val="lt1"/>
-          </a:fontRef>
-        </p:style>
-        <p:txBody>
-          <a:bodyPr rtlCol="0" anchor="ctr" wrap="square"/>
-          <a:lstStyle/>
-          <a:p>
-            <a:pPr>
-              <a:defRPr sz="1200" b="1">
-                <a:solidFill>
-                  <a:srgbClr val="FFFFFF"/>
-                </a:solidFill>
-              </a:defRPr>
-            </a:pPr>
-            <a:r>
-              <a:t>Industry need</a:t>
-            </a:r>
-          </a:p>
-          <a:p>
-            <a:pPr>
-              <a:defRPr sz="1000">
-                <a:solidFill>
-                  <a:srgbClr val="E2E8F0"/>
-                </a:solidFill>
-              </a:defRPr>
-            </a:pPr>
-            <a:r>
-              <a:t>Trust &amp; grounded answers</a:t>
-            </a:r>
-          </a:p>
-        </p:txBody>
-      </p:sp>
-      <p:sp>
-        <p:nvSpPr>
-          <p:cNvPr id="4" name="Right Arrow 3"/>
-          <p:cNvSpPr/>
-          <p:nvPr/>
-        </p:nvSpPr>
-        <p:spPr>
-          <a:xfrm>
-            <a:off x="3049524" y="1540763"/>
-            <a:ext cx="347472" cy="201168"/>
-          </a:xfrm>
-          <a:prstGeom prst="rightArrow">
-            <a:avLst/>
-          </a:prstGeom>
-          <a:solidFill>
-            <a:srgbClr val="A0AEC0"/>
-          </a:solidFill>
-          <a:ln>
-            <a:noFill/>
-          </a:ln>
-        </p:spPr>
-        <p:style>
-          <a:lnRef idx="1">
-            <a:schemeClr val="accent1"/>
-          </a:lnRef>
-          <a:fillRef idx="3">
-            <a:schemeClr val="accent1"/>
-          </a:fillRef>
-          <a:effectRef idx="2">
-            <a:schemeClr val="accent1"/>
-          </a:effectRef>
-          <a:fontRef idx="minor">
-            <a:schemeClr val="lt1"/>
-          </a:fontRef>
-        </p:style>
-        <p:txBody>
-          <a:bodyPr rtlCol="0" anchor="ctr"/>
-          <a:lstStyle/>
-          <a:p>
-            <a:pPr algn="ctr"/>
-          </a:p>
-        </p:txBody>
-      </p:sp>
-      <p:sp>
-        <p:nvSpPr>
-          <p:cNvPr id="5" name="Rounded Rectangle 4"/>
-          <p:cNvSpPr/>
-          <p:nvPr/>
-        </p:nvSpPr>
-        <p:spPr>
-          <a:xfrm>
-            <a:off x="3497580" y="1207008"/>
-            <a:ext cx="2148840" cy="868680"/>
-          </a:xfrm>
-          <a:prstGeom prst="roundRect">
-            <a:avLst/>
-          </a:prstGeom>
-          <a:solidFill>
-            <a:srgbClr val="2B7CA8"/>
-          </a:solidFill>
-          <a:ln>
-            <a:noFill/>
-          </a:ln>
-        </p:spPr>
-        <p:style>
-          <a:lnRef idx="1">
-            <a:schemeClr val="accent1"/>
-          </a:lnRef>
-          <a:fillRef idx="3">
-            <a:schemeClr val="accent1"/>
-          </a:fillRef>
-          <a:effectRef idx="2">
-            <a:schemeClr val="accent1"/>
-          </a:effectRef>
-          <a:fontRef idx="minor">
-            <a:schemeClr val="lt1"/>
-          </a:fontRef>
-        </p:style>
-        <p:txBody>
-          <a:bodyPr rtlCol="0" anchor="ctr" wrap="square"/>
-          <a:lstStyle/>
-          <a:p>
-            <a:pPr>
-              <a:defRPr sz="1200" b="1">
-                <a:solidFill>
-                  <a:srgbClr val="FFFFFF"/>
-                </a:solidFill>
-              </a:defRPr>
-            </a:pPr>
-            <a:r>
-              <a:t>This study</a:t>
-            </a:r>
-          </a:p>
-          <a:p>
-            <a:pPr>
-              <a:defRPr sz="1000">
-                <a:solidFill>
-                  <a:srgbClr val="E2E8F0"/>
-                </a:solidFill>
-              </a:defRPr>
-            </a:pPr>
-            <a:r>
-              <a:t>Controlled RAG comparison</a:t>
-            </a:r>
-          </a:p>
-        </p:txBody>
-      </p:sp>
-      <p:sp>
-        <p:nvSpPr>
-          <p:cNvPr id="6" name="Right Arrow 5"/>
-          <p:cNvSpPr/>
-          <p:nvPr/>
-        </p:nvSpPr>
-        <p:spPr>
-          <a:xfrm>
-            <a:off x="5747004" y="1540763"/>
-            <a:ext cx="347472" cy="201168"/>
-          </a:xfrm>
-          <a:prstGeom prst="rightArrow">
-            <a:avLst/>
-          </a:prstGeom>
-          <a:solidFill>
-            <a:srgbClr val="A0AEC0"/>
-          </a:solidFill>
-          <a:ln>
-            <a:noFill/>
-          </a:ln>
-        </p:spPr>
-        <p:style>
-          <a:lnRef idx="1">
-            <a:schemeClr val="accent1"/>
-          </a:lnRef>
-          <a:fillRef idx="3">
-            <a:schemeClr val="accent1"/>
-          </a:fillRef>
-          <a:effectRef idx="2">
-            <a:schemeClr val="accent1"/>
-          </a:effectRef>
-          <a:fontRef idx="minor">
-            <a:schemeClr val="lt1"/>
-          </a:fontRef>
-        </p:style>
-        <p:txBody>
-          <a:bodyPr rtlCol="0" anchor="ctr"/>
-          <a:lstStyle/>
-          <a:p>
-            <a:pPr algn="ctr"/>
-          </a:p>
-        </p:txBody>
-      </p:sp>
-      <p:sp>
-        <p:nvSpPr>
-          <p:cNvPr id="7" name="Rounded Rectangle 6"/>
-          <p:cNvSpPr/>
-          <p:nvPr/>
-        </p:nvSpPr>
-        <p:spPr>
-          <a:xfrm>
-            <a:off x="6195060" y="1207008"/>
-            <a:ext cx="2148840" cy="868680"/>
-          </a:xfrm>
-          <a:prstGeom prst="roundRect">
-            <a:avLst/>
-          </a:prstGeom>
-          <a:solidFill>
-            <a:srgbClr val="276F47"/>
-          </a:solidFill>
-          <a:ln>
-            <a:noFill/>
-          </a:ln>
-        </p:spPr>
-        <p:style>
-          <a:lnRef idx="1">
-            <a:schemeClr val="accent1"/>
-          </a:lnRef>
-          <a:fillRef idx="3">
-            <a:schemeClr val="accent1"/>
-          </a:fillRef>
-          <a:effectRef idx="2">
-            <a:schemeClr val="accent1"/>
-          </a:effectRef>
-          <a:fontRef idx="minor">
-            <a:schemeClr val="lt1"/>
-          </a:fontRef>
-        </p:style>
-        <p:txBody>
-          <a:bodyPr rtlCol="0" anchor="ctr" wrap="square"/>
-          <a:lstStyle/>
-          <a:p>
-            <a:pPr>
-              <a:defRPr sz="1200" b="1">
-                <a:solidFill>
-                  <a:srgbClr val="FFFFFF"/>
-                </a:solidFill>
-              </a:defRPr>
-            </a:pPr>
-            <a:r>
-              <a:t>Takeaway</a:t>
-            </a:r>
-          </a:p>
-          <a:p>
-            <a:pPr>
-              <a:defRPr sz="1000">
-                <a:solidFill>
-                  <a:srgbClr val="E2E8F0"/>
-                </a:solidFill>
-              </a:defRPr>
-            </a:pPr>
-            <a:r>
-              <a:t>Tradeoffs by domain</a:t>
-            </a:r>
-          </a:p>
-        </p:txBody>
-      </p:sp>
-      <p:sp>
-        <p:nvSpPr>
-          <p:cNvPr id="8" name="Rectangle 7"/>
-          <p:cNvSpPr/>
-          <p:nvPr/>
-        </p:nvSpPr>
-        <p:spPr>
-          <a:xfrm>
-            <a:off x="502920" y="2176272"/>
-            <a:ext cx="8138160" cy="54864"/>
-          </a:xfrm>
-          <a:prstGeom prst="rect">
-            <a:avLst/>
-          </a:prstGeom>
-          <a:solidFill>
-            <a:srgbClr val="E2E8F0"/>
-          </a:solidFill>
-          <a:ln>
-            <a:noFill/>
-          </a:ln>
-        </p:spPr>
-        <p:style>
-          <a:lnRef idx="1">
-            <a:schemeClr val="accent1"/>
-          </a:lnRef>
-          <a:fillRef idx="3">
-            <a:schemeClr val="accent1"/>
-          </a:fillRef>
-          <a:effectRef idx="2">
-            <a:schemeClr val="accent1"/>
-          </a:effectRef>
-          <a:fontRef idx="minor">
-            <a:schemeClr val="lt1"/>
-          </a:fontRef>
-        </p:style>
-        <p:txBody>
-          <a:bodyPr rtlCol="0" anchor="ctr"/>
-          <a:lstStyle/>
-          <a:p>
-            <a:pPr algn="ctr"/>
-          </a:p>
-        </p:txBody>
-      </p:sp>
-      <p:sp>
-        <p:nvSpPr>
-          <p:cNvPr id="9" name="Rounded Rectangle 8"/>
-          <p:cNvSpPr/>
-          <p:nvPr/>
-        </p:nvSpPr>
-        <p:spPr>
-          <a:xfrm>
-            <a:off x="548640" y="2304288"/>
-            <a:ext cx="8092440" cy="4160520"/>
-          </a:xfrm>
-          <a:prstGeom prst="roundRect">
-            <a:avLst/>
-          </a:prstGeom>
-          <a:solidFill>
-            <a:srgbClr val="FFFFFF"/>
-          </a:solidFill>
-          <a:ln>
-            <a:solidFill>
-              <a:srgbClr val="CBD5E0"/>
-            </a:solidFill>
-          </a:ln>
-        </p:spPr>
-        <p:style>
-          <a:lnRef idx="1">
-            <a:schemeClr val="accent1"/>
-          </a:lnRef>
-          <a:fillRef idx="3">
-            <a:schemeClr val="accent1"/>
-          </a:fillRef>
-          <a:effectRef idx="2">
-            <a:schemeClr val="accent1"/>
-          </a:effectRef>
-          <a:fontRef idx="minor">
-            <a:schemeClr val="lt1"/>
-          </a:fontRef>
-        </p:style>
-        <p:txBody>
-          <a:bodyPr rtlCol="0" anchor="ctr"/>
-          <a:lstStyle/>
-          <a:p>
-            <a:pPr algn="ctr"/>
-          </a:p>
-        </p:txBody>
-      </p:sp>
-      <p:sp>
-        <p:nvSpPr>
-          <p:cNvPr id="10" name="TextBox 9"/>
-          <p:cNvSpPr txBox="1"/>
-          <p:nvPr/>
-        </p:nvSpPr>
-        <p:spPr>
-          <a:xfrm>
-            <a:off x="685800" y="2395728"/>
-            <a:ext cx="7818120" cy="3977639"/>
+            <a:off x="777240" y="1417320"/>
+            <a:ext cx="7589520" cy="4572000"/>
           </a:xfrm>
           <a:prstGeom prst="rect">
             <a:avLst/>
@@ -5763,14 +4996,14 @@
               <a:spcAft>
                 <a:spcPts val="600"/>
               </a:spcAft>
-              <a:defRPr sz="1500">
+              <a:defRPr sz="2200">
                 <a:solidFill>
                   <a:srgbClr val="1E3A5F"/>
                 </a:solidFill>
               </a:defRPr>
             </a:pPr>
             <a:r>
-              <a:t>Problem: Teams need reliable AI on dense professional text; hallucinations stall adoption despite efficiency upside.</a:t>
+              <a:t>RAG design choices shift grounding vs correctness — differently on 10-Ks vs FDA labels.</a:t>
             </a:r>
           </a:p>
           <a:p>
@@ -5778,14 +5011,14 @@
               <a:spcAft>
                 <a:spcPts val="600"/>
               </a:spcAft>
-              <a:defRPr sz="1500">
+              <a:defRPr sz="2200">
                 <a:solidFill>
                   <a:srgbClr val="1E3A5F"/>
                 </a:solidFill>
               </a:defRPr>
             </a:pPr>
             <a:r>
-              <a:t>What we built: An end-to-end RAG evaluation pipeline — tiered experiments (same-gold vs chunking), multi-metric scoring, four real PDF corpora.</a:t>
+              <a:t>Deliverable: reproducible pipeline + data-driven comparison tables for practitioners.</a:t>
             </a:r>
           </a:p>
           <a:p>
@@ -5793,44 +5026,14 @@
               <a:spcAft>
                 <a:spcPts val="600"/>
               </a:spcAft>
-              <a:defRPr sz="1500">
+              <a:defRPr sz="2200">
                 <a:solidFill>
                   <a:srgbClr val="1E3A5F"/>
                 </a:solidFill>
               </a:defRPr>
             </a:pPr>
             <a:r>
-              <a:t>What we saw: No single best preset for every metric or genre. Narrower retrieval (e.g., k=3) leaned toward lower hallucination flags on average; richer retrieval + CoT leaned toward higher correctness but higher hallucination flags — a tradeoff to choose explicitly.</a:t>
-            </a:r>
-          </a:p>
-          <a:p>
-            <a:pPr>
-              <a:spcAft>
-                <a:spcPts val="600"/>
-              </a:spcAft>
-              <a:defRPr sz="1500">
-                <a:solidFill>
-                  <a:srgbClr val="1E3A5F"/>
-                </a:solidFill>
-              </a:defRPr>
-            </a:pPr>
-            <a:r>
-              <a:t>Deliverable: Reproducible code, logs, and analysis tables others can extend with their documents and larger n.</a:t>
-            </a:r>
-          </a:p>
-          <a:p>
-            <a:pPr>
-              <a:spcAft>
-                <a:spcPts val="600"/>
-              </a:spcAft>
-              <a:defRPr sz="1500">
-                <a:solidFill>
-                  <a:srgbClr val="1E3A5F"/>
-                </a:solidFill>
-              </a:defRPr>
-            </a:pPr>
-            <a:r>
-              <a:t>Thank you — questions welcome.</a:t>
+              <a:t>Thank you — questions?</a:t>
             </a:r>
           </a:p>
         </p:txBody>
